--- a/GPP_ZombieAI_DeRonBauwen_2DAE19.pptx
+++ b/GPP_ZombieAI_DeRonBauwen_2DAE19.pptx
@@ -291,7 +291,7 @@
               </a:lnSpc>
               <a:buNone/>
             </a:pPr>
-            <a:fld id="{92A92683-43CC-4909-972E-025FFC59BC8A}" type="slidenum">
+            <a:fld id="{A5910760-1639-43DB-9710-41F6CD8801F0}" type="slidenum">
               <a:rPr lang="en-BE" sz="1200" b="0" u="none" strike="noStrike">
                 <a:solidFill>
                   <a:schemeClr val="dk1">
@@ -1129,7 +1129,7 @@
               </a:lnSpc>
               <a:buNone/>
             </a:pPr>
-            <a:fld id="{489026F9-8F3C-47AA-9236-07AE45156985}" type="slidenum">
+            <a:fld id="{C25645AA-13C2-4CA6-B8D5-0651A4D702FF}" type="slidenum">
               <a:rPr lang="en-BE" sz="1200" b="0" u="none" strike="noStrike">
                 <a:solidFill>
                   <a:schemeClr val="dk1">
@@ -1768,7 +1768,7 @@
               </a:lnSpc>
               <a:buNone/>
             </a:pPr>
-            <a:fld id="{B6B24FDE-919A-4FD9-AA73-B63DEBD6EB79}" type="slidenum">
+            <a:fld id="{C5A559C0-F7A9-4317-8C4A-609FB5CA57F8}" type="slidenum">
               <a:rPr lang="en-BE" sz="1200" b="0" u="none" strike="noStrike">
                 <a:solidFill>
                   <a:schemeClr val="dk1">
@@ -1927,128 +1927,7 @@
                 <a:uFillTx/>
                 <a:latin typeface="Calibri"/>
               </a:rPr>
-              <a:t>Cli</a:t>
-            </a:r>
-            <a:r>
-              <a:rPr lang="en-US" sz="2800" b="0" u="none" strike="noStrike">
-                <a:solidFill>
-                  <a:schemeClr val="dk1"/>
-                </a:solidFill>
-                <a:effectLst/>
-                <a:uFillTx/>
-                <a:latin typeface="Calibri"/>
-              </a:rPr>
-              <a:t>ck </a:t>
-            </a:r>
-            <a:r>
-              <a:rPr lang="en-US" sz="2800" b="0" u="none" strike="noStrike">
-                <a:solidFill>
-                  <a:schemeClr val="dk1"/>
-                </a:solidFill>
-                <a:effectLst/>
-                <a:uFillTx/>
-                <a:latin typeface="Calibri"/>
-              </a:rPr>
-              <a:t>to </a:t>
-            </a:r>
-            <a:r>
-              <a:rPr lang="en-US" sz="2800" b="0" u="none" strike="noStrike">
-                <a:solidFill>
-                  <a:schemeClr val="dk1"/>
-                </a:solidFill>
-                <a:effectLst/>
-                <a:uFillTx/>
-                <a:latin typeface="Calibri"/>
-              </a:rPr>
-              <a:t>edi</a:t>
-            </a:r>
-            <a:r>
-              <a:rPr lang="en-US" sz="2800" b="0" u="none" strike="noStrike">
-                <a:solidFill>
-                  <a:schemeClr val="dk1"/>
-                </a:solidFill>
-                <a:effectLst/>
-                <a:uFillTx/>
-                <a:latin typeface="Calibri"/>
-              </a:rPr>
-              <a:t>t </a:t>
-            </a:r>
-            <a:r>
-              <a:rPr lang="en-US" sz="2800" b="0" u="none" strike="noStrike">
-                <a:solidFill>
-                  <a:schemeClr val="dk1"/>
-                </a:solidFill>
-                <a:effectLst/>
-                <a:uFillTx/>
-                <a:latin typeface="Calibri"/>
-              </a:rPr>
-              <a:t>Ma</a:t>
-            </a:r>
-            <a:r>
-              <a:rPr lang="en-US" sz="2800" b="0" u="none" strike="noStrike">
-                <a:solidFill>
-                  <a:schemeClr val="dk1"/>
-                </a:solidFill>
-                <a:effectLst/>
-                <a:uFillTx/>
-                <a:latin typeface="Calibri"/>
-              </a:rPr>
-              <a:t>ste</a:t>
-            </a:r>
-            <a:r>
-              <a:rPr lang="en-US" sz="2800" b="0" u="none" strike="noStrike">
-                <a:solidFill>
-                  <a:schemeClr val="dk1"/>
-                </a:solidFill>
-                <a:effectLst/>
-                <a:uFillTx/>
-                <a:latin typeface="Calibri"/>
-              </a:rPr>
-              <a:t>r </a:t>
-            </a:r>
-            <a:r>
-              <a:rPr lang="en-US" sz="2800" b="0" u="none" strike="noStrike">
-                <a:solidFill>
-                  <a:schemeClr val="dk1"/>
-                </a:solidFill>
-                <a:effectLst/>
-                <a:uFillTx/>
-                <a:latin typeface="Calibri"/>
-              </a:rPr>
-              <a:t>tex</a:t>
-            </a:r>
-            <a:r>
-              <a:rPr lang="en-US" sz="2800" b="0" u="none" strike="noStrike">
-                <a:solidFill>
-                  <a:schemeClr val="dk1"/>
-                </a:solidFill>
-                <a:effectLst/>
-                <a:uFillTx/>
-                <a:latin typeface="Calibri"/>
-              </a:rPr>
-              <a:t>t </a:t>
-            </a:r>
-            <a:r>
-              <a:rPr lang="en-US" sz="2800" b="0" u="none" strike="noStrike">
-                <a:solidFill>
-                  <a:schemeClr val="dk1"/>
-                </a:solidFill>
-                <a:effectLst/>
-                <a:uFillTx/>
-                <a:latin typeface="Calibri"/>
-              </a:rPr>
-              <a:t>sty</a:t>
-            </a:r>
-            <a:r>
-              <a:rPr lang="en-US" sz="2800" b="0" u="none" strike="noStrike">
-                <a:solidFill>
-                  <a:schemeClr val="dk1"/>
-                </a:solidFill>
-                <a:effectLst/>
-                <a:uFillTx/>
-                <a:latin typeface="Calibri"/>
-              </a:rPr>
-              <a:t>les</a:t>
+              <a:t>Click to edit Master text styles</a:t>
             </a:r>
             <a:endParaRPr lang="en-BE" sz="2800" b="0" u="none" strike="noStrike">
               <a:solidFill>
@@ -2082,128 +1961,7 @@
                 <a:uFillTx/>
                 <a:latin typeface="Calibri"/>
               </a:rPr>
-              <a:t>S</a:t>
-            </a:r>
-            <a:r>
-              <a:rPr lang="en-US" sz="2400" b="0" u="none" strike="noStrike">
-                <a:solidFill>
-                  <a:schemeClr val="dk1"/>
-                </a:solidFill>
-                <a:effectLst/>
-                <a:uFillTx/>
-                <a:latin typeface="Calibri"/>
-              </a:rPr>
-              <a:t>e</a:t>
-            </a:r>
-            <a:r>
-              <a:rPr lang="en-US" sz="2400" b="0" u="none" strike="noStrike">
-                <a:solidFill>
-                  <a:schemeClr val="dk1"/>
-                </a:solidFill>
-                <a:effectLst/>
-                <a:uFillTx/>
-                <a:latin typeface="Calibri"/>
-              </a:rPr>
-              <a:t>c</a:t>
-            </a:r>
-            <a:r>
-              <a:rPr lang="en-US" sz="2400" b="0" u="none" strike="noStrike">
-                <a:solidFill>
-                  <a:schemeClr val="dk1"/>
-                </a:solidFill>
-                <a:effectLst/>
-                <a:uFillTx/>
-                <a:latin typeface="Calibri"/>
-              </a:rPr>
-              <a:t>o</a:t>
-            </a:r>
-            <a:r>
-              <a:rPr lang="en-US" sz="2400" b="0" u="none" strike="noStrike">
-                <a:solidFill>
-                  <a:schemeClr val="dk1"/>
-                </a:solidFill>
-                <a:effectLst/>
-                <a:uFillTx/>
-                <a:latin typeface="Calibri"/>
-              </a:rPr>
-              <a:t>n</a:t>
-            </a:r>
-            <a:r>
-              <a:rPr lang="en-US" sz="2400" b="0" u="none" strike="noStrike">
-                <a:solidFill>
-                  <a:schemeClr val="dk1"/>
-                </a:solidFill>
-                <a:effectLst/>
-                <a:uFillTx/>
-                <a:latin typeface="Calibri"/>
-              </a:rPr>
-              <a:t>d</a:t>
-            </a:r>
-            <a:r>
-              <a:rPr lang="en-US" sz="2400" b="0" u="none" strike="noStrike">
-                <a:solidFill>
-                  <a:schemeClr val="dk1"/>
-                </a:solidFill>
-                <a:effectLst/>
-                <a:uFillTx/>
-                <a:latin typeface="Calibri"/>
-              </a:rPr>
-              <a:t> </a:t>
-            </a:r>
-            <a:r>
-              <a:rPr lang="en-US" sz="2400" b="0" u="none" strike="noStrike">
-                <a:solidFill>
-                  <a:schemeClr val="dk1"/>
-                </a:solidFill>
-                <a:effectLst/>
-                <a:uFillTx/>
-                <a:latin typeface="Calibri"/>
-              </a:rPr>
-              <a:t>l</a:t>
-            </a:r>
-            <a:r>
-              <a:rPr lang="en-US" sz="2400" b="0" u="none" strike="noStrike">
-                <a:solidFill>
-                  <a:schemeClr val="dk1"/>
-                </a:solidFill>
-                <a:effectLst/>
-                <a:uFillTx/>
-                <a:latin typeface="Calibri"/>
-              </a:rPr>
-              <a:t>e</a:t>
-            </a:r>
-            <a:r>
-              <a:rPr lang="en-US" sz="2400" b="0" u="none" strike="noStrike">
-                <a:solidFill>
-                  <a:schemeClr val="dk1"/>
-                </a:solidFill>
-                <a:effectLst/>
-                <a:uFillTx/>
-                <a:latin typeface="Calibri"/>
-              </a:rPr>
-              <a:t>v</a:t>
-            </a:r>
-            <a:r>
-              <a:rPr lang="en-US" sz="2400" b="0" u="none" strike="noStrike">
-                <a:solidFill>
-                  <a:schemeClr val="dk1"/>
-                </a:solidFill>
-                <a:effectLst/>
-                <a:uFillTx/>
-                <a:latin typeface="Calibri"/>
-              </a:rPr>
-              <a:t>e</a:t>
-            </a:r>
-            <a:r>
-              <a:rPr lang="en-US" sz="2400" b="0" u="none" strike="noStrike">
-                <a:solidFill>
-                  <a:schemeClr val="dk1"/>
-                </a:solidFill>
-                <a:effectLst/>
-                <a:uFillTx/>
-                <a:latin typeface="Calibri"/>
-              </a:rPr>
-              <a:t>l</a:t>
+              <a:t>Second level</a:t>
             </a:r>
             <a:endParaRPr lang="en-BE" sz="2400" b="0" u="none" strike="noStrike">
               <a:solidFill>
@@ -2237,117 +1995,7 @@
                 <a:uFillTx/>
                 <a:latin typeface="Calibri"/>
               </a:rPr>
-              <a:t>T</a:t>
-            </a:r>
-            <a:r>
-              <a:rPr lang="en-US" sz="2000" b="0" u="none" strike="noStrike">
-                <a:solidFill>
-                  <a:schemeClr val="dk1"/>
-                </a:solidFill>
-                <a:effectLst/>
-                <a:uFillTx/>
-                <a:latin typeface="Calibri"/>
-              </a:rPr>
-              <a:t>h</a:t>
-            </a:r>
-            <a:r>
-              <a:rPr lang="en-US" sz="2000" b="0" u="none" strike="noStrike">
-                <a:solidFill>
-                  <a:schemeClr val="dk1"/>
-                </a:solidFill>
-                <a:effectLst/>
-                <a:uFillTx/>
-                <a:latin typeface="Calibri"/>
-              </a:rPr>
-              <a:t>i</a:t>
-            </a:r>
-            <a:r>
-              <a:rPr lang="en-US" sz="2000" b="0" u="none" strike="noStrike">
-                <a:solidFill>
-                  <a:schemeClr val="dk1"/>
-                </a:solidFill>
-                <a:effectLst/>
-                <a:uFillTx/>
-                <a:latin typeface="Calibri"/>
-              </a:rPr>
-              <a:t>r</a:t>
-            </a:r>
-            <a:r>
-              <a:rPr lang="en-US" sz="2000" b="0" u="none" strike="noStrike">
-                <a:solidFill>
-                  <a:schemeClr val="dk1"/>
-                </a:solidFill>
-                <a:effectLst/>
-                <a:uFillTx/>
-                <a:latin typeface="Calibri"/>
-              </a:rPr>
-              <a:t>d</a:t>
-            </a:r>
-            <a:r>
-              <a:rPr lang="en-US" sz="2000" b="0" u="none" strike="noStrike">
-                <a:solidFill>
-                  <a:schemeClr val="dk1"/>
-                </a:solidFill>
-                <a:effectLst/>
-                <a:uFillTx/>
-                <a:latin typeface="Calibri"/>
-              </a:rPr>
-              <a:t> </a:t>
-            </a:r>
-            <a:r>
-              <a:rPr lang="en-US" sz="2000" b="0" u="none" strike="noStrike">
-                <a:solidFill>
-                  <a:schemeClr val="dk1"/>
-                </a:solidFill>
-                <a:effectLst/>
-                <a:uFillTx/>
-                <a:latin typeface="Calibri"/>
-              </a:rPr>
-              <a:t>l</a:t>
-            </a:r>
-            <a:r>
-              <a:rPr lang="en-US" sz="2000" b="0" u="none" strike="noStrike">
-                <a:solidFill>
-                  <a:schemeClr val="dk1"/>
-                </a:solidFill>
-                <a:effectLst/>
-                <a:uFillTx/>
-                <a:latin typeface="Calibri"/>
-              </a:rPr>
-              <a:t>e</a:t>
-            </a:r>
-            <a:r>
-              <a:rPr lang="en-US" sz="2000" b="0" u="none" strike="noStrike">
-                <a:solidFill>
-                  <a:schemeClr val="dk1"/>
-                </a:solidFill>
-                <a:effectLst/>
-                <a:uFillTx/>
-                <a:latin typeface="Calibri"/>
-              </a:rPr>
-              <a:t>v</a:t>
-            </a:r>
-            <a:r>
-              <a:rPr lang="en-US" sz="2000" b="0" u="none" strike="noStrike">
-                <a:solidFill>
-                  <a:schemeClr val="dk1"/>
-                </a:solidFill>
-                <a:effectLst/>
-                <a:uFillTx/>
-                <a:latin typeface="Calibri"/>
-              </a:rPr>
-              <a:t>e</a:t>
-            </a:r>
-            <a:r>
-              <a:rPr lang="en-US" sz="2000" b="0" u="none" strike="noStrike">
-                <a:solidFill>
-                  <a:schemeClr val="dk1"/>
-                </a:solidFill>
-                <a:effectLst/>
-                <a:uFillTx/>
-                <a:latin typeface="Calibri"/>
-              </a:rPr>
-              <a:t>l</a:t>
+              <a:t>Third level</a:t>
             </a:r>
             <a:endParaRPr lang="en-BE" sz="2000" b="0" u="none" strike="noStrike">
               <a:solidFill>
@@ -2381,128 +2029,7 @@
                 <a:uFillTx/>
                 <a:latin typeface="Calibri"/>
               </a:rPr>
-              <a:t>F</a:t>
-            </a:r>
-            <a:r>
-              <a:rPr lang="en-US" sz="1800" b="0" u="none" strike="noStrike">
-                <a:solidFill>
-                  <a:schemeClr val="dk1"/>
-                </a:solidFill>
-                <a:effectLst/>
-                <a:uFillTx/>
-                <a:latin typeface="Calibri"/>
-              </a:rPr>
-              <a:t>o</a:t>
-            </a:r>
-            <a:r>
-              <a:rPr lang="en-US" sz="1800" b="0" u="none" strike="noStrike">
-                <a:solidFill>
-                  <a:schemeClr val="dk1"/>
-                </a:solidFill>
-                <a:effectLst/>
-                <a:uFillTx/>
-                <a:latin typeface="Calibri"/>
-              </a:rPr>
-              <a:t>u</a:t>
-            </a:r>
-            <a:r>
-              <a:rPr lang="en-US" sz="1800" b="0" u="none" strike="noStrike">
-                <a:solidFill>
-                  <a:schemeClr val="dk1"/>
-                </a:solidFill>
-                <a:effectLst/>
-                <a:uFillTx/>
-                <a:latin typeface="Calibri"/>
-              </a:rPr>
-              <a:t>r</a:t>
-            </a:r>
-            <a:r>
-              <a:rPr lang="en-US" sz="1800" b="0" u="none" strike="noStrike">
-                <a:solidFill>
-                  <a:schemeClr val="dk1"/>
-                </a:solidFill>
-                <a:effectLst/>
-                <a:uFillTx/>
-                <a:latin typeface="Calibri"/>
-              </a:rPr>
-              <a:t>t</a:t>
-            </a:r>
-            <a:r>
-              <a:rPr lang="en-US" sz="1800" b="0" u="none" strike="noStrike">
-                <a:solidFill>
-                  <a:schemeClr val="dk1"/>
-                </a:solidFill>
-                <a:effectLst/>
-                <a:uFillTx/>
-                <a:latin typeface="Calibri"/>
-              </a:rPr>
-              <a:t>h</a:t>
-            </a:r>
-            <a:r>
-              <a:rPr lang="en-US" sz="1800" b="0" u="none" strike="noStrike">
-                <a:solidFill>
-                  <a:schemeClr val="dk1"/>
-                </a:solidFill>
-                <a:effectLst/>
-                <a:uFillTx/>
-                <a:latin typeface="Calibri"/>
-              </a:rPr>
-              <a:t> </a:t>
-            </a:r>
-            <a:r>
-              <a:rPr lang="en-US" sz="1800" b="0" u="none" strike="noStrike">
-                <a:solidFill>
-                  <a:schemeClr val="dk1"/>
-                </a:solidFill>
-                <a:effectLst/>
-                <a:uFillTx/>
-                <a:latin typeface="Calibri"/>
-              </a:rPr>
-              <a:t>l</a:t>
-            </a:r>
-            <a:r>
-              <a:rPr lang="en-US" sz="1800" b="0" u="none" strike="noStrike">
-                <a:solidFill>
-                  <a:schemeClr val="dk1"/>
-                </a:solidFill>
-                <a:effectLst/>
-                <a:uFillTx/>
-                <a:latin typeface="Calibri"/>
-              </a:rPr>
-              <a:t>e</a:t>
-            </a:r>
-            <a:r>
-              <a:rPr lang="en-US" sz="1800" b="0" u="none" strike="noStrike">
-                <a:solidFill>
-                  <a:schemeClr val="dk1"/>
-                </a:solidFill>
-                <a:effectLst/>
-                <a:uFillTx/>
-                <a:latin typeface="Calibri"/>
-              </a:rPr>
-              <a:t>v</a:t>
-            </a:r>
-            <a:r>
-              <a:rPr lang="en-US" sz="1800" b="0" u="none" strike="noStrike">
-                <a:solidFill>
-                  <a:schemeClr val="dk1"/>
-                </a:solidFill>
-                <a:effectLst/>
-                <a:uFillTx/>
-                <a:latin typeface="Calibri"/>
-              </a:rPr>
-              <a:t>e</a:t>
-            </a:r>
-            <a:r>
-              <a:rPr lang="en-US" sz="1800" b="0" u="none" strike="noStrike">
-                <a:solidFill>
-                  <a:schemeClr val="dk1"/>
-                </a:solidFill>
-                <a:effectLst/>
-                <a:uFillTx/>
-                <a:latin typeface="Calibri"/>
-              </a:rPr>
-              <a:t>l</a:t>
+              <a:t>Fourth level</a:t>
             </a:r>
             <a:endParaRPr lang="en-BE" sz="1800" b="0" u="none" strike="noStrike">
               <a:solidFill>
@@ -2536,117 +2063,7 @@
                 <a:uFillTx/>
                 <a:latin typeface="Calibri"/>
               </a:rPr>
-              <a:t>F</a:t>
-            </a:r>
-            <a:r>
-              <a:rPr lang="en-US" sz="1800" b="0" u="none" strike="noStrike">
-                <a:solidFill>
-                  <a:schemeClr val="dk1"/>
-                </a:solidFill>
-                <a:effectLst/>
-                <a:uFillTx/>
-                <a:latin typeface="Calibri"/>
-              </a:rPr>
-              <a:t>i</a:t>
-            </a:r>
-            <a:r>
-              <a:rPr lang="en-US" sz="1800" b="0" u="none" strike="noStrike">
-                <a:solidFill>
-                  <a:schemeClr val="dk1"/>
-                </a:solidFill>
-                <a:effectLst/>
-                <a:uFillTx/>
-                <a:latin typeface="Calibri"/>
-              </a:rPr>
-              <a:t>f</a:t>
-            </a:r>
-            <a:r>
-              <a:rPr lang="en-US" sz="1800" b="0" u="none" strike="noStrike">
-                <a:solidFill>
-                  <a:schemeClr val="dk1"/>
-                </a:solidFill>
-                <a:effectLst/>
-                <a:uFillTx/>
-                <a:latin typeface="Calibri"/>
-              </a:rPr>
-              <a:t>t</a:t>
-            </a:r>
-            <a:r>
-              <a:rPr lang="en-US" sz="1800" b="0" u="none" strike="noStrike">
-                <a:solidFill>
-                  <a:schemeClr val="dk1"/>
-                </a:solidFill>
-                <a:effectLst/>
-                <a:uFillTx/>
-                <a:latin typeface="Calibri"/>
-              </a:rPr>
-              <a:t>h</a:t>
-            </a:r>
-            <a:r>
-              <a:rPr lang="en-US" sz="1800" b="0" u="none" strike="noStrike">
-                <a:solidFill>
-                  <a:schemeClr val="dk1"/>
-                </a:solidFill>
-                <a:effectLst/>
-                <a:uFillTx/>
-                <a:latin typeface="Calibri"/>
-              </a:rPr>
-              <a:t> </a:t>
-            </a:r>
-            <a:r>
-              <a:rPr lang="en-US" sz="1800" b="0" u="none" strike="noStrike">
-                <a:solidFill>
-                  <a:schemeClr val="dk1"/>
-                </a:solidFill>
-                <a:effectLst/>
-                <a:uFillTx/>
-                <a:latin typeface="Calibri"/>
-              </a:rPr>
-              <a:t>l</a:t>
-            </a:r>
-            <a:r>
-              <a:rPr lang="en-US" sz="1800" b="0" u="none" strike="noStrike">
-                <a:solidFill>
-                  <a:schemeClr val="dk1"/>
-                </a:solidFill>
-                <a:effectLst/>
-                <a:uFillTx/>
-                <a:latin typeface="Calibri"/>
-              </a:rPr>
-              <a:t>e</a:t>
-            </a:r>
-            <a:r>
-              <a:rPr lang="en-US" sz="1800" b="0" u="none" strike="noStrike">
-                <a:solidFill>
-                  <a:schemeClr val="dk1"/>
-                </a:solidFill>
-                <a:effectLst/>
-                <a:uFillTx/>
-                <a:latin typeface="Calibri"/>
-              </a:rPr>
-              <a:t>v</a:t>
-            </a:r>
-            <a:r>
-              <a:rPr lang="en-US" sz="1800" b="0" u="none" strike="noStrike">
-                <a:solidFill>
-                  <a:schemeClr val="dk1"/>
-                </a:solidFill>
-                <a:effectLst/>
-                <a:uFillTx/>
-                <a:latin typeface="Calibri"/>
-              </a:rPr>
-              <a:t>e</a:t>
-            </a:r>
-            <a:r>
-              <a:rPr lang="en-US" sz="1800" b="0" u="none" strike="noStrike">
-                <a:solidFill>
-                  <a:schemeClr val="dk1"/>
-                </a:solidFill>
-                <a:effectLst/>
-                <a:uFillTx/>
-                <a:latin typeface="Calibri"/>
-              </a:rPr>
-              <a:t>l</a:t>
+              <a:t>Fifth level</a:t>
             </a:r>
             <a:endParaRPr lang="en-BE" sz="1800" b="0" u="none" strike="noStrike">
               <a:solidFill>
@@ -2853,7 +2270,7 @@
               </a:lnSpc>
               <a:buNone/>
             </a:pPr>
-            <a:fld id="{2CB4D51D-F484-4BB8-9B59-6D6B94533427}" type="slidenum">
+            <a:fld id="{14DABC3E-2F15-44BF-97DD-E370D9DB79F6}" type="slidenum">
               <a:rPr lang="en-BE" sz="1200" b="0" u="none" strike="noStrike">
                 <a:solidFill>
                   <a:schemeClr val="dk1">
@@ -3355,7 +2772,7 @@
               </a:lnSpc>
               <a:buNone/>
             </a:pPr>
-            <a:fld id="{24CF795E-BD00-4BDD-9FF1-178D94B6FDE6}" type="slidenum">
+            <a:fld id="{AEC5E4B2-6954-431F-9817-5E8E4B847F7C}" type="slidenum">
               <a:rPr lang="en-BE" sz="1200" b="0" u="none" strike="noStrike">
                 <a:solidFill>
                   <a:schemeClr val="dk1">
@@ -3857,7 +3274,7 @@
               </a:lnSpc>
               <a:buNone/>
             </a:pPr>
-            <a:fld id="{60CC7144-FE9D-4791-8FFB-B79AE33B2B12}" type="slidenum">
+            <a:fld id="{5E0040C8-5BE2-4CC6-952F-AA666655B254}" type="slidenum">
               <a:rPr lang="en-BE" sz="1200" b="0" u="none" strike="noStrike">
                 <a:solidFill>
                   <a:schemeClr val="dk1">
@@ -4224,7 +3641,7 @@
               </a:lnSpc>
               <a:buNone/>
             </a:pPr>
-            <a:fld id="{1C4FBB14-D8AA-47E9-B297-40570EBC2B6E}" type="slidenum">
+            <a:fld id="{0FA3D8E9-BB04-4FCE-93BB-BF037FC1405C}" type="slidenum">
               <a:rPr lang="en-BE" sz="1200" b="0" u="none" strike="noStrike">
                 <a:solidFill>
                   <a:schemeClr val="dk1">
@@ -4925,7 +4342,7 @@
               </a:lnSpc>
               <a:buNone/>
             </a:pPr>
-            <a:fld id="{0282839C-60EF-426D-BE3A-8AC66E292150}" type="slidenum">
+            <a:fld id="{C14B5FDC-C2BC-4A0E-BB1A-A8DCF499F742}" type="slidenum">
               <a:rPr lang="en-BE" sz="1200" b="0" u="none" strike="noStrike">
                 <a:solidFill>
                   <a:schemeClr val="dk1">
@@ -5750,7 +5167,7 @@
               </a:lnSpc>
               <a:buNone/>
             </a:pPr>
-            <a:fld id="{4FB3A9DF-E6AB-4294-AFC9-BBC8760E3C9C}" type="slidenum">
+            <a:fld id="{A41C9886-4B10-478E-B18D-01E95E2C0D05}" type="slidenum">
               <a:rPr lang="en-BE" sz="1200" b="0" u="none" strike="noStrike">
                 <a:solidFill>
                   <a:schemeClr val="dk1">
@@ -6053,7 +5470,7 @@
               </a:lnSpc>
               <a:buNone/>
             </a:pPr>
-            <a:fld id="{EC87B249-DA8E-42FB-B517-B0010885C414}" type="slidenum">
+            <a:fld id="{69846506-62AD-443E-BB41-EB5C1A7A06FF}" type="slidenum">
               <a:rPr lang="en-BE" sz="1200" b="0" u="none" strike="noStrike">
                 <a:solidFill>
                   <a:schemeClr val="dk1">
@@ -6300,7 +5717,7 @@
               </a:lnSpc>
               <a:buNone/>
             </a:pPr>
-            <a:fld id="{C8EA9AF6-AECD-4D53-B3FE-6A2D15EED0DF}" type="slidenum">
+            <a:fld id="{0FB3FAB4-598A-4023-B32B-7CFAFC5B27A9}" type="slidenum">
               <a:rPr lang="en-BE" sz="1200" b="0" u="none" strike="noStrike">
                 <a:solidFill>
                   <a:schemeClr val="dk1">
@@ -6740,17 +6157,49 @@
               <a:buChar char="•"/>
             </a:pPr>
             <a:r>
-              <a:rPr lang="en-US" sz="2800" b="0" i="1" u="none" strike="noStrike">
-                <a:solidFill>
-                  <a:schemeClr val="lt1">
-                    <a:lumMod val="75000"/>
-                  </a:schemeClr>
-                </a:solidFill>
-                <a:effectLst/>
-                <a:uFillTx/>
-                <a:latin typeface="Calibri"/>
-              </a:rPr>
-              <a:t>How does your agent deal with enemies (aiming, shooting, item usage, avoidance, hiding, usage of sprint, …)?</a:t>
+              <a:rPr lang="en-US" sz="2800" b="0" u="none" strike="noStrike">
+                <a:solidFill>
+                  <a:srgbClr val="000000"/>
+                </a:solidFill>
+                <a:effectLst/>
+                <a:uFillTx/>
+                <a:latin typeface="Calibri"/>
+              </a:rPr>
+              <a:t>Each movement tree node also has an evade blended in for each zombie</a:t>
+            </a:r>
+            <a:endParaRPr lang="en-BE" sz="2800" b="0" u="none" strike="noStrike">
+              <a:solidFill>
+                <a:schemeClr val="dk1"/>
+              </a:solidFill>
+              <a:effectLst/>
+              <a:uFillTx/>
+              <a:latin typeface="Calibri"/>
+            </a:endParaRPr>
+          </a:p>
+          <a:p>
+            <a:pPr marL="228600" indent="-228600" defTabSz="914400">
+              <a:lnSpc>
+                <a:spcPct val="90000"/>
+              </a:lnSpc>
+              <a:spcBef>
+                <a:spcPts val="1001"/>
+              </a:spcBef>
+              <a:buClr>
+                <a:srgbClr val="bfbfbf"/>
+              </a:buClr>
+              <a:buFont typeface="Arial"/>
+              <a:buChar char="•"/>
+            </a:pPr>
+            <a:r>
+              <a:rPr lang="en-US" sz="2800" b="0" u="none" strike="noStrike">
+                <a:solidFill>
+                  <a:srgbClr val="000000"/>
+                </a:solidFill>
+                <a:effectLst/>
+                <a:uFillTx/>
+                <a:latin typeface="Calibri"/>
+              </a:rPr>
+              <a:t>When a zombie gets too close (500 for shotgun, 800 for pistol) The survivor faces them and then shoots</a:t>
             </a:r>
             <a:endParaRPr lang="en-BE" sz="2800" b="0" u="none" strike="noStrike">
               <a:solidFill>
@@ -6927,17 +6376,117 @@
               <a:buChar char="•"/>
             </a:pPr>
             <a:r>
-              <a:rPr lang="en-US" sz="2800" b="0" i="1" u="none" strike="noStrike">
-                <a:solidFill>
-                  <a:schemeClr val="lt1">
-                    <a:lumMod val="75000"/>
-                  </a:schemeClr>
-                </a:solidFill>
-                <a:effectLst/>
-                <a:uFillTx/>
-                <a:latin typeface="Calibri"/>
-              </a:rPr>
-              <a:t>How does your agent manage the inventory (inventory organization, item usage, picking up and remembering items,…)? </a:t>
+              <a:rPr lang="en-US" sz="2800" b="0" u="none" strike="noStrike">
+                <a:solidFill>
+                  <a:srgbClr val="000000"/>
+                </a:solidFill>
+                <a:effectLst/>
+                <a:uFillTx/>
+                <a:latin typeface="Calibri"/>
+              </a:rPr>
+              <a:t>Each perceived item is remembered (TArray)</a:t>
+            </a:r>
+            <a:endParaRPr lang="en-BE" sz="2800" b="0" u="none" strike="noStrike">
+              <a:solidFill>
+                <a:schemeClr val="dk1"/>
+              </a:solidFill>
+              <a:effectLst/>
+              <a:uFillTx/>
+              <a:latin typeface="Calibri"/>
+            </a:endParaRPr>
+          </a:p>
+          <a:p>
+            <a:pPr marL="228600" indent="-228600" defTabSz="914400">
+              <a:lnSpc>
+                <a:spcPct val="90000"/>
+              </a:lnSpc>
+              <a:spcBef>
+                <a:spcPts val="1001"/>
+              </a:spcBef>
+              <a:buClr>
+                <a:srgbClr val="bfbfbf"/>
+              </a:buClr>
+              <a:buFont typeface="Arial"/>
+              <a:buChar char="•"/>
+            </a:pPr>
+            <a:r>
+              <a:rPr lang="en-US" sz="2800" b="0" u="none" strike="noStrike">
+                <a:solidFill>
+                  <a:srgbClr val="000000"/>
+                </a:solidFill>
+                <a:effectLst/>
+                <a:uFillTx/>
+                <a:latin typeface="Calibri"/>
+              </a:rPr>
+              <a:t>Fixed inventory slots (0=medkit, 1=weapon, other=food)</a:t>
+            </a:r>
+            <a:endParaRPr lang="en-BE" sz="2800" b="0" u="none" strike="noStrike">
+              <a:solidFill>
+                <a:schemeClr val="dk1"/>
+              </a:solidFill>
+              <a:effectLst/>
+              <a:uFillTx/>
+              <a:latin typeface="Calibri"/>
+            </a:endParaRPr>
+          </a:p>
+          <a:p>
+            <a:pPr marL="228600" indent="-228600" defTabSz="914400">
+              <a:lnSpc>
+                <a:spcPct val="90000"/>
+              </a:lnSpc>
+              <a:spcBef>
+                <a:spcPts val="1001"/>
+              </a:spcBef>
+              <a:buClr>
+                <a:srgbClr val="bfbfbf"/>
+              </a:buClr>
+              <a:buFont typeface="Arial"/>
+              <a:buChar char="•"/>
+            </a:pPr>
+            <a:r>
+              <a:rPr lang="en-US" sz="2800" b="0" u="none" strike="noStrike">
+                <a:solidFill>
+                  <a:srgbClr val="000000"/>
+                </a:solidFill>
+                <a:effectLst/>
+                <a:uFillTx/>
+                <a:latin typeface="Calibri"/>
+              </a:rPr>
+              <a:t>Items are used when health or stamina threshold is reached based on the items value</a:t>
+            </a:r>
+            <a:endParaRPr lang="en-BE" sz="2800" b="0" u="none" strike="noStrike">
+              <a:solidFill>
+                <a:schemeClr val="dk1"/>
+              </a:solidFill>
+              <a:effectLst/>
+              <a:uFillTx/>
+              <a:latin typeface="Calibri"/>
+            </a:endParaRPr>
+          </a:p>
+          <a:p>
+            <a:pPr marL="228600" indent="-228600" defTabSz="914400">
+              <a:lnSpc>
+                <a:spcPct val="90000"/>
+              </a:lnSpc>
+              <a:spcBef>
+                <a:spcPts val="1001"/>
+              </a:spcBef>
+              <a:buClr>
+                <a:srgbClr val="bfbfbf"/>
+              </a:buClr>
+              <a:buFont typeface="Arial"/>
+              <a:buChar char="•"/>
+            </a:pPr>
+            <a:r>
+              <a:rPr lang="en-US" sz="2800" b="0" u="none" strike="noStrike">
+                <a:solidFill>
+                  <a:srgbClr val="000000"/>
+                </a:solidFill>
+                <a:effectLst/>
+                <a:uFillTx/>
+                <a:latin typeface="Calibri"/>
+              </a:rPr>
+              <a:t>Items are thrown away after a use when their value is 0</a:t>
             </a:r>
             <a:endParaRPr lang="en-BE" sz="2800" b="0" u="none" strike="noStrike">
               <a:solidFill>
@@ -7097,17 +6646,189 @@
               <a:buChar char="•"/>
             </a:pPr>
             <a:r>
-              <a:rPr lang="en-US" sz="2800" b="0" i="1" u="none" strike="noStrike">
-                <a:solidFill>
-                  <a:schemeClr val="lt1">
-                    <a:lumMod val="75000"/>
-                  </a:schemeClr>
-                </a:solidFill>
-                <a:effectLst/>
-                <a:uFillTx/>
-                <a:latin typeface="Calibri"/>
-              </a:rPr>
-              <a:t>How many steering behaviors does it use? Does it use blended steering?</a:t>
+              <a:rPr lang="en-US" sz="2800" b="0" u="none" strike="noStrike">
+                <a:solidFill>
+                  <a:srgbClr val="000000"/>
+                </a:solidFill>
+                <a:effectLst/>
+                <a:uFillTx/>
+                <a:latin typeface="Calibri"/>
+              </a:rPr>
+              <a:t>Sprint only used when using seek (only when destination is known)</a:t>
+            </a:r>
+            <a:endParaRPr lang="en-BE" sz="2800" b="0" u="none" strike="noStrike">
+              <a:solidFill>
+                <a:schemeClr val="dk1"/>
+              </a:solidFill>
+              <a:effectLst/>
+              <a:uFillTx/>
+              <a:latin typeface="Calibri"/>
+            </a:endParaRPr>
+          </a:p>
+          <a:p>
+            <a:pPr marL="228600" indent="-228600" defTabSz="914400">
+              <a:lnSpc>
+                <a:spcPct val="90000"/>
+              </a:lnSpc>
+              <a:spcBef>
+                <a:spcPts val="1001"/>
+              </a:spcBef>
+              <a:buClr>
+                <a:srgbClr val="bfbfbf"/>
+              </a:buClr>
+              <a:buFont typeface="Arial"/>
+              <a:buChar char="•"/>
+            </a:pPr>
+            <a:r>
+              <a:rPr lang="en-US" sz="2800" b="0" u="none" strike="noStrike">
+                <a:solidFill>
+                  <a:srgbClr val="000000"/>
+                </a:solidFill>
+                <a:effectLst/>
+                <a:uFillTx/>
+                <a:latin typeface="Calibri"/>
+              </a:rPr>
+              <a:t>Blended steering using:</a:t>
+            </a:r>
+            <a:endParaRPr lang="en-BE" sz="2800" b="0" u="none" strike="noStrike">
+              <a:solidFill>
+                <a:schemeClr val="dk1"/>
+              </a:solidFill>
+              <a:effectLst/>
+              <a:uFillTx/>
+              <a:latin typeface="Calibri"/>
+            </a:endParaRPr>
+          </a:p>
+          <a:p>
+            <a:pPr marL="864000" lvl="1" indent="-324000" defTabSz="914400">
+              <a:lnSpc>
+                <a:spcPct val="90000"/>
+              </a:lnSpc>
+              <a:spcBef>
+                <a:spcPts val="1134"/>
+              </a:spcBef>
+              <a:buClr>
+                <a:srgbClr val="000000"/>
+              </a:buClr>
+              <a:buSzPct val="75000"/>
+              <a:buFont typeface="Symbol" charset="2"/>
+              <a:buChar char=""/>
+            </a:pPr>
+            <a:r>
+              <a:rPr lang="en-US" sz="2800" b="0" u="none" strike="noStrike">
+                <a:solidFill>
+                  <a:srgbClr val="000000"/>
+                </a:solidFill>
+                <a:effectLst/>
+                <a:uFillTx/>
+                <a:latin typeface="Calibri"/>
+              </a:rPr>
+              <a:t>Seek (optional)</a:t>
+            </a:r>
+            <a:endParaRPr lang="en-BE" sz="2800" b="0" u="none" strike="noStrike">
+              <a:solidFill>
+                <a:schemeClr val="dk1"/>
+              </a:solidFill>
+              <a:effectLst/>
+              <a:uFillTx/>
+              <a:latin typeface="Calibri"/>
+            </a:endParaRPr>
+          </a:p>
+          <a:p>
+            <a:pPr marL="864000" lvl="1" indent="-324000" defTabSz="914400">
+              <a:lnSpc>
+                <a:spcPct val="90000"/>
+              </a:lnSpc>
+              <a:spcBef>
+                <a:spcPts val="1134"/>
+              </a:spcBef>
+              <a:buClr>
+                <a:srgbClr val="000000"/>
+              </a:buClr>
+              <a:buSzPct val="75000"/>
+              <a:buFont typeface="Symbol" charset="2"/>
+              <a:buChar char=""/>
+            </a:pPr>
+            <a:r>
+              <a:rPr lang="en-US" sz="2800" b="0" u="none" strike="noStrike">
+                <a:solidFill>
+                  <a:srgbClr val="000000"/>
+                </a:solidFill>
+                <a:effectLst/>
+                <a:uFillTx/>
+                <a:latin typeface="Calibri"/>
+              </a:rPr>
+              <a:t>Wander</a:t>
+            </a:r>
+            <a:endParaRPr lang="en-BE" sz="2800" b="0" u="none" strike="noStrike">
+              <a:solidFill>
+                <a:schemeClr val="dk1"/>
+              </a:solidFill>
+              <a:effectLst/>
+              <a:uFillTx/>
+              <a:latin typeface="Calibri"/>
+            </a:endParaRPr>
+          </a:p>
+          <a:p>
+            <a:pPr marL="864000" lvl="1" indent="-324000" defTabSz="914400">
+              <a:lnSpc>
+                <a:spcPct val="90000"/>
+              </a:lnSpc>
+              <a:spcBef>
+                <a:spcPts val="1134"/>
+              </a:spcBef>
+              <a:buClr>
+                <a:srgbClr val="000000"/>
+              </a:buClr>
+              <a:buSzPct val="75000"/>
+              <a:buFont typeface="Symbol" charset="2"/>
+              <a:buChar char=""/>
+            </a:pPr>
+            <a:r>
+              <a:rPr lang="en-US" sz="2800" b="0" u="none" strike="noStrike">
+                <a:solidFill>
+                  <a:srgbClr val="000000"/>
+                </a:solidFill>
+                <a:effectLst/>
+                <a:uFillTx/>
+                <a:latin typeface="Calibri"/>
+              </a:rPr>
+              <a:t>Evade (one for each remembered zombie)</a:t>
+            </a:r>
+            <a:endParaRPr lang="en-BE" sz="2800" b="0" u="none" strike="noStrike">
+              <a:solidFill>
+                <a:schemeClr val="dk1"/>
+              </a:solidFill>
+              <a:effectLst/>
+              <a:uFillTx/>
+              <a:latin typeface="Calibri"/>
+            </a:endParaRPr>
+          </a:p>
+          <a:p>
+            <a:pPr marL="864000" lvl="1" indent="-324000" defTabSz="914400">
+              <a:lnSpc>
+                <a:spcPct val="90000"/>
+              </a:lnSpc>
+              <a:spcBef>
+                <a:spcPts val="1134"/>
+              </a:spcBef>
+              <a:buClr>
+                <a:srgbClr val="000000"/>
+              </a:buClr>
+              <a:buSzPct val="75000"/>
+              <a:buFont typeface="Symbol" charset="2"/>
+              <a:buChar char=""/>
+            </a:pPr>
+            <a:r>
+              <a:rPr lang="en-US" sz="2800" b="0" u="none" strike="noStrike">
+                <a:solidFill>
+                  <a:srgbClr val="000000"/>
+                </a:solidFill>
+                <a:effectLst/>
+                <a:uFillTx/>
+                <a:latin typeface="Calibri"/>
+              </a:rPr>
+              <a:t>Flee (one for each purge zone)</a:t>
             </a:r>
             <a:endParaRPr lang="en-BE" sz="2800" b="0" u="none" strike="noStrike">
               <a:solidFill>
@@ -7270,17 +6991,117 @@
               <a:buChar char="•"/>
             </a:pPr>
             <a:r>
-              <a:rPr lang="en-US" sz="2800" b="0" i="1" u="none" strike="noStrike">
-                <a:solidFill>
-                  <a:schemeClr val="lt1">
-                    <a:lumMod val="75000"/>
-                  </a:schemeClr>
-                </a:solidFill>
-                <a:effectLst/>
-                <a:uFillTx/>
-                <a:latin typeface="Calibri"/>
-              </a:rPr>
-              <a:t>How does your agent explore the world ( how does it traverse the world, when and why does it visit houses, does it have a memory?)?</a:t>
+              <a:rPr lang="en-US" sz="2800" b="0" u="none" strike="noStrike">
+                <a:solidFill>
+                  <a:srgbClr val="000000"/>
+                </a:solidFill>
+                <a:effectLst/>
+                <a:uFillTx/>
+                <a:latin typeface="Calibri"/>
+              </a:rPr>
+              <a:t>All perceived houses are remembered</a:t>
+            </a:r>
+            <a:endParaRPr lang="en-BE" sz="2800" b="0" u="none" strike="noStrike">
+              <a:solidFill>
+                <a:schemeClr val="dk1"/>
+              </a:solidFill>
+              <a:effectLst/>
+              <a:uFillTx/>
+              <a:latin typeface="Calibri"/>
+            </a:endParaRPr>
+          </a:p>
+          <a:p>
+            <a:pPr marL="228600" indent="-228600" defTabSz="914400">
+              <a:lnSpc>
+                <a:spcPct val="90000"/>
+              </a:lnSpc>
+              <a:spcBef>
+                <a:spcPts val="1001"/>
+              </a:spcBef>
+              <a:buClr>
+                <a:srgbClr val="bfbfbf"/>
+              </a:buClr>
+              <a:buFont typeface="Arial"/>
+              <a:buChar char="•"/>
+            </a:pPr>
+            <a:r>
+              <a:rPr lang="en-US" sz="2800" b="0" u="none" strike="noStrike">
+                <a:solidFill>
+                  <a:srgbClr val="000000"/>
+                </a:solidFill>
+                <a:effectLst/>
+                <a:uFillTx/>
+                <a:latin typeface="Calibri"/>
+              </a:rPr>
+              <a:t>When no pickups are needed seek the closest unvisited house</a:t>
+            </a:r>
+            <a:endParaRPr lang="en-BE" sz="2800" b="0" u="none" strike="noStrike">
+              <a:solidFill>
+                <a:schemeClr val="dk1"/>
+              </a:solidFill>
+              <a:effectLst/>
+              <a:uFillTx/>
+              <a:latin typeface="Calibri"/>
+            </a:endParaRPr>
+          </a:p>
+          <a:p>
+            <a:pPr marL="228600" indent="-228600" defTabSz="914400">
+              <a:lnSpc>
+                <a:spcPct val="90000"/>
+              </a:lnSpc>
+              <a:spcBef>
+                <a:spcPts val="1001"/>
+              </a:spcBef>
+              <a:buClr>
+                <a:srgbClr val="bfbfbf"/>
+              </a:buClr>
+              <a:buFont typeface="Arial"/>
+              <a:buChar char="•"/>
+            </a:pPr>
+            <a:r>
+              <a:rPr lang="en-US" sz="2800" b="0" u="none" strike="noStrike">
+                <a:solidFill>
+                  <a:srgbClr val="000000"/>
+                </a:solidFill>
+                <a:effectLst/>
+                <a:uFillTx/>
+                <a:latin typeface="Calibri"/>
+              </a:rPr>
+              <a:t>When inside spin and add to visited houses</a:t>
+            </a:r>
+            <a:endParaRPr lang="en-BE" sz="2800" b="0" u="none" strike="noStrike">
+              <a:solidFill>
+                <a:schemeClr val="dk1"/>
+              </a:solidFill>
+              <a:effectLst/>
+              <a:uFillTx/>
+              <a:latin typeface="Calibri"/>
+            </a:endParaRPr>
+          </a:p>
+          <a:p>
+            <a:pPr marL="228600" indent="-228600" defTabSz="914400">
+              <a:lnSpc>
+                <a:spcPct val="90000"/>
+              </a:lnSpc>
+              <a:spcBef>
+                <a:spcPts val="1001"/>
+              </a:spcBef>
+              <a:buClr>
+                <a:srgbClr val="bfbfbf"/>
+              </a:buClr>
+              <a:buFont typeface="Arial"/>
+              <a:buChar char="•"/>
+            </a:pPr>
+            <a:r>
+              <a:rPr lang="en-US" sz="2800" b="0" u="none" strike="noStrike">
+                <a:solidFill>
+                  <a:srgbClr val="000000"/>
+                </a:solidFill>
+                <a:effectLst/>
+                <a:uFillTx/>
+                <a:latin typeface="Calibri"/>
+              </a:rPr>
+              <a:t>No items and no houses left? Then we just wander around</a:t>
             </a:r>
             <a:endParaRPr lang="en-BE" sz="2800" b="0" u="none" strike="noStrike">
               <a:solidFill>

--- a/GPP_ZombieAI_DeRonBauwen_2DAE19.pptx
+++ b/GPP_ZombieAI_DeRonBauwen_2DAE19.pptx
@@ -18,8 +18,8 @@
 </file>
 
 <file path=ppt/slideLayouts/slideLayout1.xml><?xml version="1.0" encoding="utf-8"?>
-<p:sldLayout xmlns:a="http://schemas.openxmlformats.org/drawingml/2006/main" xmlns:p="http://schemas.openxmlformats.org/presentationml/2006/main" xmlns:r="http://schemas.openxmlformats.org/officeDocument/2006/relationships" xmlns:p14="http://schemas.microsoft.com/office/powerpoint/2010/main" xmlns:p15="http://schemas.microsoft.com/office/powerpoint/2012/main" xmlns:mc="http://schemas.openxmlformats.org/markup-compatibility/2006" type="title" preserve="1">
-  <p:cSld name="Title Slide">
+<p:sldLayout xmlns:a="http://schemas.openxmlformats.org/drawingml/2006/main" xmlns:p="http://schemas.openxmlformats.org/presentationml/2006/main" xmlns:r="http://schemas.openxmlformats.org/officeDocument/2006/relationships" xmlns:p14="http://schemas.microsoft.com/office/powerpoint/2010/main" xmlns:p15="http://schemas.microsoft.com/office/powerpoint/2012/main" xmlns:mc="http://schemas.openxmlformats.org/markup-compatibility/2006" type="blank" preserve="1">
+  <p:cSld name="Blank">
     <p:bg>
       <p:bgPr>
         <a:solidFill>
@@ -48,69 +48,13 @@
             <a:spLocks noGrp="1"/>
           </p:cNvSpPr>
           <p:nvPr>
-            <p:ph type="title"/>
-          </p:nvPr>
-        </p:nvSpPr>
-        <p:spPr>
-          <a:xfrm>
-            <a:off x="1523880" y="1122480"/>
-            <a:ext cx="9143640" cy="2387160"/>
-          </a:xfrm>
-          <a:prstGeom prst="rect">
-            <a:avLst/>
-          </a:prstGeom>
-          <a:noFill/>
-          <a:ln w="0">
-            <a:noFill/>
-          </a:ln>
-        </p:spPr>
-        <p:txBody>
-          <a:bodyPr lIns="91440" rIns="91440" tIns="45720" bIns="45720" anchor="b">
-            <a:noAutofit/>
-          </a:bodyPr>
-          <a:p>
-            <a:pPr indent="0" algn="ctr" defTabSz="914400">
-              <a:lnSpc>
-                <a:spcPct val="90000"/>
-              </a:lnSpc>
-              <a:buNone/>
-            </a:pPr>
-            <a:r>
-              <a:rPr lang="en-US" sz="6000" b="0" u="none" strike="noStrike">
-                <a:solidFill>
-                  <a:schemeClr val="dk1"/>
-                </a:solidFill>
-                <a:effectLst/>
-                <a:uFillTx/>
-                <a:latin typeface="Calibri Light"/>
-              </a:rPr>
-              <a:t>Click to edit Master title style</a:t>
-            </a:r>
-            <a:endParaRPr lang="en-BE" sz="6000" b="0" u="none" strike="noStrike">
-              <a:solidFill>
-                <a:schemeClr val="dk1"/>
-              </a:solidFill>
-              <a:effectLst/>
-              <a:uFillTx/>
-              <a:latin typeface="Calibri"/>
-            </a:endParaRPr>
-          </a:p>
-        </p:txBody>
-      </p:sp>
-      <p:sp>
-        <p:nvSpPr>
-          <p:cNvPr id="3" name="PlaceHolder 2"/>
-          <p:cNvSpPr>
-            <a:spLocks noGrp="1"/>
-          </p:cNvSpPr>
-          <p:nvPr>
             <p:ph type="dt" idx="1"/>
           </p:nvPr>
         </p:nvSpPr>
         <p:spPr>
           <a:xfrm>
             <a:off x="838080" y="6356520"/>
-            <a:ext cx="2742840" cy="364680"/>
+            <a:ext cx="2742480" cy="364320"/>
           </a:xfrm>
           <a:prstGeom prst="rect">
             <a:avLst/>
@@ -130,6 +74,9 @@
                 <a:spcPct val="100000"/>
               </a:lnSpc>
               <a:buNone/>
+              <a:tabLst>
+                <a:tab algn="l" pos="0"/>
+              </a:tabLst>
               <a:defRPr lang="en-BE" sz="1200" b="0" u="none" strike="noStrike">
                 <a:solidFill>
                   <a:schemeClr val="dk1">
@@ -148,6 +95,9 @@
                 <a:spcPct val="100000"/>
               </a:lnSpc>
               <a:buNone/>
+              <a:tabLst>
+                <a:tab algn="l" pos="0"/>
+              </a:tabLst>
             </a:pPr>
             <a:r>
               <a:rPr lang="en-BE" sz="1200" b="0" u="none" strike="noStrike">
@@ -175,7 +125,7 @@
       </p:sp>
       <p:sp>
         <p:nvSpPr>
-          <p:cNvPr id="4" name="PlaceHolder 3"/>
+          <p:cNvPr id="3" name="PlaceHolder 2"/>
           <p:cNvSpPr>
             <a:spLocks noGrp="1"/>
           </p:cNvSpPr>
@@ -186,7 +136,7 @@
         <p:spPr>
           <a:xfrm>
             <a:off x="4038480" y="6356520"/>
-            <a:ext cx="4114440" cy="364680"/>
+            <a:ext cx="4114080" cy="364320"/>
           </a:xfrm>
           <a:prstGeom prst="rect">
             <a:avLst/>
@@ -202,7 +152,13 @@
           </a:bodyPr>
           <a:lstStyle>
             <a:lvl1pPr indent="0" algn="ctr">
-              <a:buNone/>
+              <a:lnSpc>
+                <a:spcPct val="100000"/>
+              </a:lnSpc>
+              <a:buNone/>
+              <a:tabLst>
+                <a:tab algn="l" pos="0"/>
+              </a:tabLst>
               <a:defRPr lang="en-GB" sz="1400" b="0" u="none" strike="noStrike">
                 <a:solidFill>
                   <a:srgbClr val="000000"/>
@@ -215,7 +171,13 @@
           </a:lstStyle>
           <a:p>
             <a:pPr indent="0" algn="ctr">
-              <a:buNone/>
+              <a:lnSpc>
+                <a:spcPct val="100000"/>
+              </a:lnSpc>
+              <a:buNone/>
+              <a:tabLst>
+                <a:tab algn="l" pos="0"/>
+              </a:tabLst>
             </a:pPr>
             <a:r>
               <a:rPr lang="en-GB" sz="1400" b="0" u="none" strike="noStrike">
@@ -241,7 +203,7 @@
       </p:sp>
       <p:sp>
         <p:nvSpPr>
-          <p:cNvPr id="5" name="PlaceHolder 4"/>
+          <p:cNvPr id="4" name="PlaceHolder 3"/>
           <p:cNvSpPr>
             <a:spLocks noGrp="1"/>
           </p:cNvSpPr>
@@ -252,7 +214,7 @@
         <p:spPr>
           <a:xfrm>
             <a:off x="8610480" y="6356520"/>
-            <a:ext cx="2742840" cy="364680"/>
+            <a:ext cx="2742480" cy="364320"/>
           </a:xfrm>
           <a:prstGeom prst="rect">
             <a:avLst/>
@@ -272,6 +234,9 @@
                 <a:spcPct val="100000"/>
               </a:lnSpc>
               <a:buNone/>
+              <a:tabLst>
+                <a:tab algn="l" pos="0"/>
+              </a:tabLst>
               <a:defRPr lang="en-BE" sz="1200" b="0" u="none" strike="noStrike">
                 <a:solidFill>
                   <a:schemeClr val="dk1">
@@ -290,8 +255,11 @@
                 <a:spcPct val="100000"/>
               </a:lnSpc>
               <a:buNone/>
-            </a:pPr>
-            <a:fld id="{A5910760-1639-43DB-9710-41F6CD8801F0}" type="slidenum">
+              <a:tabLst>
+                <a:tab algn="l" pos="0"/>
+              </a:tabLst>
+            </a:pPr>
+            <a:fld id="{00AAD1A6-8665-4313-904D-CE0FB5A6D922}" type="slidenum">
               <a:rPr lang="en-BE" sz="1200" b="0" u="none" strike="noStrike">
                 <a:solidFill>
                   <a:schemeClr val="dk1">
@@ -311,280 +279,6 @@
               <a:effectLst/>
               <a:uFillTx/>
               <a:latin typeface="Times New Roman"/>
-            </a:endParaRPr>
-          </a:p>
-        </p:txBody>
-      </p:sp>
-      <p:sp>
-        <p:nvSpPr>
-          <p:cNvPr id="6" name="PlaceHolder 5"/>
-          <p:cNvSpPr>
-            <a:spLocks noGrp="1"/>
-          </p:cNvSpPr>
-          <p:nvPr>
-            <p:ph type="body"/>
-          </p:nvPr>
-        </p:nvSpPr>
-        <p:spPr>
-          <a:xfrm>
-            <a:off x="609480" y="1604520"/>
-            <a:ext cx="10972440" cy="3977280"/>
-          </a:xfrm>
-          <a:prstGeom prst="rect">
-            <a:avLst/>
-          </a:prstGeom>
-          <a:noFill/>
-          <a:ln w="0">
-            <a:noFill/>
-          </a:ln>
-        </p:spPr>
-        <p:txBody>
-          <a:bodyPr lIns="0" rIns="0" tIns="0" bIns="0" anchor="t">
-            <a:normAutofit/>
-          </a:bodyPr>
-          <a:p>
-            <a:pPr marL="432000" indent="-324000">
-              <a:lnSpc>
-                <a:spcPct val="90000"/>
-              </a:lnSpc>
-              <a:spcBef>
-                <a:spcPts val="1417"/>
-              </a:spcBef>
-              <a:buClr>
-                <a:srgbClr val="000000"/>
-              </a:buClr>
-              <a:buSzPct val="45000"/>
-              <a:buFont typeface="Wingdings" charset="2"/>
-              <a:buChar char=""/>
-            </a:pPr>
-            <a:r>
-              <a:rPr lang="en-BE" sz="2800" b="0" u="none" strike="noStrike">
-                <a:solidFill>
-                  <a:schemeClr val="dk1"/>
-                </a:solidFill>
-                <a:effectLst/>
-                <a:uFillTx/>
-                <a:latin typeface="Calibri"/>
-              </a:rPr>
-              <a:t>Click to edit the outline text format</a:t>
-            </a:r>
-            <a:endParaRPr lang="en-BE" sz="2800" b="0" u="none" strike="noStrike">
-              <a:solidFill>
-                <a:schemeClr val="dk1"/>
-              </a:solidFill>
-              <a:effectLst/>
-              <a:uFillTx/>
-              <a:latin typeface="Calibri"/>
-            </a:endParaRPr>
-          </a:p>
-          <a:p>
-            <a:pPr marL="864000" lvl="1" indent="-324000">
-              <a:lnSpc>
-                <a:spcPct val="90000"/>
-              </a:lnSpc>
-              <a:spcBef>
-                <a:spcPts val="1134"/>
-              </a:spcBef>
-              <a:buClr>
-                <a:srgbClr val="000000"/>
-              </a:buClr>
-              <a:buSzPct val="75000"/>
-              <a:buFont typeface="Symbol" charset="2"/>
-              <a:buChar char=""/>
-            </a:pPr>
-            <a:r>
-              <a:rPr lang="en-BE" sz="2000" b="0" u="none" strike="noStrike">
-                <a:solidFill>
-                  <a:schemeClr val="dk1"/>
-                </a:solidFill>
-                <a:effectLst/>
-                <a:uFillTx/>
-                <a:latin typeface="Calibri"/>
-              </a:rPr>
-              <a:t>Second Outline Level</a:t>
-            </a:r>
-            <a:endParaRPr lang="en-BE" sz="2000" b="0" u="none" strike="noStrike">
-              <a:solidFill>
-                <a:schemeClr val="dk1"/>
-              </a:solidFill>
-              <a:effectLst/>
-              <a:uFillTx/>
-              <a:latin typeface="Calibri"/>
-            </a:endParaRPr>
-          </a:p>
-          <a:p>
-            <a:pPr marL="1296000" lvl="2" indent="-288000">
-              <a:lnSpc>
-                <a:spcPct val="90000"/>
-              </a:lnSpc>
-              <a:spcBef>
-                <a:spcPts val="850"/>
-              </a:spcBef>
-              <a:buClr>
-                <a:srgbClr val="000000"/>
-              </a:buClr>
-              <a:buSzPct val="45000"/>
-              <a:buFont typeface="Wingdings" charset="2"/>
-              <a:buChar char=""/>
-            </a:pPr>
-            <a:r>
-              <a:rPr lang="en-BE" sz="1800" b="0" u="none" strike="noStrike">
-                <a:solidFill>
-                  <a:schemeClr val="dk1"/>
-                </a:solidFill>
-                <a:effectLst/>
-                <a:uFillTx/>
-                <a:latin typeface="Calibri"/>
-              </a:rPr>
-              <a:t>Third Outline Level</a:t>
-            </a:r>
-            <a:endParaRPr lang="en-BE" sz="1800" b="0" u="none" strike="noStrike">
-              <a:solidFill>
-                <a:schemeClr val="dk1"/>
-              </a:solidFill>
-              <a:effectLst/>
-              <a:uFillTx/>
-              <a:latin typeface="Calibri"/>
-            </a:endParaRPr>
-          </a:p>
-          <a:p>
-            <a:pPr marL="1728000" lvl="3" indent="-216000">
-              <a:lnSpc>
-                <a:spcPct val="90000"/>
-              </a:lnSpc>
-              <a:spcBef>
-                <a:spcPts val="567"/>
-              </a:spcBef>
-              <a:buClr>
-                <a:srgbClr val="000000"/>
-              </a:buClr>
-              <a:buSzPct val="75000"/>
-              <a:buFont typeface="Symbol" charset="2"/>
-              <a:buChar char=""/>
-            </a:pPr>
-            <a:r>
-              <a:rPr lang="en-BE" sz="1800" b="0" u="none" strike="noStrike">
-                <a:solidFill>
-                  <a:schemeClr val="dk1"/>
-                </a:solidFill>
-                <a:effectLst/>
-                <a:uFillTx/>
-                <a:latin typeface="Calibri"/>
-              </a:rPr>
-              <a:t>Fourth Outline Level</a:t>
-            </a:r>
-            <a:endParaRPr lang="en-BE" sz="1800" b="0" u="none" strike="noStrike">
-              <a:solidFill>
-                <a:schemeClr val="dk1"/>
-              </a:solidFill>
-              <a:effectLst/>
-              <a:uFillTx/>
-              <a:latin typeface="Calibri"/>
-            </a:endParaRPr>
-          </a:p>
-          <a:p>
-            <a:pPr marL="2160000" lvl="4" indent="-216000">
-              <a:lnSpc>
-                <a:spcPct val="90000"/>
-              </a:lnSpc>
-              <a:spcBef>
-                <a:spcPts val="283"/>
-              </a:spcBef>
-              <a:buClr>
-                <a:srgbClr val="000000"/>
-              </a:buClr>
-              <a:buSzPct val="45000"/>
-              <a:buFont typeface="Wingdings" charset="2"/>
-              <a:buChar char=""/>
-            </a:pPr>
-            <a:r>
-              <a:rPr lang="en-BE" sz="2000" b="0" u="none" strike="noStrike">
-                <a:solidFill>
-                  <a:schemeClr val="dk1"/>
-                </a:solidFill>
-                <a:effectLst/>
-                <a:uFillTx/>
-                <a:latin typeface="Calibri"/>
-              </a:rPr>
-              <a:t>Fifth Outline Level</a:t>
-            </a:r>
-            <a:endParaRPr lang="en-BE" sz="2000" b="0" u="none" strike="noStrike">
-              <a:solidFill>
-                <a:schemeClr val="dk1"/>
-              </a:solidFill>
-              <a:effectLst/>
-              <a:uFillTx/>
-              <a:latin typeface="Calibri"/>
-            </a:endParaRPr>
-          </a:p>
-          <a:p>
-            <a:pPr marL="2592000" lvl="5" indent="-216000">
-              <a:lnSpc>
-                <a:spcPct val="90000"/>
-              </a:lnSpc>
-              <a:spcBef>
-                <a:spcPts val="283"/>
-              </a:spcBef>
-              <a:buClr>
-                <a:srgbClr val="000000"/>
-              </a:buClr>
-              <a:buSzPct val="45000"/>
-              <a:buFont typeface="Wingdings" charset="2"/>
-              <a:buChar char=""/>
-            </a:pPr>
-            <a:r>
-              <a:rPr lang="en-BE" sz="2000" b="0" u="none" strike="noStrike">
-                <a:solidFill>
-                  <a:schemeClr val="dk1"/>
-                </a:solidFill>
-                <a:effectLst/>
-                <a:uFillTx/>
-                <a:latin typeface="Calibri"/>
-              </a:rPr>
-              <a:t>Sixth Outline Level</a:t>
-            </a:r>
-            <a:endParaRPr lang="en-BE" sz="2000" b="0" u="none" strike="noStrike">
-              <a:solidFill>
-                <a:schemeClr val="dk1"/>
-              </a:solidFill>
-              <a:effectLst/>
-              <a:uFillTx/>
-              <a:latin typeface="Calibri"/>
-            </a:endParaRPr>
-          </a:p>
-          <a:p>
-            <a:pPr marL="3024000" lvl="6" indent="-216000">
-              <a:lnSpc>
-                <a:spcPct val="90000"/>
-              </a:lnSpc>
-              <a:spcBef>
-                <a:spcPts val="283"/>
-              </a:spcBef>
-              <a:buClr>
-                <a:srgbClr val="000000"/>
-              </a:buClr>
-              <a:buSzPct val="45000"/>
-              <a:buFont typeface="Wingdings" charset="2"/>
-              <a:buChar char=""/>
-            </a:pPr>
-            <a:r>
-              <a:rPr lang="en-BE" sz="2000" b="0" u="none" strike="noStrike">
-                <a:solidFill>
-                  <a:schemeClr val="dk1"/>
-                </a:solidFill>
-                <a:effectLst/>
-                <a:uFillTx/>
-                <a:latin typeface="Calibri"/>
-              </a:rPr>
-              <a:t>Seventh Outline Level</a:t>
-            </a:r>
-            <a:endParaRPr lang="en-BE" sz="2000" b="0" u="none" strike="noStrike">
-              <a:solidFill>
-                <a:schemeClr val="dk1"/>
-              </a:solidFill>
-              <a:effectLst/>
-              <a:uFillTx/>
-              <a:latin typeface="Calibri"/>
             </a:endParaRPr>
           </a:p>
         </p:txBody>
@@ -596,7 +290,7 @@
 
 <file path=ppt/slideLayouts/slideLayout10.xml><?xml version="1.0" encoding="utf-8"?>
 <p:sldLayout xmlns:a="http://schemas.openxmlformats.org/drawingml/2006/main" xmlns:p="http://schemas.openxmlformats.org/presentationml/2006/main" xmlns:r="http://schemas.openxmlformats.org/officeDocument/2006/relationships" xmlns:p14="http://schemas.microsoft.com/office/powerpoint/2010/main" xmlns:p15="http://schemas.microsoft.com/office/powerpoint/2012/main" xmlns:mc="http://schemas.openxmlformats.org/markup-compatibility/2006" type="blank" preserve="1">
-  <p:cSld name="Content with Caption">
+  <p:cSld name="Comparison">
     <p:bg>
       <p:bgPr>
         <a:solidFill>
@@ -630,8 +324,8 @@
         </p:nvSpPr>
         <p:spPr>
           <a:xfrm>
-            <a:off x="839880" y="457200"/>
-            <a:ext cx="3931920" cy="1599840"/>
+            <a:off x="839880" y="365040"/>
+            <a:ext cx="10514880" cy="1324800"/>
           </a:xfrm>
           <a:prstGeom prst="rect">
             <a:avLst/>
@@ -642,7 +336,7 @@
           </a:ln>
         </p:spPr>
         <p:txBody>
-          <a:bodyPr lIns="91440" rIns="91440" tIns="45720" bIns="45720" anchor="b">
+          <a:bodyPr lIns="91440" rIns="91440" tIns="45720" bIns="45720" anchor="ctr">
             <a:noAutofit/>
           </a:bodyPr>
           <a:p>
@@ -651,9 +345,12 @@
                 <a:spcPct val="90000"/>
               </a:lnSpc>
               <a:buNone/>
-            </a:pPr>
-            <a:r>
-              <a:rPr lang="en-US" sz="3200" b="0" u="none" strike="noStrike">
+              <a:tabLst>
+                <a:tab algn="l" pos="0"/>
+              </a:tabLst>
+            </a:pPr>
+            <a:r>
+              <a:rPr lang="en-US" sz="4400" b="0" u="none" strike="noStrike">
                 <a:solidFill>
                   <a:schemeClr val="dk1"/>
                 </a:solidFill>
@@ -663,13 +360,13 @@
               </a:rPr>
               <a:t>Click to edit Master title style</a:t>
             </a:r>
-            <a:endParaRPr lang="en-BE" sz="3200" b="0" u="none" strike="noStrike">
-              <a:solidFill>
-                <a:schemeClr val="dk1"/>
-              </a:solidFill>
-              <a:effectLst/>
-              <a:uFillTx/>
-              <a:latin typeface="Calibri"/>
+            <a:endParaRPr lang="en-GB" sz="4400" b="0" u="none" strike="noStrike">
+              <a:solidFill>
+                <a:srgbClr val="000000"/>
+              </a:solidFill>
+              <a:effectLst/>
+              <a:uFillTx/>
+              <a:latin typeface="Arial"/>
             </a:endParaRPr>
           </a:p>
         </p:txBody>
@@ -686,8 +383,8 @@
         </p:nvSpPr>
         <p:spPr>
           <a:xfrm>
-            <a:off x="5183280" y="987480"/>
-            <a:ext cx="6171840" cy="4873320"/>
+            <a:off x="839880" y="1681200"/>
+            <a:ext cx="5157000" cy="823320"/>
           </a:xfrm>
           <a:prstGeom prst="rect">
             <a:avLst/>
@@ -698,25 +395,24 @@
           </a:ln>
         </p:spPr>
         <p:txBody>
-          <a:bodyPr lIns="91440" rIns="91440" tIns="45720" bIns="45720" anchor="t">
+          <a:bodyPr lIns="91440" rIns="91440" tIns="45720" bIns="45720" anchor="b">
             <a:noAutofit/>
           </a:bodyPr>
           <a:p>
-            <a:pPr marL="228600" indent="-228600" defTabSz="914400">
+            <a:pPr indent="0" defTabSz="914400">
               <a:lnSpc>
                 <a:spcPct val="90000"/>
               </a:lnSpc>
               <a:spcBef>
                 <a:spcPts val="1001"/>
               </a:spcBef>
-              <a:buClr>
-                <a:srgbClr val="000000"/>
-              </a:buClr>
-              <a:buFont typeface="Arial"/>
-              <a:buChar char="•"/>
-            </a:pPr>
-            <a:r>
-              <a:rPr lang="en-US" sz="3200" b="0" u="none" strike="noStrike">
+              <a:buNone/>
+              <a:tabLst>
+                <a:tab algn="l" pos="0"/>
+              </a:tabLst>
+            </a:pPr>
+            <a:r>
+              <a:rPr lang="en-US" sz="2400" b="1" u="none" strike="noStrike">
                 <a:solidFill>
                   <a:schemeClr val="dk1"/>
                 </a:solidFill>
@@ -726,149 +422,13 @@
               </a:rPr>
               <a:t>Click to edit Master text styles</a:t>
             </a:r>
-            <a:endParaRPr lang="en-BE" sz="3200" b="0" u="none" strike="noStrike">
-              <a:solidFill>
-                <a:schemeClr val="dk1"/>
-              </a:solidFill>
-              <a:effectLst/>
-              <a:uFillTx/>
-              <a:latin typeface="Calibri"/>
-            </a:endParaRPr>
-          </a:p>
-          <a:p>
-            <a:pPr marL="685800" lvl="1" indent="-228600" defTabSz="914400">
-              <a:lnSpc>
-                <a:spcPct val="90000"/>
-              </a:lnSpc>
-              <a:spcBef>
-                <a:spcPts val="499"/>
-              </a:spcBef>
-              <a:buClr>
-                <a:srgbClr val="000000"/>
-              </a:buClr>
-              <a:buFont typeface="Arial"/>
-              <a:buChar char="•"/>
-            </a:pPr>
-            <a:r>
-              <a:rPr lang="en-US" sz="2800" b="0" u="none" strike="noStrike">
-                <a:solidFill>
-                  <a:schemeClr val="dk1"/>
-                </a:solidFill>
-                <a:effectLst/>
-                <a:uFillTx/>
-                <a:latin typeface="Calibri"/>
-              </a:rPr>
-              <a:t>Second level</a:t>
-            </a:r>
-            <a:endParaRPr lang="en-BE" sz="2800" b="0" u="none" strike="noStrike">
-              <a:solidFill>
-                <a:schemeClr val="dk1"/>
-              </a:solidFill>
-              <a:effectLst/>
-              <a:uFillTx/>
-              <a:latin typeface="Calibri"/>
-            </a:endParaRPr>
-          </a:p>
-          <a:p>
-            <a:pPr marL="1143000" lvl="2" indent="-228600" defTabSz="914400">
-              <a:lnSpc>
-                <a:spcPct val="90000"/>
-              </a:lnSpc>
-              <a:spcBef>
-                <a:spcPts val="499"/>
-              </a:spcBef>
-              <a:buClr>
-                <a:srgbClr val="000000"/>
-              </a:buClr>
-              <a:buFont typeface="Arial"/>
-              <a:buChar char="•"/>
-            </a:pPr>
-            <a:r>
-              <a:rPr lang="en-US" sz="2400" b="0" u="none" strike="noStrike">
-                <a:solidFill>
-                  <a:schemeClr val="dk1"/>
-                </a:solidFill>
-                <a:effectLst/>
-                <a:uFillTx/>
-                <a:latin typeface="Calibri"/>
-              </a:rPr>
-              <a:t>Third level</a:t>
-            </a:r>
-            <a:endParaRPr lang="en-BE" sz="2400" b="0" u="none" strike="noStrike">
-              <a:solidFill>
-                <a:schemeClr val="dk1"/>
-              </a:solidFill>
-              <a:effectLst/>
-              <a:uFillTx/>
-              <a:latin typeface="Calibri"/>
-            </a:endParaRPr>
-          </a:p>
-          <a:p>
-            <a:pPr marL="1600200" lvl="3" indent="-228600" defTabSz="914400">
-              <a:lnSpc>
-                <a:spcPct val="90000"/>
-              </a:lnSpc>
-              <a:spcBef>
-                <a:spcPts val="499"/>
-              </a:spcBef>
-              <a:buClr>
-                <a:srgbClr val="000000"/>
-              </a:buClr>
-              <a:buFont typeface="Arial"/>
-              <a:buChar char="•"/>
-            </a:pPr>
-            <a:r>
-              <a:rPr lang="en-US" sz="2000" b="0" u="none" strike="noStrike">
-                <a:solidFill>
-                  <a:schemeClr val="dk1"/>
-                </a:solidFill>
-                <a:effectLst/>
-                <a:uFillTx/>
-                <a:latin typeface="Calibri"/>
-              </a:rPr>
-              <a:t>Fourth level</a:t>
-            </a:r>
-            <a:endParaRPr lang="en-BE" sz="2000" b="0" u="none" strike="noStrike">
-              <a:solidFill>
-                <a:schemeClr val="dk1"/>
-              </a:solidFill>
-              <a:effectLst/>
-              <a:uFillTx/>
-              <a:latin typeface="Calibri"/>
-            </a:endParaRPr>
-          </a:p>
-          <a:p>
-            <a:pPr marL="2057400" lvl="4" indent="-228600" defTabSz="914400">
-              <a:lnSpc>
-                <a:spcPct val="90000"/>
-              </a:lnSpc>
-              <a:spcBef>
-                <a:spcPts val="499"/>
-              </a:spcBef>
-              <a:buClr>
-                <a:srgbClr val="000000"/>
-              </a:buClr>
-              <a:buFont typeface="Arial"/>
-              <a:buChar char="•"/>
-            </a:pPr>
-            <a:r>
-              <a:rPr lang="en-US" sz="2000" b="0" u="none" strike="noStrike">
-                <a:solidFill>
-                  <a:schemeClr val="dk1"/>
-                </a:solidFill>
-                <a:effectLst/>
-                <a:uFillTx/>
-                <a:latin typeface="Calibri"/>
-              </a:rPr>
-              <a:t>Fifth level</a:t>
-            </a:r>
-            <a:endParaRPr lang="en-BE" sz="2000" b="0" u="none" strike="noStrike">
-              <a:solidFill>
-                <a:schemeClr val="dk1"/>
-              </a:solidFill>
-              <a:effectLst/>
-              <a:uFillTx/>
-              <a:latin typeface="Calibri"/>
+            <a:endParaRPr lang="en-GB" sz="2400" b="0" u="none" strike="noStrike">
+              <a:solidFill>
+                <a:srgbClr val="000000"/>
+              </a:solidFill>
+              <a:effectLst/>
+              <a:uFillTx/>
+              <a:latin typeface="Arial"/>
             </a:endParaRPr>
           </a:p>
         </p:txBody>
@@ -885,8 +445,8 @@
         </p:nvSpPr>
         <p:spPr>
           <a:xfrm>
-            <a:off x="839880" y="2057400"/>
-            <a:ext cx="3931920" cy="3811320"/>
+            <a:off x="839880" y="2505240"/>
+            <a:ext cx="5157000" cy="3683880"/>
           </a:xfrm>
           <a:prstGeom prst="rect">
             <a:avLst/>
@@ -901,20 +461,21 @@
             <a:noAutofit/>
           </a:bodyPr>
           <a:p>
-            <a:pPr indent="0" defTabSz="914400">
+            <a:pPr marL="228600" indent="-228600" defTabSz="914400">
               <a:lnSpc>
                 <a:spcPct val="90000"/>
               </a:lnSpc>
               <a:spcBef>
                 <a:spcPts val="1001"/>
               </a:spcBef>
-              <a:buNone/>
-              <a:tabLst>
-                <a:tab algn="l" pos="0"/>
-              </a:tabLst>
-            </a:pPr>
-            <a:r>
-              <a:rPr lang="en-US" sz="1600" b="0" u="none" strike="noStrike">
+              <a:buClr>
+                <a:srgbClr val="000000"/>
+              </a:buClr>
+              <a:buFont typeface="Arial"/>
+              <a:buChar char="•"/>
+            </a:pPr>
+            <a:r>
+              <a:rPr lang="en-US" sz="2800" b="0" u="none" strike="noStrike">
                 <a:solidFill>
                   <a:schemeClr val="dk1"/>
                 </a:solidFill>
@@ -924,13 +485,149 @@
               </a:rPr>
               <a:t>Click to edit Master text styles</a:t>
             </a:r>
-            <a:endParaRPr lang="en-BE" sz="1600" b="0" u="none" strike="noStrike">
-              <a:solidFill>
-                <a:schemeClr val="dk1"/>
-              </a:solidFill>
-              <a:effectLst/>
-              <a:uFillTx/>
-              <a:latin typeface="Calibri"/>
+            <a:endParaRPr lang="en-GB" sz="2800" b="0" u="none" strike="noStrike">
+              <a:solidFill>
+                <a:srgbClr val="000000"/>
+              </a:solidFill>
+              <a:effectLst/>
+              <a:uFillTx/>
+              <a:latin typeface="Arial"/>
+            </a:endParaRPr>
+          </a:p>
+          <a:p>
+            <a:pPr marL="685800" lvl="1" indent="-228600" defTabSz="914400">
+              <a:lnSpc>
+                <a:spcPct val="90000"/>
+              </a:lnSpc>
+              <a:spcBef>
+                <a:spcPts val="499"/>
+              </a:spcBef>
+              <a:buClr>
+                <a:srgbClr val="000000"/>
+              </a:buClr>
+              <a:buFont typeface="Arial"/>
+              <a:buChar char="•"/>
+            </a:pPr>
+            <a:r>
+              <a:rPr lang="en-US" sz="2400" b="0" u="none" strike="noStrike">
+                <a:solidFill>
+                  <a:schemeClr val="dk1"/>
+                </a:solidFill>
+                <a:effectLst/>
+                <a:uFillTx/>
+                <a:latin typeface="Calibri"/>
+              </a:rPr>
+              <a:t>Second level</a:t>
+            </a:r>
+            <a:endParaRPr lang="en-GB" sz="2400" b="0" u="none" strike="noStrike">
+              <a:solidFill>
+                <a:srgbClr val="000000"/>
+              </a:solidFill>
+              <a:effectLst/>
+              <a:uFillTx/>
+              <a:latin typeface="Arial"/>
+            </a:endParaRPr>
+          </a:p>
+          <a:p>
+            <a:pPr marL="1143000" lvl="2" indent="-228600" defTabSz="914400">
+              <a:lnSpc>
+                <a:spcPct val="90000"/>
+              </a:lnSpc>
+              <a:spcBef>
+                <a:spcPts val="499"/>
+              </a:spcBef>
+              <a:buClr>
+                <a:srgbClr val="000000"/>
+              </a:buClr>
+              <a:buFont typeface="Arial"/>
+              <a:buChar char="•"/>
+            </a:pPr>
+            <a:r>
+              <a:rPr lang="en-US" sz="2000" b="0" u="none" strike="noStrike">
+                <a:solidFill>
+                  <a:schemeClr val="dk1"/>
+                </a:solidFill>
+                <a:effectLst/>
+                <a:uFillTx/>
+                <a:latin typeface="Calibri"/>
+              </a:rPr>
+              <a:t>Third level</a:t>
+            </a:r>
+            <a:endParaRPr lang="en-GB" sz="2000" b="0" u="none" strike="noStrike">
+              <a:solidFill>
+                <a:srgbClr val="000000"/>
+              </a:solidFill>
+              <a:effectLst/>
+              <a:uFillTx/>
+              <a:latin typeface="Arial"/>
+            </a:endParaRPr>
+          </a:p>
+          <a:p>
+            <a:pPr marL="1600200" lvl="3" indent="-228600" defTabSz="914400">
+              <a:lnSpc>
+                <a:spcPct val="90000"/>
+              </a:lnSpc>
+              <a:spcBef>
+                <a:spcPts val="499"/>
+              </a:spcBef>
+              <a:buClr>
+                <a:srgbClr val="000000"/>
+              </a:buClr>
+              <a:buFont typeface="Arial"/>
+              <a:buChar char="•"/>
+            </a:pPr>
+            <a:r>
+              <a:rPr lang="en-US" sz="1800" b="0" u="none" strike="noStrike">
+                <a:solidFill>
+                  <a:schemeClr val="dk1"/>
+                </a:solidFill>
+                <a:effectLst/>
+                <a:uFillTx/>
+                <a:latin typeface="Calibri"/>
+              </a:rPr>
+              <a:t>Fourth level</a:t>
+            </a:r>
+            <a:endParaRPr lang="en-GB" sz="1800" b="0" u="none" strike="noStrike">
+              <a:solidFill>
+                <a:srgbClr val="000000"/>
+              </a:solidFill>
+              <a:effectLst/>
+              <a:uFillTx/>
+              <a:latin typeface="Arial"/>
+            </a:endParaRPr>
+          </a:p>
+          <a:p>
+            <a:pPr marL="2057400" lvl="4" indent="-228600" defTabSz="914400">
+              <a:lnSpc>
+                <a:spcPct val="90000"/>
+              </a:lnSpc>
+              <a:spcBef>
+                <a:spcPts val="499"/>
+              </a:spcBef>
+              <a:buClr>
+                <a:srgbClr val="000000"/>
+              </a:buClr>
+              <a:buFont typeface="Arial"/>
+              <a:buChar char="•"/>
+            </a:pPr>
+            <a:r>
+              <a:rPr lang="en-US" sz="1800" b="0" u="none" strike="noStrike">
+                <a:solidFill>
+                  <a:schemeClr val="dk1"/>
+                </a:solidFill>
+                <a:effectLst/>
+                <a:uFillTx/>
+                <a:latin typeface="Calibri"/>
+              </a:rPr>
+              <a:t>Fifth level</a:t>
+            </a:r>
+            <a:endParaRPr lang="en-GB" sz="1800" b="0" u="none" strike="noStrike">
+              <a:solidFill>
+                <a:srgbClr val="000000"/>
+              </a:solidFill>
+              <a:effectLst/>
+              <a:uFillTx/>
+              <a:latin typeface="Arial"/>
             </a:endParaRPr>
           </a:p>
         </p:txBody>
@@ -938,6 +635,267 @@
       <p:sp>
         <p:nvSpPr>
           <p:cNvPr id="51" name="PlaceHolder 4"/>
+          <p:cNvSpPr>
+            <a:spLocks noGrp="1"/>
+          </p:cNvSpPr>
+          <p:nvPr>
+            <p:ph type="body"/>
+          </p:nvPr>
+        </p:nvSpPr>
+        <p:spPr>
+          <a:xfrm>
+            <a:off x="6172200" y="1681200"/>
+            <a:ext cx="5182560" cy="823320"/>
+          </a:xfrm>
+          <a:prstGeom prst="rect">
+            <a:avLst/>
+          </a:prstGeom>
+          <a:noFill/>
+          <a:ln w="0">
+            <a:noFill/>
+          </a:ln>
+        </p:spPr>
+        <p:txBody>
+          <a:bodyPr lIns="91440" rIns="91440" tIns="45720" bIns="45720" anchor="b">
+            <a:noAutofit/>
+          </a:bodyPr>
+          <a:p>
+            <a:pPr indent="0" defTabSz="914400">
+              <a:lnSpc>
+                <a:spcPct val="90000"/>
+              </a:lnSpc>
+              <a:spcBef>
+                <a:spcPts val="1001"/>
+              </a:spcBef>
+              <a:buNone/>
+              <a:tabLst>
+                <a:tab algn="l" pos="0"/>
+              </a:tabLst>
+            </a:pPr>
+            <a:r>
+              <a:rPr lang="en-US" sz="2400" b="1" u="none" strike="noStrike">
+                <a:solidFill>
+                  <a:schemeClr val="dk1"/>
+                </a:solidFill>
+                <a:effectLst/>
+                <a:uFillTx/>
+                <a:latin typeface="Calibri"/>
+              </a:rPr>
+              <a:t>Click to edit Master text styles</a:t>
+            </a:r>
+            <a:endParaRPr lang="en-GB" sz="2400" b="0" u="none" strike="noStrike">
+              <a:solidFill>
+                <a:srgbClr val="000000"/>
+              </a:solidFill>
+              <a:effectLst/>
+              <a:uFillTx/>
+              <a:latin typeface="Arial"/>
+            </a:endParaRPr>
+          </a:p>
+        </p:txBody>
+      </p:sp>
+      <p:sp>
+        <p:nvSpPr>
+          <p:cNvPr id="52" name="PlaceHolder 5"/>
+          <p:cNvSpPr>
+            <a:spLocks noGrp="1"/>
+          </p:cNvSpPr>
+          <p:nvPr>
+            <p:ph type="body"/>
+          </p:nvPr>
+        </p:nvSpPr>
+        <p:spPr>
+          <a:xfrm>
+            <a:off x="6172200" y="2505240"/>
+            <a:ext cx="5182560" cy="3683880"/>
+          </a:xfrm>
+          <a:prstGeom prst="rect">
+            <a:avLst/>
+          </a:prstGeom>
+          <a:noFill/>
+          <a:ln w="0">
+            <a:noFill/>
+          </a:ln>
+        </p:spPr>
+        <p:txBody>
+          <a:bodyPr lIns="91440" rIns="91440" tIns="45720" bIns="45720" anchor="t">
+            <a:noAutofit/>
+          </a:bodyPr>
+          <a:p>
+            <a:pPr marL="228600" indent="-228600" defTabSz="914400">
+              <a:lnSpc>
+                <a:spcPct val="90000"/>
+              </a:lnSpc>
+              <a:spcBef>
+                <a:spcPts val="1001"/>
+              </a:spcBef>
+              <a:buClr>
+                <a:srgbClr val="000000"/>
+              </a:buClr>
+              <a:buFont typeface="Arial"/>
+              <a:buChar char="•"/>
+            </a:pPr>
+            <a:r>
+              <a:rPr lang="en-US" sz="2800" b="0" u="none" strike="noStrike">
+                <a:solidFill>
+                  <a:schemeClr val="dk1"/>
+                </a:solidFill>
+                <a:effectLst/>
+                <a:uFillTx/>
+                <a:latin typeface="Calibri"/>
+              </a:rPr>
+              <a:t>Click to edit Master text styles</a:t>
+            </a:r>
+            <a:endParaRPr lang="en-GB" sz="2800" b="0" u="none" strike="noStrike">
+              <a:solidFill>
+                <a:srgbClr val="000000"/>
+              </a:solidFill>
+              <a:effectLst/>
+              <a:uFillTx/>
+              <a:latin typeface="Arial"/>
+            </a:endParaRPr>
+          </a:p>
+          <a:p>
+            <a:pPr marL="685800" lvl="1" indent="-228600" defTabSz="914400">
+              <a:lnSpc>
+                <a:spcPct val="90000"/>
+              </a:lnSpc>
+              <a:spcBef>
+                <a:spcPts val="499"/>
+              </a:spcBef>
+              <a:buClr>
+                <a:srgbClr val="000000"/>
+              </a:buClr>
+              <a:buFont typeface="Arial"/>
+              <a:buChar char="•"/>
+            </a:pPr>
+            <a:r>
+              <a:rPr lang="en-US" sz="2400" b="0" u="none" strike="noStrike">
+                <a:solidFill>
+                  <a:schemeClr val="dk1"/>
+                </a:solidFill>
+                <a:effectLst/>
+                <a:uFillTx/>
+                <a:latin typeface="Calibri"/>
+              </a:rPr>
+              <a:t>Second level</a:t>
+            </a:r>
+            <a:endParaRPr lang="en-GB" sz="2400" b="0" u="none" strike="noStrike">
+              <a:solidFill>
+                <a:srgbClr val="000000"/>
+              </a:solidFill>
+              <a:effectLst/>
+              <a:uFillTx/>
+              <a:latin typeface="Arial"/>
+            </a:endParaRPr>
+          </a:p>
+          <a:p>
+            <a:pPr marL="1143000" lvl="2" indent="-228600" defTabSz="914400">
+              <a:lnSpc>
+                <a:spcPct val="90000"/>
+              </a:lnSpc>
+              <a:spcBef>
+                <a:spcPts val="499"/>
+              </a:spcBef>
+              <a:buClr>
+                <a:srgbClr val="000000"/>
+              </a:buClr>
+              <a:buFont typeface="Arial"/>
+              <a:buChar char="•"/>
+            </a:pPr>
+            <a:r>
+              <a:rPr lang="en-US" sz="2000" b="0" u="none" strike="noStrike">
+                <a:solidFill>
+                  <a:schemeClr val="dk1"/>
+                </a:solidFill>
+                <a:effectLst/>
+                <a:uFillTx/>
+                <a:latin typeface="Calibri"/>
+              </a:rPr>
+              <a:t>Third level</a:t>
+            </a:r>
+            <a:endParaRPr lang="en-GB" sz="2000" b="0" u="none" strike="noStrike">
+              <a:solidFill>
+                <a:srgbClr val="000000"/>
+              </a:solidFill>
+              <a:effectLst/>
+              <a:uFillTx/>
+              <a:latin typeface="Arial"/>
+            </a:endParaRPr>
+          </a:p>
+          <a:p>
+            <a:pPr marL="1600200" lvl="3" indent="-228600" defTabSz="914400">
+              <a:lnSpc>
+                <a:spcPct val="90000"/>
+              </a:lnSpc>
+              <a:spcBef>
+                <a:spcPts val="499"/>
+              </a:spcBef>
+              <a:buClr>
+                <a:srgbClr val="000000"/>
+              </a:buClr>
+              <a:buFont typeface="Arial"/>
+              <a:buChar char="•"/>
+            </a:pPr>
+            <a:r>
+              <a:rPr lang="en-US" sz="1800" b="0" u="none" strike="noStrike">
+                <a:solidFill>
+                  <a:schemeClr val="dk1"/>
+                </a:solidFill>
+                <a:effectLst/>
+                <a:uFillTx/>
+                <a:latin typeface="Calibri"/>
+              </a:rPr>
+              <a:t>Fourth level</a:t>
+            </a:r>
+            <a:endParaRPr lang="en-GB" sz="1800" b="0" u="none" strike="noStrike">
+              <a:solidFill>
+                <a:srgbClr val="000000"/>
+              </a:solidFill>
+              <a:effectLst/>
+              <a:uFillTx/>
+              <a:latin typeface="Arial"/>
+            </a:endParaRPr>
+          </a:p>
+          <a:p>
+            <a:pPr marL="2057400" lvl="4" indent="-228600" defTabSz="914400">
+              <a:lnSpc>
+                <a:spcPct val="90000"/>
+              </a:lnSpc>
+              <a:spcBef>
+                <a:spcPts val="499"/>
+              </a:spcBef>
+              <a:buClr>
+                <a:srgbClr val="000000"/>
+              </a:buClr>
+              <a:buFont typeface="Arial"/>
+              <a:buChar char="•"/>
+            </a:pPr>
+            <a:r>
+              <a:rPr lang="en-US" sz="1800" b="0" u="none" strike="noStrike">
+                <a:solidFill>
+                  <a:schemeClr val="dk1"/>
+                </a:solidFill>
+                <a:effectLst/>
+                <a:uFillTx/>
+                <a:latin typeface="Calibri"/>
+              </a:rPr>
+              <a:t>Fifth level</a:t>
+            </a:r>
+            <a:endParaRPr lang="en-GB" sz="1800" b="0" u="none" strike="noStrike">
+              <a:solidFill>
+                <a:srgbClr val="000000"/>
+              </a:solidFill>
+              <a:effectLst/>
+              <a:uFillTx/>
+              <a:latin typeface="Arial"/>
+            </a:endParaRPr>
+          </a:p>
+        </p:txBody>
+      </p:sp>
+      <p:sp>
+        <p:nvSpPr>
+          <p:cNvPr id="53" name="PlaceHolder 6"/>
           <p:cNvSpPr>
             <a:spLocks noGrp="1"/>
           </p:cNvSpPr>
@@ -948,7 +906,7 @@
         <p:spPr>
           <a:xfrm>
             <a:off x="838080" y="6356520"/>
-            <a:ext cx="2742840" cy="364680"/>
+            <a:ext cx="2742480" cy="364320"/>
           </a:xfrm>
           <a:prstGeom prst="rect">
             <a:avLst/>
@@ -968,6 +926,9 @@
                 <a:spcPct val="100000"/>
               </a:lnSpc>
               <a:buNone/>
+              <a:tabLst>
+                <a:tab algn="l" pos="0"/>
+              </a:tabLst>
               <a:defRPr lang="en-BE" sz="1200" b="0" u="none" strike="noStrike">
                 <a:solidFill>
                   <a:schemeClr val="dk1">
@@ -986,6 +947,9 @@
                 <a:spcPct val="100000"/>
               </a:lnSpc>
               <a:buNone/>
+              <a:tabLst>
+                <a:tab algn="l" pos="0"/>
+              </a:tabLst>
             </a:pPr>
             <a:r>
               <a:rPr lang="en-BE" sz="1200" b="0" u="none" strike="noStrike">
@@ -1013,7 +977,7 @@
       </p:sp>
       <p:sp>
         <p:nvSpPr>
-          <p:cNvPr id="52" name="PlaceHolder 5"/>
+          <p:cNvPr id="54" name="PlaceHolder 7"/>
           <p:cNvSpPr>
             <a:spLocks noGrp="1"/>
           </p:cNvSpPr>
@@ -1024,7 +988,7 @@
         <p:spPr>
           <a:xfrm>
             <a:off x="4038480" y="6356520"/>
-            <a:ext cx="4114440" cy="364680"/>
+            <a:ext cx="4114080" cy="364320"/>
           </a:xfrm>
           <a:prstGeom prst="rect">
             <a:avLst/>
@@ -1040,7 +1004,13 @@
           </a:bodyPr>
           <a:lstStyle>
             <a:lvl1pPr indent="0" algn="ctr">
-              <a:buNone/>
+              <a:lnSpc>
+                <a:spcPct val="100000"/>
+              </a:lnSpc>
+              <a:buNone/>
+              <a:tabLst>
+                <a:tab algn="l" pos="0"/>
+              </a:tabLst>
               <a:defRPr lang="en-GB" sz="1400" b="0" u="none" strike="noStrike">
                 <a:solidFill>
                   <a:srgbClr val="000000"/>
@@ -1053,7 +1023,13 @@
           </a:lstStyle>
           <a:p>
             <a:pPr indent="0" algn="ctr">
-              <a:buNone/>
+              <a:lnSpc>
+                <a:spcPct val="100000"/>
+              </a:lnSpc>
+              <a:buNone/>
+              <a:tabLst>
+                <a:tab algn="l" pos="0"/>
+              </a:tabLst>
             </a:pPr>
             <a:r>
               <a:rPr lang="en-GB" sz="1400" b="0" u="none" strike="noStrike">
@@ -1079,7 +1055,7 @@
       </p:sp>
       <p:sp>
         <p:nvSpPr>
-          <p:cNvPr id="53" name="PlaceHolder 6"/>
+          <p:cNvPr id="55" name="PlaceHolder 8"/>
           <p:cNvSpPr>
             <a:spLocks noGrp="1"/>
           </p:cNvSpPr>
@@ -1090,7 +1066,7 @@
         <p:spPr>
           <a:xfrm>
             <a:off x="8610480" y="6356520"/>
-            <a:ext cx="2742840" cy="364680"/>
+            <a:ext cx="2742480" cy="364320"/>
           </a:xfrm>
           <a:prstGeom prst="rect">
             <a:avLst/>
@@ -1110,6 +1086,9 @@
                 <a:spcPct val="100000"/>
               </a:lnSpc>
               <a:buNone/>
+              <a:tabLst>
+                <a:tab algn="l" pos="0"/>
+              </a:tabLst>
               <a:defRPr lang="en-BE" sz="1200" b="0" u="none" strike="noStrike">
                 <a:solidFill>
                   <a:schemeClr val="dk1">
@@ -1128,8 +1107,11 @@
                 <a:spcPct val="100000"/>
               </a:lnSpc>
               <a:buNone/>
-            </a:pPr>
-            <a:fld id="{C25645AA-13C2-4CA6-B8D5-0651A4D702FF}" type="slidenum">
+              <a:tabLst>
+                <a:tab algn="l" pos="0"/>
+              </a:tabLst>
+            </a:pPr>
+            <a:fld id="{4796F340-AC5C-4BCF-897A-14B8A19B1CC7}" type="slidenum">
               <a:rPr lang="en-BE" sz="1200" b="0" u="none" strike="noStrike">
                 <a:solidFill>
                   <a:schemeClr val="dk1">
@@ -1159,6 +1141,927 @@
 </file>
 
 <file path=ppt/slideLayouts/slideLayout11.xml><?xml version="1.0" encoding="utf-8"?>
+<p:sldLayout xmlns:a="http://schemas.openxmlformats.org/drawingml/2006/main" xmlns:p="http://schemas.openxmlformats.org/presentationml/2006/main" xmlns:r="http://schemas.openxmlformats.org/officeDocument/2006/relationships" xmlns:p14="http://schemas.microsoft.com/office/powerpoint/2010/main" xmlns:p15="http://schemas.microsoft.com/office/powerpoint/2012/main" xmlns:mc="http://schemas.openxmlformats.org/markup-compatibility/2006" type="titleOnly" preserve="1">
+  <p:cSld name="Title Only">
+    <p:bg>
+      <p:bgPr>
+        <a:solidFill>
+          <a:srgbClr val="ffffff"/>
+        </a:solidFill>
+      </p:bgPr>
+    </p:bg>
+    <p:spTree>
+      <p:nvGrpSpPr>
+        <p:cNvPr id="1" name=""/>
+        <p:cNvGrpSpPr/>
+        <p:nvPr/>
+      </p:nvGrpSpPr>
+      <p:grpSpPr>
+        <a:xfrm>
+          <a:off x="0" y="0"/>
+          <a:ext cx="0" cy="0"/>
+          <a:chOff x="0" y="0"/>
+          <a:chExt cx="0" cy="0"/>
+        </a:xfrm>
+      </p:grpSpPr>
+      <p:sp>
+        <p:nvSpPr>
+          <p:cNvPr id="56" name="PlaceHolder 1"/>
+          <p:cNvSpPr>
+            <a:spLocks noGrp="1"/>
+          </p:cNvSpPr>
+          <p:nvPr>
+            <p:ph type="title"/>
+          </p:nvPr>
+        </p:nvSpPr>
+        <p:spPr>
+          <a:xfrm>
+            <a:off x="838080" y="365040"/>
+            <a:ext cx="10514880" cy="1324800"/>
+          </a:xfrm>
+          <a:prstGeom prst="rect">
+            <a:avLst/>
+          </a:prstGeom>
+          <a:noFill/>
+          <a:ln w="0">
+            <a:noFill/>
+          </a:ln>
+        </p:spPr>
+        <p:txBody>
+          <a:bodyPr lIns="91440" rIns="91440" tIns="45720" bIns="45720" anchor="ctr">
+            <a:noAutofit/>
+          </a:bodyPr>
+          <a:p>
+            <a:pPr indent="0" defTabSz="914400">
+              <a:lnSpc>
+                <a:spcPct val="90000"/>
+              </a:lnSpc>
+              <a:buNone/>
+              <a:tabLst>
+                <a:tab algn="l" pos="0"/>
+              </a:tabLst>
+            </a:pPr>
+            <a:r>
+              <a:rPr lang="en-US" sz="4400" b="0" u="none" strike="noStrike">
+                <a:solidFill>
+                  <a:schemeClr val="dk1"/>
+                </a:solidFill>
+                <a:effectLst/>
+                <a:uFillTx/>
+                <a:latin typeface="Calibri Light"/>
+              </a:rPr>
+              <a:t>Click to edit Master title style</a:t>
+            </a:r>
+            <a:endParaRPr lang="en-GB" sz="4400" b="0" u="none" strike="noStrike">
+              <a:solidFill>
+                <a:srgbClr val="000000"/>
+              </a:solidFill>
+              <a:effectLst/>
+              <a:uFillTx/>
+              <a:latin typeface="Arial"/>
+            </a:endParaRPr>
+          </a:p>
+        </p:txBody>
+      </p:sp>
+      <p:sp>
+        <p:nvSpPr>
+          <p:cNvPr id="57" name="PlaceHolder 2"/>
+          <p:cNvSpPr>
+            <a:spLocks noGrp="1"/>
+          </p:cNvSpPr>
+          <p:nvPr>
+            <p:ph type="dt" idx="31"/>
+          </p:nvPr>
+        </p:nvSpPr>
+        <p:spPr>
+          <a:xfrm>
+            <a:off x="838080" y="6356520"/>
+            <a:ext cx="2742480" cy="364320"/>
+          </a:xfrm>
+          <a:prstGeom prst="rect">
+            <a:avLst/>
+          </a:prstGeom>
+          <a:noFill/>
+          <a:ln w="0">
+            <a:noFill/>
+          </a:ln>
+        </p:spPr>
+        <p:txBody>
+          <a:bodyPr lIns="91440" rIns="91440" tIns="45720" bIns="45720" anchor="ctr">
+            <a:noAutofit/>
+          </a:bodyPr>
+          <a:lstStyle>
+            <a:lvl1pPr indent="0" defTabSz="914400">
+              <a:lnSpc>
+                <a:spcPct val="100000"/>
+              </a:lnSpc>
+              <a:buNone/>
+              <a:tabLst>
+                <a:tab algn="l" pos="0"/>
+              </a:tabLst>
+              <a:defRPr lang="en-BE" sz="1200" b="0" u="none" strike="noStrike">
+                <a:solidFill>
+                  <a:schemeClr val="dk1">
+                    <a:tint val="75000"/>
+                  </a:schemeClr>
+                </a:solidFill>
+                <a:effectLst/>
+                <a:uFillTx/>
+                <a:latin typeface="Calibri"/>
+              </a:defRPr>
+            </a:lvl1pPr>
+          </a:lstStyle>
+          <a:p>
+            <a:pPr indent="0" defTabSz="914400">
+              <a:lnSpc>
+                <a:spcPct val="100000"/>
+              </a:lnSpc>
+              <a:buNone/>
+              <a:tabLst>
+                <a:tab algn="l" pos="0"/>
+              </a:tabLst>
+            </a:pPr>
+            <a:r>
+              <a:rPr lang="en-BE" sz="1200" b="0" u="none" strike="noStrike">
+                <a:solidFill>
+                  <a:schemeClr val="dk1">
+                    <a:tint val="75000"/>
+                  </a:schemeClr>
+                </a:solidFill>
+                <a:effectLst/>
+                <a:uFillTx/>
+                <a:latin typeface="Calibri"/>
+              </a:rPr>
+              <a:t>&lt;date/time&gt;</a:t>
+            </a:r>
+            <a:endParaRPr lang="en-GB" sz="1200" b="0" u="none" strike="noStrike">
+              <a:solidFill>
+                <a:srgbClr val="000000"/>
+              </a:solidFill>
+              <a:effectLst/>
+              <a:uFillTx/>
+              <a:latin typeface="Times New Roman"/>
+            </a:endParaRPr>
+          </a:p>
+        </p:txBody>
+      </p:sp>
+      <p:sp>
+        <p:nvSpPr>
+          <p:cNvPr id="58" name="PlaceHolder 3"/>
+          <p:cNvSpPr>
+            <a:spLocks noGrp="1"/>
+          </p:cNvSpPr>
+          <p:nvPr>
+            <p:ph type="ftr" idx="32"/>
+          </p:nvPr>
+        </p:nvSpPr>
+        <p:spPr>
+          <a:xfrm>
+            <a:off x="4038480" y="6356520"/>
+            <a:ext cx="4114080" cy="364320"/>
+          </a:xfrm>
+          <a:prstGeom prst="rect">
+            <a:avLst/>
+          </a:prstGeom>
+          <a:noFill/>
+          <a:ln w="0">
+            <a:noFill/>
+          </a:ln>
+        </p:spPr>
+        <p:txBody>
+          <a:bodyPr lIns="91440" rIns="91440" tIns="45720" bIns="45720" anchor="ctr">
+            <a:noAutofit/>
+          </a:bodyPr>
+          <a:lstStyle>
+            <a:lvl1pPr indent="0" algn="ctr">
+              <a:lnSpc>
+                <a:spcPct val="100000"/>
+              </a:lnSpc>
+              <a:buNone/>
+              <a:tabLst>
+                <a:tab algn="l" pos="0"/>
+              </a:tabLst>
+              <a:defRPr lang="en-GB" sz="1400" b="0" u="none" strike="noStrike">
+                <a:solidFill>
+                  <a:srgbClr val="000000"/>
+                </a:solidFill>
+                <a:effectLst/>
+                <a:uFillTx/>
+                <a:latin typeface="Times New Roman"/>
+              </a:defRPr>
+            </a:lvl1pPr>
+          </a:lstStyle>
+          <a:p>
+            <a:pPr indent="0" algn="ctr">
+              <a:lnSpc>
+                <a:spcPct val="100000"/>
+              </a:lnSpc>
+              <a:buNone/>
+              <a:tabLst>
+                <a:tab algn="l" pos="0"/>
+              </a:tabLst>
+            </a:pPr>
+            <a:r>
+              <a:rPr lang="en-GB" sz="1400" b="0" u="none" strike="noStrike">
+                <a:solidFill>
+                  <a:srgbClr val="000000"/>
+                </a:solidFill>
+                <a:effectLst/>
+                <a:uFillTx/>
+                <a:latin typeface="Times New Roman"/>
+              </a:rPr>
+              <a:t>&lt;footer&gt;</a:t>
+            </a:r>
+            <a:endParaRPr lang="en-GB" sz="1400" b="0" u="none" strike="noStrike">
+              <a:solidFill>
+                <a:srgbClr val="000000"/>
+              </a:solidFill>
+              <a:effectLst/>
+              <a:uFillTx/>
+              <a:latin typeface="Times New Roman"/>
+            </a:endParaRPr>
+          </a:p>
+        </p:txBody>
+      </p:sp>
+      <p:sp>
+        <p:nvSpPr>
+          <p:cNvPr id="59" name="PlaceHolder 4"/>
+          <p:cNvSpPr>
+            <a:spLocks noGrp="1"/>
+          </p:cNvSpPr>
+          <p:nvPr>
+            <p:ph type="sldNum" idx="33"/>
+          </p:nvPr>
+        </p:nvSpPr>
+        <p:spPr>
+          <a:xfrm>
+            <a:off x="8610480" y="6356520"/>
+            <a:ext cx="2742480" cy="364320"/>
+          </a:xfrm>
+          <a:prstGeom prst="rect">
+            <a:avLst/>
+          </a:prstGeom>
+          <a:noFill/>
+          <a:ln w="0">
+            <a:noFill/>
+          </a:ln>
+        </p:spPr>
+        <p:txBody>
+          <a:bodyPr lIns="91440" rIns="91440" tIns="45720" bIns="45720" anchor="ctr">
+            <a:noAutofit/>
+          </a:bodyPr>
+          <a:lstStyle>
+            <a:lvl1pPr indent="0" algn="r" defTabSz="914400">
+              <a:lnSpc>
+                <a:spcPct val="100000"/>
+              </a:lnSpc>
+              <a:buNone/>
+              <a:tabLst>
+                <a:tab algn="l" pos="0"/>
+              </a:tabLst>
+              <a:defRPr lang="en-BE" sz="1200" b="0" u="none" strike="noStrike">
+                <a:solidFill>
+                  <a:schemeClr val="dk1">
+                    <a:tint val="75000"/>
+                  </a:schemeClr>
+                </a:solidFill>
+                <a:effectLst/>
+                <a:uFillTx/>
+                <a:latin typeface="Calibri"/>
+              </a:defRPr>
+            </a:lvl1pPr>
+          </a:lstStyle>
+          <a:p>
+            <a:pPr indent="0" algn="r" defTabSz="914400">
+              <a:lnSpc>
+                <a:spcPct val="100000"/>
+              </a:lnSpc>
+              <a:buNone/>
+              <a:tabLst>
+                <a:tab algn="l" pos="0"/>
+              </a:tabLst>
+            </a:pPr>
+            <a:fld id="{951B245F-C077-4693-AD0C-FAE907A50A3F}" type="slidenum">
+              <a:rPr lang="en-BE" sz="1200" b="0" u="none" strike="noStrike">
+                <a:solidFill>
+                  <a:schemeClr val="dk1">
+                    <a:tint val="75000"/>
+                  </a:schemeClr>
+                </a:solidFill>
+                <a:effectLst/>
+                <a:uFillTx/>
+                <a:latin typeface="Calibri"/>
+              </a:rPr>
+              <a:t>&lt;number&gt;</a:t>
+            </a:fld>
+            <a:endParaRPr lang="en-GB" sz="1200" b="0" u="none" strike="noStrike">
+              <a:solidFill>
+                <a:srgbClr val="000000"/>
+              </a:solidFill>
+              <a:effectLst/>
+              <a:uFillTx/>
+              <a:latin typeface="Times New Roman"/>
+            </a:endParaRPr>
+          </a:p>
+        </p:txBody>
+      </p:sp>
+    </p:spTree>
+  </p:cSld>
+</p:sldLayout>
+</file>
+
+<file path=ppt/slideLayouts/slideLayout2.xml><?xml version="1.0" encoding="utf-8"?>
+<p:sldLayout xmlns:a="http://schemas.openxmlformats.org/drawingml/2006/main" xmlns:p="http://schemas.openxmlformats.org/presentationml/2006/main" xmlns:r="http://schemas.openxmlformats.org/officeDocument/2006/relationships" xmlns:p14="http://schemas.microsoft.com/office/powerpoint/2010/main" xmlns:p15="http://schemas.microsoft.com/office/powerpoint/2012/main" xmlns:mc="http://schemas.openxmlformats.org/markup-compatibility/2006" type="blank" preserve="1">
+  <p:cSld name="Content with Caption">
+    <p:bg>
+      <p:bgPr>
+        <a:solidFill>
+          <a:srgbClr val="ffffff"/>
+        </a:solidFill>
+      </p:bgPr>
+    </p:bg>
+    <p:spTree>
+      <p:nvGrpSpPr>
+        <p:cNvPr id="1" name=""/>
+        <p:cNvGrpSpPr/>
+        <p:nvPr/>
+      </p:nvGrpSpPr>
+      <p:grpSpPr>
+        <a:xfrm>
+          <a:off x="0" y="0"/>
+          <a:ext cx="0" cy="0"/>
+          <a:chOff x="0" y="0"/>
+          <a:chExt cx="0" cy="0"/>
+        </a:xfrm>
+      </p:grpSpPr>
+      <p:sp>
+        <p:nvSpPr>
+          <p:cNvPr id="5" name="PlaceHolder 1"/>
+          <p:cNvSpPr>
+            <a:spLocks noGrp="1"/>
+          </p:cNvSpPr>
+          <p:nvPr>
+            <p:ph type="title"/>
+          </p:nvPr>
+        </p:nvSpPr>
+        <p:spPr>
+          <a:xfrm>
+            <a:off x="839880" y="457200"/>
+            <a:ext cx="3931560" cy="1599480"/>
+          </a:xfrm>
+          <a:prstGeom prst="rect">
+            <a:avLst/>
+          </a:prstGeom>
+          <a:noFill/>
+          <a:ln w="0">
+            <a:noFill/>
+          </a:ln>
+        </p:spPr>
+        <p:txBody>
+          <a:bodyPr lIns="91440" rIns="91440" tIns="45720" bIns="45720" anchor="b">
+            <a:noAutofit/>
+          </a:bodyPr>
+          <a:p>
+            <a:pPr indent="0" defTabSz="914400">
+              <a:lnSpc>
+                <a:spcPct val="90000"/>
+              </a:lnSpc>
+              <a:buNone/>
+              <a:tabLst>
+                <a:tab algn="l" pos="0"/>
+              </a:tabLst>
+            </a:pPr>
+            <a:r>
+              <a:rPr lang="en-US" sz="3200" b="0" u="none" strike="noStrike">
+                <a:solidFill>
+                  <a:schemeClr val="dk1"/>
+                </a:solidFill>
+                <a:effectLst/>
+                <a:uFillTx/>
+                <a:latin typeface="Calibri Light"/>
+              </a:rPr>
+              <a:t>Click to edit Master title style</a:t>
+            </a:r>
+            <a:endParaRPr lang="en-GB" sz="3200" b="0" u="none" strike="noStrike">
+              <a:solidFill>
+                <a:srgbClr val="000000"/>
+              </a:solidFill>
+              <a:effectLst/>
+              <a:uFillTx/>
+              <a:latin typeface="Arial"/>
+            </a:endParaRPr>
+          </a:p>
+        </p:txBody>
+      </p:sp>
+      <p:sp>
+        <p:nvSpPr>
+          <p:cNvPr id="6" name="PlaceHolder 2"/>
+          <p:cNvSpPr>
+            <a:spLocks noGrp="1"/>
+          </p:cNvSpPr>
+          <p:nvPr>
+            <p:ph type="body"/>
+          </p:nvPr>
+        </p:nvSpPr>
+        <p:spPr>
+          <a:xfrm>
+            <a:off x="5183280" y="987480"/>
+            <a:ext cx="6171480" cy="4872960"/>
+          </a:xfrm>
+          <a:prstGeom prst="rect">
+            <a:avLst/>
+          </a:prstGeom>
+          <a:noFill/>
+          <a:ln w="0">
+            <a:noFill/>
+          </a:ln>
+        </p:spPr>
+        <p:txBody>
+          <a:bodyPr lIns="91440" rIns="91440" tIns="45720" bIns="45720" anchor="t">
+            <a:noAutofit/>
+          </a:bodyPr>
+          <a:p>
+            <a:pPr marL="228600" indent="-228600" defTabSz="914400">
+              <a:lnSpc>
+                <a:spcPct val="90000"/>
+              </a:lnSpc>
+              <a:spcBef>
+                <a:spcPts val="1001"/>
+              </a:spcBef>
+              <a:buClr>
+                <a:srgbClr val="000000"/>
+              </a:buClr>
+              <a:buFont typeface="Arial"/>
+              <a:buChar char="•"/>
+            </a:pPr>
+            <a:r>
+              <a:rPr lang="en-US" sz="3200" b="0" u="none" strike="noStrike">
+                <a:solidFill>
+                  <a:schemeClr val="dk1"/>
+                </a:solidFill>
+                <a:effectLst/>
+                <a:uFillTx/>
+                <a:latin typeface="Calibri"/>
+              </a:rPr>
+              <a:t>Click to edit Master text styles</a:t>
+            </a:r>
+            <a:endParaRPr lang="en-GB" sz="3200" b="0" u="none" strike="noStrike">
+              <a:solidFill>
+                <a:srgbClr val="000000"/>
+              </a:solidFill>
+              <a:effectLst/>
+              <a:uFillTx/>
+              <a:latin typeface="Arial"/>
+            </a:endParaRPr>
+          </a:p>
+          <a:p>
+            <a:pPr marL="685800" lvl="1" indent="-228600" defTabSz="914400">
+              <a:lnSpc>
+                <a:spcPct val="90000"/>
+              </a:lnSpc>
+              <a:spcBef>
+                <a:spcPts val="499"/>
+              </a:spcBef>
+              <a:buClr>
+                <a:srgbClr val="000000"/>
+              </a:buClr>
+              <a:buFont typeface="Arial"/>
+              <a:buChar char="•"/>
+            </a:pPr>
+            <a:r>
+              <a:rPr lang="en-US" sz="2800" b="0" u="none" strike="noStrike">
+                <a:solidFill>
+                  <a:schemeClr val="dk1"/>
+                </a:solidFill>
+                <a:effectLst/>
+                <a:uFillTx/>
+                <a:latin typeface="Calibri"/>
+              </a:rPr>
+              <a:t>Second level</a:t>
+            </a:r>
+            <a:endParaRPr lang="en-GB" sz="2800" b="0" u="none" strike="noStrike">
+              <a:solidFill>
+                <a:srgbClr val="000000"/>
+              </a:solidFill>
+              <a:effectLst/>
+              <a:uFillTx/>
+              <a:latin typeface="Arial"/>
+            </a:endParaRPr>
+          </a:p>
+          <a:p>
+            <a:pPr marL="1143000" lvl="2" indent="-228600" defTabSz="914400">
+              <a:lnSpc>
+                <a:spcPct val="90000"/>
+              </a:lnSpc>
+              <a:spcBef>
+                <a:spcPts val="499"/>
+              </a:spcBef>
+              <a:buClr>
+                <a:srgbClr val="000000"/>
+              </a:buClr>
+              <a:buFont typeface="Arial"/>
+              <a:buChar char="•"/>
+            </a:pPr>
+            <a:r>
+              <a:rPr lang="en-US" sz="2400" b="0" u="none" strike="noStrike">
+                <a:solidFill>
+                  <a:schemeClr val="dk1"/>
+                </a:solidFill>
+                <a:effectLst/>
+                <a:uFillTx/>
+                <a:latin typeface="Calibri"/>
+              </a:rPr>
+              <a:t>Third level</a:t>
+            </a:r>
+            <a:endParaRPr lang="en-GB" sz="2400" b="0" u="none" strike="noStrike">
+              <a:solidFill>
+                <a:srgbClr val="000000"/>
+              </a:solidFill>
+              <a:effectLst/>
+              <a:uFillTx/>
+              <a:latin typeface="Arial"/>
+            </a:endParaRPr>
+          </a:p>
+          <a:p>
+            <a:pPr marL="1600200" lvl="3" indent="-228600" defTabSz="914400">
+              <a:lnSpc>
+                <a:spcPct val="90000"/>
+              </a:lnSpc>
+              <a:spcBef>
+                <a:spcPts val="499"/>
+              </a:spcBef>
+              <a:buClr>
+                <a:srgbClr val="000000"/>
+              </a:buClr>
+              <a:buFont typeface="Arial"/>
+              <a:buChar char="•"/>
+            </a:pPr>
+            <a:r>
+              <a:rPr lang="en-US" sz="2000" b="0" u="none" strike="noStrike">
+                <a:solidFill>
+                  <a:schemeClr val="dk1"/>
+                </a:solidFill>
+                <a:effectLst/>
+                <a:uFillTx/>
+                <a:latin typeface="Calibri"/>
+              </a:rPr>
+              <a:t>Fourth level</a:t>
+            </a:r>
+            <a:endParaRPr lang="en-GB" sz="2000" b="0" u="none" strike="noStrike">
+              <a:solidFill>
+                <a:srgbClr val="000000"/>
+              </a:solidFill>
+              <a:effectLst/>
+              <a:uFillTx/>
+              <a:latin typeface="Arial"/>
+            </a:endParaRPr>
+          </a:p>
+          <a:p>
+            <a:pPr marL="2057400" lvl="4" indent="-228600" defTabSz="914400">
+              <a:lnSpc>
+                <a:spcPct val="90000"/>
+              </a:lnSpc>
+              <a:spcBef>
+                <a:spcPts val="499"/>
+              </a:spcBef>
+              <a:buClr>
+                <a:srgbClr val="000000"/>
+              </a:buClr>
+              <a:buFont typeface="Arial"/>
+              <a:buChar char="•"/>
+            </a:pPr>
+            <a:r>
+              <a:rPr lang="en-US" sz="2000" b="0" u="none" strike="noStrike">
+                <a:solidFill>
+                  <a:schemeClr val="dk1"/>
+                </a:solidFill>
+                <a:effectLst/>
+                <a:uFillTx/>
+                <a:latin typeface="Calibri"/>
+              </a:rPr>
+              <a:t>Fifth level</a:t>
+            </a:r>
+            <a:endParaRPr lang="en-GB" sz="2000" b="0" u="none" strike="noStrike">
+              <a:solidFill>
+                <a:srgbClr val="000000"/>
+              </a:solidFill>
+              <a:effectLst/>
+              <a:uFillTx/>
+              <a:latin typeface="Arial"/>
+            </a:endParaRPr>
+          </a:p>
+        </p:txBody>
+      </p:sp>
+      <p:sp>
+        <p:nvSpPr>
+          <p:cNvPr id="7" name="PlaceHolder 3"/>
+          <p:cNvSpPr>
+            <a:spLocks noGrp="1"/>
+          </p:cNvSpPr>
+          <p:nvPr>
+            <p:ph type="body"/>
+          </p:nvPr>
+        </p:nvSpPr>
+        <p:spPr>
+          <a:xfrm>
+            <a:off x="839880" y="2057400"/>
+            <a:ext cx="3931560" cy="3810960"/>
+          </a:xfrm>
+          <a:prstGeom prst="rect">
+            <a:avLst/>
+          </a:prstGeom>
+          <a:noFill/>
+          <a:ln w="0">
+            <a:noFill/>
+          </a:ln>
+        </p:spPr>
+        <p:txBody>
+          <a:bodyPr lIns="91440" rIns="91440" tIns="45720" bIns="45720" anchor="t">
+            <a:noAutofit/>
+          </a:bodyPr>
+          <a:p>
+            <a:pPr indent="0" defTabSz="914400">
+              <a:lnSpc>
+                <a:spcPct val="90000"/>
+              </a:lnSpc>
+              <a:spcBef>
+                <a:spcPts val="1001"/>
+              </a:spcBef>
+              <a:buNone/>
+              <a:tabLst>
+                <a:tab algn="l" pos="0"/>
+              </a:tabLst>
+            </a:pPr>
+            <a:r>
+              <a:rPr lang="en-US" sz="1600" b="0" u="none" strike="noStrike">
+                <a:solidFill>
+                  <a:schemeClr val="dk1"/>
+                </a:solidFill>
+                <a:effectLst/>
+                <a:uFillTx/>
+                <a:latin typeface="Calibri"/>
+              </a:rPr>
+              <a:t>Click to edit Master text styles</a:t>
+            </a:r>
+            <a:endParaRPr lang="en-GB" sz="1600" b="0" u="none" strike="noStrike">
+              <a:solidFill>
+                <a:srgbClr val="000000"/>
+              </a:solidFill>
+              <a:effectLst/>
+              <a:uFillTx/>
+              <a:latin typeface="Arial"/>
+            </a:endParaRPr>
+          </a:p>
+        </p:txBody>
+      </p:sp>
+      <p:sp>
+        <p:nvSpPr>
+          <p:cNvPr id="8" name="PlaceHolder 4"/>
+          <p:cNvSpPr>
+            <a:spLocks noGrp="1"/>
+          </p:cNvSpPr>
+          <p:nvPr>
+            <p:ph type="dt" idx="4"/>
+          </p:nvPr>
+        </p:nvSpPr>
+        <p:spPr>
+          <a:xfrm>
+            <a:off x="838080" y="6356520"/>
+            <a:ext cx="2742480" cy="364320"/>
+          </a:xfrm>
+          <a:prstGeom prst="rect">
+            <a:avLst/>
+          </a:prstGeom>
+          <a:noFill/>
+          <a:ln w="0">
+            <a:noFill/>
+          </a:ln>
+        </p:spPr>
+        <p:txBody>
+          <a:bodyPr lIns="91440" rIns="91440" tIns="45720" bIns="45720" anchor="ctr">
+            <a:noAutofit/>
+          </a:bodyPr>
+          <a:lstStyle>
+            <a:lvl1pPr indent="0" defTabSz="914400">
+              <a:lnSpc>
+                <a:spcPct val="100000"/>
+              </a:lnSpc>
+              <a:buNone/>
+              <a:tabLst>
+                <a:tab algn="l" pos="0"/>
+              </a:tabLst>
+              <a:defRPr lang="en-BE" sz="1200" b="0" u="none" strike="noStrike">
+                <a:solidFill>
+                  <a:schemeClr val="dk1">
+                    <a:tint val="75000"/>
+                  </a:schemeClr>
+                </a:solidFill>
+                <a:effectLst/>
+                <a:uFillTx/>
+                <a:latin typeface="Calibri"/>
+              </a:defRPr>
+            </a:lvl1pPr>
+          </a:lstStyle>
+          <a:p>
+            <a:pPr indent="0" defTabSz="914400">
+              <a:lnSpc>
+                <a:spcPct val="100000"/>
+              </a:lnSpc>
+              <a:buNone/>
+              <a:tabLst>
+                <a:tab algn="l" pos="0"/>
+              </a:tabLst>
+            </a:pPr>
+            <a:r>
+              <a:rPr lang="en-BE" sz="1200" b="0" u="none" strike="noStrike">
+                <a:solidFill>
+                  <a:schemeClr val="dk1">
+                    <a:tint val="75000"/>
+                  </a:schemeClr>
+                </a:solidFill>
+                <a:effectLst/>
+                <a:uFillTx/>
+                <a:latin typeface="Calibri"/>
+              </a:rPr>
+              <a:t>&lt;date/time&gt;</a:t>
+            </a:r>
+            <a:endParaRPr lang="en-GB" sz="1200" b="0" u="none" strike="noStrike">
+              <a:solidFill>
+                <a:srgbClr val="000000"/>
+              </a:solidFill>
+              <a:effectLst/>
+              <a:uFillTx/>
+              <a:latin typeface="Times New Roman"/>
+            </a:endParaRPr>
+          </a:p>
+        </p:txBody>
+      </p:sp>
+      <p:sp>
+        <p:nvSpPr>
+          <p:cNvPr id="9" name="PlaceHolder 5"/>
+          <p:cNvSpPr>
+            <a:spLocks noGrp="1"/>
+          </p:cNvSpPr>
+          <p:nvPr>
+            <p:ph type="ftr" idx="5"/>
+          </p:nvPr>
+        </p:nvSpPr>
+        <p:spPr>
+          <a:xfrm>
+            <a:off x="4038480" y="6356520"/>
+            <a:ext cx="4114080" cy="364320"/>
+          </a:xfrm>
+          <a:prstGeom prst="rect">
+            <a:avLst/>
+          </a:prstGeom>
+          <a:noFill/>
+          <a:ln w="0">
+            <a:noFill/>
+          </a:ln>
+        </p:spPr>
+        <p:txBody>
+          <a:bodyPr lIns="91440" rIns="91440" tIns="45720" bIns="45720" anchor="ctr">
+            <a:noAutofit/>
+          </a:bodyPr>
+          <a:lstStyle>
+            <a:lvl1pPr indent="0" algn="ctr">
+              <a:lnSpc>
+                <a:spcPct val="100000"/>
+              </a:lnSpc>
+              <a:buNone/>
+              <a:tabLst>
+                <a:tab algn="l" pos="0"/>
+              </a:tabLst>
+              <a:defRPr lang="en-GB" sz="1400" b="0" u="none" strike="noStrike">
+                <a:solidFill>
+                  <a:srgbClr val="000000"/>
+                </a:solidFill>
+                <a:effectLst/>
+                <a:uFillTx/>
+                <a:latin typeface="Times New Roman"/>
+              </a:defRPr>
+            </a:lvl1pPr>
+          </a:lstStyle>
+          <a:p>
+            <a:pPr indent="0" algn="ctr">
+              <a:lnSpc>
+                <a:spcPct val="100000"/>
+              </a:lnSpc>
+              <a:buNone/>
+              <a:tabLst>
+                <a:tab algn="l" pos="0"/>
+              </a:tabLst>
+            </a:pPr>
+            <a:r>
+              <a:rPr lang="en-GB" sz="1400" b="0" u="none" strike="noStrike">
+                <a:solidFill>
+                  <a:srgbClr val="000000"/>
+                </a:solidFill>
+                <a:effectLst/>
+                <a:uFillTx/>
+                <a:latin typeface="Times New Roman"/>
+              </a:rPr>
+              <a:t>&lt;footer&gt;</a:t>
+            </a:r>
+            <a:endParaRPr lang="en-GB" sz="1400" b="0" u="none" strike="noStrike">
+              <a:solidFill>
+                <a:srgbClr val="000000"/>
+              </a:solidFill>
+              <a:effectLst/>
+              <a:uFillTx/>
+              <a:latin typeface="Times New Roman"/>
+            </a:endParaRPr>
+          </a:p>
+        </p:txBody>
+      </p:sp>
+      <p:sp>
+        <p:nvSpPr>
+          <p:cNvPr id="10" name="PlaceHolder 6"/>
+          <p:cNvSpPr>
+            <a:spLocks noGrp="1"/>
+          </p:cNvSpPr>
+          <p:nvPr>
+            <p:ph type="sldNum" idx="6"/>
+          </p:nvPr>
+        </p:nvSpPr>
+        <p:spPr>
+          <a:xfrm>
+            <a:off x="8610480" y="6356520"/>
+            <a:ext cx="2742480" cy="364320"/>
+          </a:xfrm>
+          <a:prstGeom prst="rect">
+            <a:avLst/>
+          </a:prstGeom>
+          <a:noFill/>
+          <a:ln w="0">
+            <a:noFill/>
+          </a:ln>
+        </p:spPr>
+        <p:txBody>
+          <a:bodyPr lIns="91440" rIns="91440" tIns="45720" bIns="45720" anchor="ctr">
+            <a:noAutofit/>
+          </a:bodyPr>
+          <a:lstStyle>
+            <a:lvl1pPr indent="0" algn="r" defTabSz="914400">
+              <a:lnSpc>
+                <a:spcPct val="100000"/>
+              </a:lnSpc>
+              <a:buNone/>
+              <a:tabLst>
+                <a:tab algn="l" pos="0"/>
+              </a:tabLst>
+              <a:defRPr lang="en-BE" sz="1200" b="0" u="none" strike="noStrike">
+                <a:solidFill>
+                  <a:schemeClr val="dk1">
+                    <a:tint val="75000"/>
+                  </a:schemeClr>
+                </a:solidFill>
+                <a:effectLst/>
+                <a:uFillTx/>
+                <a:latin typeface="Calibri"/>
+              </a:defRPr>
+            </a:lvl1pPr>
+          </a:lstStyle>
+          <a:p>
+            <a:pPr indent="0" algn="r" defTabSz="914400">
+              <a:lnSpc>
+                <a:spcPct val="100000"/>
+              </a:lnSpc>
+              <a:buNone/>
+              <a:tabLst>
+                <a:tab algn="l" pos="0"/>
+              </a:tabLst>
+            </a:pPr>
+            <a:fld id="{DEF1293C-6A19-4CE6-852B-98E2E3231D6E}" type="slidenum">
+              <a:rPr lang="en-BE" sz="1200" b="0" u="none" strike="noStrike">
+                <a:solidFill>
+                  <a:schemeClr val="dk1">
+                    <a:tint val="75000"/>
+                  </a:schemeClr>
+                </a:solidFill>
+                <a:effectLst/>
+                <a:uFillTx/>
+                <a:latin typeface="Calibri"/>
+              </a:rPr>
+              <a:t>&lt;number&gt;</a:t>
+            </a:fld>
+            <a:endParaRPr lang="en-GB" sz="1200" b="0" u="none" strike="noStrike">
+              <a:solidFill>
+                <a:srgbClr val="000000"/>
+              </a:solidFill>
+              <a:effectLst/>
+              <a:uFillTx/>
+              <a:latin typeface="Times New Roman"/>
+            </a:endParaRPr>
+          </a:p>
+        </p:txBody>
+      </p:sp>
+    </p:spTree>
+  </p:cSld>
+</p:sldLayout>
+</file>
+
+<file path=ppt/slideLayouts/slideLayout3.xml><?xml version="1.0" encoding="utf-8"?>
 <p:sldLayout xmlns:a="http://schemas.openxmlformats.org/drawingml/2006/main" xmlns:p="http://schemas.openxmlformats.org/presentationml/2006/main" xmlns:r="http://schemas.openxmlformats.org/officeDocument/2006/relationships" xmlns:p14="http://schemas.microsoft.com/office/powerpoint/2010/main" xmlns:p15="http://schemas.microsoft.com/office/powerpoint/2012/main" xmlns:mc="http://schemas.openxmlformats.org/markup-compatibility/2006" type="blank" preserve="1">
   <p:cSld name="Picture with Caption">
     <p:bg>
@@ -1184,7 +2087,7 @@
       </p:grpSpPr>
       <p:sp>
         <p:nvSpPr>
-          <p:cNvPr id="54" name="PlaceHolder 1"/>
+          <p:cNvPr id="11" name="PlaceHolder 1"/>
           <p:cNvSpPr>
             <a:spLocks noGrp="1"/>
           </p:cNvSpPr>
@@ -1195,7 +2098,7 @@
         <p:spPr>
           <a:xfrm>
             <a:off x="839880" y="457200"/>
-            <a:ext cx="3931920" cy="1599840"/>
+            <a:ext cx="3931560" cy="1599480"/>
           </a:xfrm>
           <a:prstGeom prst="rect">
             <a:avLst/>
@@ -1215,6 +2118,9 @@
                 <a:spcPct val="90000"/>
               </a:lnSpc>
               <a:buNone/>
+              <a:tabLst>
+                <a:tab algn="l" pos="0"/>
+              </a:tabLst>
             </a:pPr>
             <a:r>
               <a:rPr lang="en-US" sz="3200" b="0" u="none" strike="noStrike">
@@ -1227,20 +2133,20 @@
               </a:rPr>
               <a:t>Click to edit Master title style</a:t>
             </a:r>
-            <a:endParaRPr lang="en-BE" sz="3200" b="0" u="none" strike="noStrike">
-              <a:solidFill>
-                <a:schemeClr val="dk1"/>
-              </a:solidFill>
-              <a:effectLst/>
-              <a:uFillTx/>
-              <a:latin typeface="Calibri"/>
+            <a:endParaRPr lang="en-GB" sz="3200" b="0" u="none" strike="noStrike">
+              <a:solidFill>
+                <a:srgbClr val="000000"/>
+              </a:solidFill>
+              <a:effectLst/>
+              <a:uFillTx/>
+              <a:latin typeface="Arial"/>
             </a:endParaRPr>
           </a:p>
         </p:txBody>
       </p:sp>
       <p:sp>
         <p:nvSpPr>
-          <p:cNvPr id="55" name="PlaceHolder 2"/>
+          <p:cNvPr id="12" name="PlaceHolder 2"/>
           <p:cNvSpPr>
             <a:spLocks noGrp="1"/>
           </p:cNvSpPr>
@@ -1251,7 +2157,7 @@
         <p:spPr>
           <a:xfrm>
             <a:off x="5183280" y="987480"/>
-            <a:ext cx="6171840" cy="4873320"/>
+            <a:ext cx="6171480" cy="4872960"/>
           </a:xfrm>
           <a:prstGeom prst="rect">
             <a:avLst/>
@@ -1291,13 +2197,13 @@
               </a:rPr>
               <a:t>Click to edit the outline text format</a:t>
             </a:r>
-            <a:endParaRPr lang="en-BE" sz="3200" b="0" u="none" strike="noStrike">
-              <a:solidFill>
-                <a:schemeClr val="dk1"/>
-              </a:solidFill>
-              <a:effectLst/>
-              <a:uFillTx/>
-              <a:latin typeface="Calibri"/>
+            <a:endParaRPr lang="en-GB" sz="3200" b="0" u="none" strike="noStrike">
+              <a:solidFill>
+                <a:srgbClr val="000000"/>
+              </a:solidFill>
+              <a:effectLst/>
+              <a:uFillTx/>
+              <a:latin typeface="Arial"/>
             </a:endParaRPr>
           </a:p>
           <a:p>
@@ -1326,13 +2232,13 @@
               </a:rPr>
               <a:t>Second Outline Level</a:t>
             </a:r>
-            <a:endParaRPr lang="en-BE" sz="3200" b="0" u="none" strike="noStrike">
-              <a:solidFill>
-                <a:schemeClr val="dk1"/>
-              </a:solidFill>
-              <a:effectLst/>
-              <a:uFillTx/>
-              <a:latin typeface="Calibri"/>
+            <a:endParaRPr lang="en-GB" sz="3200" b="0" u="none" strike="noStrike">
+              <a:solidFill>
+                <a:srgbClr val="000000"/>
+              </a:solidFill>
+              <a:effectLst/>
+              <a:uFillTx/>
+              <a:latin typeface="Arial"/>
             </a:endParaRPr>
           </a:p>
           <a:p>
@@ -1361,13 +2267,13 @@
               </a:rPr>
               <a:t>Third Outline Level</a:t>
             </a:r>
-            <a:endParaRPr lang="en-BE" sz="3200" b="0" u="none" strike="noStrike">
-              <a:solidFill>
-                <a:schemeClr val="dk1"/>
-              </a:solidFill>
-              <a:effectLst/>
-              <a:uFillTx/>
-              <a:latin typeface="Calibri"/>
+            <a:endParaRPr lang="en-GB" sz="3200" b="0" u="none" strike="noStrike">
+              <a:solidFill>
+                <a:srgbClr val="000000"/>
+              </a:solidFill>
+              <a:effectLst/>
+              <a:uFillTx/>
+              <a:latin typeface="Arial"/>
             </a:endParaRPr>
           </a:p>
           <a:p>
@@ -1396,13 +2302,13 @@
               </a:rPr>
               <a:t>Fourth Outline Level</a:t>
             </a:r>
-            <a:endParaRPr lang="en-BE" sz="3200" b="0" u="none" strike="noStrike">
-              <a:solidFill>
-                <a:schemeClr val="dk1"/>
-              </a:solidFill>
-              <a:effectLst/>
-              <a:uFillTx/>
-              <a:latin typeface="Calibri"/>
+            <a:endParaRPr lang="en-GB" sz="3200" b="0" u="none" strike="noStrike">
+              <a:solidFill>
+                <a:srgbClr val="000000"/>
+              </a:solidFill>
+              <a:effectLst/>
+              <a:uFillTx/>
+              <a:latin typeface="Arial"/>
             </a:endParaRPr>
           </a:p>
           <a:p>
@@ -1431,13 +2337,13 @@
               </a:rPr>
               <a:t>Fifth Outline Level</a:t>
             </a:r>
-            <a:endParaRPr lang="en-BE" sz="3200" b="0" u="none" strike="noStrike">
-              <a:solidFill>
-                <a:schemeClr val="dk1"/>
-              </a:solidFill>
-              <a:effectLst/>
-              <a:uFillTx/>
-              <a:latin typeface="Calibri"/>
+            <a:endParaRPr lang="en-GB" sz="3200" b="0" u="none" strike="noStrike">
+              <a:solidFill>
+                <a:srgbClr val="000000"/>
+              </a:solidFill>
+              <a:effectLst/>
+              <a:uFillTx/>
+              <a:latin typeface="Arial"/>
             </a:endParaRPr>
           </a:p>
           <a:p>
@@ -1466,13 +2372,13 @@
               </a:rPr>
               <a:t>Sixth Outline Level</a:t>
             </a:r>
-            <a:endParaRPr lang="en-BE" sz="3200" b="0" u="none" strike="noStrike">
-              <a:solidFill>
-                <a:schemeClr val="dk1"/>
-              </a:solidFill>
-              <a:effectLst/>
-              <a:uFillTx/>
-              <a:latin typeface="Calibri"/>
+            <a:endParaRPr lang="en-GB" sz="3200" b="0" u="none" strike="noStrike">
+              <a:solidFill>
+                <a:srgbClr val="000000"/>
+              </a:solidFill>
+              <a:effectLst/>
+              <a:uFillTx/>
+              <a:latin typeface="Arial"/>
             </a:endParaRPr>
           </a:p>
           <a:p>
@@ -1501,20 +2407,20 @@
               </a:rPr>
               <a:t>Seventh Outline Level</a:t>
             </a:r>
-            <a:endParaRPr lang="en-BE" sz="3200" b="0" u="none" strike="noStrike">
-              <a:solidFill>
-                <a:schemeClr val="dk1"/>
-              </a:solidFill>
-              <a:effectLst/>
-              <a:uFillTx/>
-              <a:latin typeface="Calibri"/>
+            <a:endParaRPr lang="en-GB" sz="3200" b="0" u="none" strike="noStrike">
+              <a:solidFill>
+                <a:srgbClr val="000000"/>
+              </a:solidFill>
+              <a:effectLst/>
+              <a:uFillTx/>
+              <a:latin typeface="Arial"/>
             </a:endParaRPr>
           </a:p>
         </p:txBody>
       </p:sp>
       <p:sp>
         <p:nvSpPr>
-          <p:cNvPr id="56" name="PlaceHolder 3"/>
+          <p:cNvPr id="13" name="PlaceHolder 3"/>
           <p:cNvSpPr>
             <a:spLocks noGrp="1"/>
           </p:cNvSpPr>
@@ -1525,7 +2431,7 @@
         <p:spPr>
           <a:xfrm>
             <a:off x="839880" y="2057400"/>
-            <a:ext cx="3931920" cy="3811320"/>
+            <a:ext cx="3931560" cy="3810960"/>
           </a:xfrm>
           <a:prstGeom prst="rect">
             <a:avLst/>
@@ -1563,31 +2469,31 @@
               </a:rPr>
               <a:t>Click to edit Master text styles</a:t>
             </a:r>
-            <a:endParaRPr lang="en-BE" sz="1600" b="0" u="none" strike="noStrike">
-              <a:solidFill>
-                <a:schemeClr val="dk1"/>
-              </a:solidFill>
-              <a:effectLst/>
-              <a:uFillTx/>
-              <a:latin typeface="Calibri"/>
+            <a:endParaRPr lang="en-GB" sz="1600" b="0" u="none" strike="noStrike">
+              <a:solidFill>
+                <a:srgbClr val="000000"/>
+              </a:solidFill>
+              <a:effectLst/>
+              <a:uFillTx/>
+              <a:latin typeface="Arial"/>
             </a:endParaRPr>
           </a:p>
         </p:txBody>
       </p:sp>
       <p:sp>
         <p:nvSpPr>
-          <p:cNvPr id="57" name="PlaceHolder 4"/>
+          <p:cNvPr id="14" name="PlaceHolder 4"/>
           <p:cNvSpPr>
             <a:spLocks noGrp="1"/>
           </p:cNvSpPr>
           <p:nvPr>
-            <p:ph type="dt" idx="31"/>
+            <p:ph type="dt" idx="7"/>
           </p:nvPr>
         </p:nvSpPr>
         <p:spPr>
           <a:xfrm>
             <a:off x="838080" y="6356520"/>
-            <a:ext cx="2742840" cy="364680"/>
+            <a:ext cx="2742480" cy="364320"/>
           </a:xfrm>
           <a:prstGeom prst="rect">
             <a:avLst/>
@@ -1607,6 +2513,9 @@
                 <a:spcPct val="100000"/>
               </a:lnSpc>
               <a:buNone/>
+              <a:tabLst>
+                <a:tab algn="l" pos="0"/>
+              </a:tabLst>
               <a:defRPr lang="en-BE" sz="1200" b="0" u="none" strike="noStrike">
                 <a:solidFill>
                   <a:schemeClr val="dk1">
@@ -1625,6 +2534,9 @@
                 <a:spcPct val="100000"/>
               </a:lnSpc>
               <a:buNone/>
+              <a:tabLst>
+                <a:tab algn="l" pos="0"/>
+              </a:tabLst>
             </a:pPr>
             <a:r>
               <a:rPr lang="en-BE" sz="1200" b="0" u="none" strike="noStrike">
@@ -1652,18 +2564,18 @@
       </p:sp>
       <p:sp>
         <p:nvSpPr>
-          <p:cNvPr id="58" name="PlaceHolder 5"/>
+          <p:cNvPr id="15" name="PlaceHolder 5"/>
           <p:cNvSpPr>
             <a:spLocks noGrp="1"/>
           </p:cNvSpPr>
           <p:nvPr>
-            <p:ph type="ftr" idx="32"/>
+            <p:ph type="ftr" idx="8"/>
           </p:nvPr>
         </p:nvSpPr>
         <p:spPr>
           <a:xfrm>
             <a:off x="4038480" y="6356520"/>
-            <a:ext cx="4114440" cy="364680"/>
+            <a:ext cx="4114080" cy="364320"/>
           </a:xfrm>
           <a:prstGeom prst="rect">
             <a:avLst/>
@@ -1679,7 +2591,13 @@
           </a:bodyPr>
           <a:lstStyle>
             <a:lvl1pPr indent="0" algn="ctr">
-              <a:buNone/>
+              <a:lnSpc>
+                <a:spcPct val="100000"/>
+              </a:lnSpc>
+              <a:buNone/>
+              <a:tabLst>
+                <a:tab algn="l" pos="0"/>
+              </a:tabLst>
               <a:defRPr lang="en-GB" sz="1400" b="0" u="none" strike="noStrike">
                 <a:solidFill>
                   <a:srgbClr val="000000"/>
@@ -1692,7 +2610,13 @@
           </a:lstStyle>
           <a:p>
             <a:pPr indent="0" algn="ctr">
-              <a:buNone/>
+              <a:lnSpc>
+                <a:spcPct val="100000"/>
+              </a:lnSpc>
+              <a:buNone/>
+              <a:tabLst>
+                <a:tab algn="l" pos="0"/>
+              </a:tabLst>
             </a:pPr>
             <a:r>
               <a:rPr lang="en-GB" sz="1400" b="0" u="none" strike="noStrike">
@@ -1718,18 +2642,18 @@
       </p:sp>
       <p:sp>
         <p:nvSpPr>
-          <p:cNvPr id="59" name="PlaceHolder 6"/>
+          <p:cNvPr id="16" name="PlaceHolder 6"/>
           <p:cNvSpPr>
             <a:spLocks noGrp="1"/>
           </p:cNvSpPr>
           <p:nvPr>
-            <p:ph type="sldNum" idx="33"/>
+            <p:ph type="sldNum" idx="9"/>
           </p:nvPr>
         </p:nvSpPr>
         <p:spPr>
           <a:xfrm>
             <a:off x="8610480" y="6356520"/>
-            <a:ext cx="2742840" cy="364680"/>
+            <a:ext cx="2742480" cy="364320"/>
           </a:xfrm>
           <a:prstGeom prst="rect">
             <a:avLst/>
@@ -1749,6 +2673,9 @@
                 <a:spcPct val="100000"/>
               </a:lnSpc>
               <a:buNone/>
+              <a:tabLst>
+                <a:tab algn="l" pos="0"/>
+              </a:tabLst>
               <a:defRPr lang="en-BE" sz="1200" b="0" u="none" strike="noStrike">
                 <a:solidFill>
                   <a:schemeClr val="dk1">
@@ -1767,1012 +2694,11 @@
                 <a:spcPct val="100000"/>
               </a:lnSpc>
               <a:buNone/>
-            </a:pPr>
-            <a:fld id="{C5A559C0-F7A9-4317-8C4A-609FB5CA57F8}" type="slidenum">
-              <a:rPr lang="en-BE" sz="1200" b="0" u="none" strike="noStrike">
-                <a:solidFill>
-                  <a:schemeClr val="dk1">
-                    <a:tint val="75000"/>
-                  </a:schemeClr>
-                </a:solidFill>
-                <a:effectLst/>
-                <a:uFillTx/>
-                <a:latin typeface="Calibri"/>
-              </a:rPr>
-              <a:t>&lt;number&gt;</a:t>
-            </a:fld>
-            <a:endParaRPr lang="en-GB" sz="1200" b="0" u="none" strike="noStrike">
-              <a:solidFill>
-                <a:srgbClr val="000000"/>
-              </a:solidFill>
-              <a:effectLst/>
-              <a:uFillTx/>
-              <a:latin typeface="Times New Roman"/>
-            </a:endParaRPr>
-          </a:p>
-        </p:txBody>
-      </p:sp>
-    </p:spTree>
-  </p:cSld>
-</p:sldLayout>
-</file>
-
-<file path=ppt/slideLayouts/slideLayout2.xml><?xml version="1.0" encoding="utf-8"?>
-<p:sldLayout xmlns:a="http://schemas.openxmlformats.org/drawingml/2006/main" xmlns:p="http://schemas.openxmlformats.org/presentationml/2006/main" xmlns:r="http://schemas.openxmlformats.org/officeDocument/2006/relationships" xmlns:p14="http://schemas.microsoft.com/office/powerpoint/2010/main" xmlns:p15="http://schemas.microsoft.com/office/powerpoint/2012/main" xmlns:mc="http://schemas.openxmlformats.org/markup-compatibility/2006" type="vertTx" preserve="1">
-  <p:cSld name="Title and Vertical Text">
-    <p:bg>
-      <p:bgPr>
-        <a:solidFill>
-          <a:srgbClr val="ffffff"/>
-        </a:solidFill>
-      </p:bgPr>
-    </p:bg>
-    <p:spTree>
-      <p:nvGrpSpPr>
-        <p:cNvPr id="1" name=""/>
-        <p:cNvGrpSpPr/>
-        <p:nvPr/>
-      </p:nvGrpSpPr>
-      <p:grpSpPr>
-        <a:xfrm>
-          <a:off x="0" y="0"/>
-          <a:ext cx="0" cy="0"/>
-          <a:chOff x="0" y="0"/>
-          <a:chExt cx="0" cy="0"/>
-        </a:xfrm>
-      </p:grpSpPr>
-      <p:sp>
-        <p:nvSpPr>
-          <p:cNvPr id="7" name="PlaceHolder 1"/>
-          <p:cNvSpPr>
-            <a:spLocks noGrp="1"/>
-          </p:cNvSpPr>
-          <p:nvPr>
-            <p:ph type="title"/>
-          </p:nvPr>
-        </p:nvSpPr>
-        <p:spPr>
-          <a:xfrm>
-            <a:off x="838080" y="365040"/>
-            <a:ext cx="10515240" cy="1325160"/>
-          </a:xfrm>
-          <a:prstGeom prst="rect">
-            <a:avLst/>
-          </a:prstGeom>
-          <a:noFill/>
-          <a:ln w="0">
-            <a:noFill/>
-          </a:ln>
-        </p:spPr>
-        <p:txBody>
-          <a:bodyPr lIns="91440" rIns="91440" tIns="45720" bIns="45720" anchor="ctr">
-            <a:noAutofit/>
-          </a:bodyPr>
-          <a:p>
-            <a:pPr indent="0" defTabSz="914400">
-              <a:lnSpc>
-                <a:spcPct val="90000"/>
-              </a:lnSpc>
-              <a:buNone/>
-            </a:pPr>
-            <a:r>
-              <a:rPr lang="en-US" sz="4400" b="0" u="none" strike="noStrike">
-                <a:solidFill>
-                  <a:schemeClr val="dk1"/>
-                </a:solidFill>
-                <a:effectLst/>
-                <a:uFillTx/>
-                <a:latin typeface="Calibri Light"/>
-              </a:rPr>
-              <a:t>Click to edit Master title style</a:t>
-            </a:r>
-            <a:endParaRPr lang="en-BE" sz="4400" b="0" u="none" strike="noStrike">
-              <a:solidFill>
-                <a:schemeClr val="dk1"/>
-              </a:solidFill>
-              <a:effectLst/>
-              <a:uFillTx/>
-              <a:latin typeface="Calibri"/>
-            </a:endParaRPr>
-          </a:p>
-        </p:txBody>
-      </p:sp>
-      <p:sp>
-        <p:nvSpPr>
-          <p:cNvPr id="8" name="PlaceHolder 2"/>
-          <p:cNvSpPr>
-            <a:spLocks noGrp="1"/>
-          </p:cNvSpPr>
-          <p:nvPr>
-            <p:ph type="body"/>
-          </p:nvPr>
-        </p:nvSpPr>
-        <p:spPr>
-          <a:xfrm>
-            <a:off x="838080" y="1825560"/>
-            <a:ext cx="10515240" cy="4350960"/>
-          </a:xfrm>
-          <a:prstGeom prst="rect">
-            <a:avLst/>
-          </a:prstGeom>
-          <a:noFill/>
-          <a:ln w="0">
-            <a:noFill/>
-          </a:ln>
-        </p:spPr>
-        <p:txBody>
-          <a:bodyPr lIns="91440" rIns="91440" tIns="45720" bIns="45720" anchor="t" vert="eaVert">
-            <a:noAutofit/>
-          </a:bodyPr>
-          <a:p>
-            <a:pPr marL="228600" indent="-228600" defTabSz="914400">
-              <a:lnSpc>
-                <a:spcPct val="90000"/>
-              </a:lnSpc>
-              <a:spcBef>
-                <a:spcPts val="1001"/>
-              </a:spcBef>
-              <a:buClr>
-                <a:srgbClr val="000000"/>
-              </a:buClr>
-              <a:buFont typeface="Arial"/>
-              <a:buChar char="•"/>
-            </a:pPr>
-            <a:r>
-              <a:rPr lang="en-US" sz="2800" b="0" u="none" strike="noStrike">
-                <a:solidFill>
-                  <a:schemeClr val="dk1"/>
-                </a:solidFill>
-                <a:effectLst/>
-                <a:uFillTx/>
-                <a:latin typeface="Calibri"/>
-              </a:rPr>
-              <a:t>Click to edit Master text styles</a:t>
-            </a:r>
-            <a:endParaRPr lang="en-BE" sz="2800" b="0" u="none" strike="noStrike">
-              <a:solidFill>
-                <a:schemeClr val="dk1"/>
-              </a:solidFill>
-              <a:effectLst/>
-              <a:uFillTx/>
-              <a:latin typeface="Calibri"/>
-            </a:endParaRPr>
-          </a:p>
-          <a:p>
-            <a:pPr marL="685800" lvl="1" indent="-228600" defTabSz="914400">
-              <a:lnSpc>
-                <a:spcPct val="90000"/>
-              </a:lnSpc>
-              <a:spcBef>
-                <a:spcPts val="499"/>
-              </a:spcBef>
-              <a:buClr>
-                <a:srgbClr val="000000"/>
-              </a:buClr>
-              <a:buFont typeface="Arial"/>
-              <a:buChar char="•"/>
-            </a:pPr>
-            <a:r>
-              <a:rPr lang="en-US" sz="2400" b="0" u="none" strike="noStrike">
-                <a:solidFill>
-                  <a:schemeClr val="dk1"/>
-                </a:solidFill>
-                <a:effectLst/>
-                <a:uFillTx/>
-                <a:latin typeface="Calibri"/>
-              </a:rPr>
-              <a:t>Second level</a:t>
-            </a:r>
-            <a:endParaRPr lang="en-BE" sz="2400" b="0" u="none" strike="noStrike">
-              <a:solidFill>
-                <a:schemeClr val="dk1"/>
-              </a:solidFill>
-              <a:effectLst/>
-              <a:uFillTx/>
-              <a:latin typeface="Calibri"/>
-            </a:endParaRPr>
-          </a:p>
-          <a:p>
-            <a:pPr marL="1143000" lvl="2" indent="-228600" defTabSz="914400">
-              <a:lnSpc>
-                <a:spcPct val="90000"/>
-              </a:lnSpc>
-              <a:spcBef>
-                <a:spcPts val="499"/>
-              </a:spcBef>
-              <a:buClr>
-                <a:srgbClr val="000000"/>
-              </a:buClr>
-              <a:buFont typeface="Arial"/>
-              <a:buChar char="•"/>
-            </a:pPr>
-            <a:r>
-              <a:rPr lang="en-US" sz="2000" b="0" u="none" strike="noStrike">
-                <a:solidFill>
-                  <a:schemeClr val="dk1"/>
-                </a:solidFill>
-                <a:effectLst/>
-                <a:uFillTx/>
-                <a:latin typeface="Calibri"/>
-              </a:rPr>
-              <a:t>Third level</a:t>
-            </a:r>
-            <a:endParaRPr lang="en-BE" sz="2000" b="0" u="none" strike="noStrike">
-              <a:solidFill>
-                <a:schemeClr val="dk1"/>
-              </a:solidFill>
-              <a:effectLst/>
-              <a:uFillTx/>
-              <a:latin typeface="Calibri"/>
-            </a:endParaRPr>
-          </a:p>
-          <a:p>
-            <a:pPr marL="1600200" lvl="3" indent="-228600" defTabSz="914400">
-              <a:lnSpc>
-                <a:spcPct val="90000"/>
-              </a:lnSpc>
-              <a:spcBef>
-                <a:spcPts val="499"/>
-              </a:spcBef>
-              <a:buClr>
-                <a:srgbClr val="000000"/>
-              </a:buClr>
-              <a:buFont typeface="Arial"/>
-              <a:buChar char="•"/>
-            </a:pPr>
-            <a:r>
-              <a:rPr lang="en-US" sz="1800" b="0" u="none" strike="noStrike">
-                <a:solidFill>
-                  <a:schemeClr val="dk1"/>
-                </a:solidFill>
-                <a:effectLst/>
-                <a:uFillTx/>
-                <a:latin typeface="Calibri"/>
-              </a:rPr>
-              <a:t>Fourth level</a:t>
-            </a:r>
-            <a:endParaRPr lang="en-BE" sz="1800" b="0" u="none" strike="noStrike">
-              <a:solidFill>
-                <a:schemeClr val="dk1"/>
-              </a:solidFill>
-              <a:effectLst/>
-              <a:uFillTx/>
-              <a:latin typeface="Calibri"/>
-            </a:endParaRPr>
-          </a:p>
-          <a:p>
-            <a:pPr marL="2057400" lvl="4" indent="-228600" defTabSz="914400">
-              <a:lnSpc>
-                <a:spcPct val="90000"/>
-              </a:lnSpc>
-              <a:spcBef>
-                <a:spcPts val="499"/>
-              </a:spcBef>
-              <a:buClr>
-                <a:srgbClr val="000000"/>
-              </a:buClr>
-              <a:buFont typeface="Arial"/>
-              <a:buChar char="•"/>
-            </a:pPr>
-            <a:r>
-              <a:rPr lang="en-US" sz="1800" b="0" u="none" strike="noStrike">
-                <a:solidFill>
-                  <a:schemeClr val="dk1"/>
-                </a:solidFill>
-                <a:effectLst/>
-                <a:uFillTx/>
-                <a:latin typeface="Calibri"/>
-              </a:rPr>
-              <a:t>Fifth level</a:t>
-            </a:r>
-            <a:endParaRPr lang="en-BE" sz="1800" b="0" u="none" strike="noStrike">
-              <a:solidFill>
-                <a:schemeClr val="dk1"/>
-              </a:solidFill>
-              <a:effectLst/>
-              <a:uFillTx/>
-              <a:latin typeface="Calibri"/>
-            </a:endParaRPr>
-          </a:p>
-        </p:txBody>
-      </p:sp>
-      <p:sp>
-        <p:nvSpPr>
-          <p:cNvPr id="9" name="PlaceHolder 3"/>
-          <p:cNvSpPr>
-            <a:spLocks noGrp="1"/>
-          </p:cNvSpPr>
-          <p:nvPr>
-            <p:ph type="dt" idx="4"/>
-          </p:nvPr>
-        </p:nvSpPr>
-        <p:spPr>
-          <a:xfrm>
-            <a:off x="838080" y="6356520"/>
-            <a:ext cx="2742840" cy="364680"/>
-          </a:xfrm>
-          <a:prstGeom prst="rect">
-            <a:avLst/>
-          </a:prstGeom>
-          <a:noFill/>
-          <a:ln w="0">
-            <a:noFill/>
-          </a:ln>
-        </p:spPr>
-        <p:txBody>
-          <a:bodyPr lIns="91440" rIns="91440" tIns="45720" bIns="45720" anchor="ctr">
-            <a:noAutofit/>
-          </a:bodyPr>
-          <a:lstStyle>
-            <a:lvl1pPr indent="0" defTabSz="914400">
-              <a:lnSpc>
-                <a:spcPct val="100000"/>
-              </a:lnSpc>
-              <a:buNone/>
-              <a:defRPr lang="en-BE" sz="1200" b="0" u="none" strike="noStrike">
-                <a:solidFill>
-                  <a:schemeClr val="dk1">
-                    <a:tint val="75000"/>
-                  </a:schemeClr>
-                </a:solidFill>
-                <a:effectLst/>
-                <a:uFillTx/>
-                <a:latin typeface="Calibri"/>
-              </a:defRPr>
-            </a:lvl1pPr>
-          </a:lstStyle>
-          <a:p>
-            <a:pPr indent="0" defTabSz="914400">
-              <a:lnSpc>
-                <a:spcPct val="100000"/>
-              </a:lnSpc>
-              <a:buNone/>
-            </a:pPr>
-            <a:r>
-              <a:rPr lang="en-BE" sz="1200" b="0" u="none" strike="noStrike">
-                <a:solidFill>
-                  <a:schemeClr val="dk1">
-                    <a:tint val="75000"/>
-                  </a:schemeClr>
-                </a:solidFill>
-                <a:effectLst/>
-                <a:uFillTx/>
-                <a:latin typeface="Calibri"/>
-              </a:rPr>
-              <a:t>&lt;date/time&gt;</a:t>
-            </a:r>
-            <a:endParaRPr lang="en-GB" sz="1200" b="0" u="none" strike="noStrike">
-              <a:solidFill>
-                <a:srgbClr val="000000"/>
-              </a:solidFill>
-              <a:effectLst/>
-              <a:uFillTx/>
-              <a:latin typeface="Times New Roman"/>
-            </a:endParaRPr>
-          </a:p>
-        </p:txBody>
-      </p:sp>
-      <p:sp>
-        <p:nvSpPr>
-          <p:cNvPr id="10" name="PlaceHolder 4"/>
-          <p:cNvSpPr>
-            <a:spLocks noGrp="1"/>
-          </p:cNvSpPr>
-          <p:nvPr>
-            <p:ph type="ftr" idx="5"/>
-          </p:nvPr>
-        </p:nvSpPr>
-        <p:spPr>
-          <a:xfrm>
-            <a:off x="4038480" y="6356520"/>
-            <a:ext cx="4114440" cy="364680"/>
-          </a:xfrm>
-          <a:prstGeom prst="rect">
-            <a:avLst/>
-          </a:prstGeom>
-          <a:noFill/>
-          <a:ln w="0">
-            <a:noFill/>
-          </a:ln>
-        </p:spPr>
-        <p:txBody>
-          <a:bodyPr lIns="91440" rIns="91440" tIns="45720" bIns="45720" anchor="ctr">
-            <a:noAutofit/>
-          </a:bodyPr>
-          <a:lstStyle>
-            <a:lvl1pPr indent="0" algn="ctr">
-              <a:buNone/>
-              <a:defRPr lang="en-GB" sz="1400" b="0" u="none" strike="noStrike">
-                <a:solidFill>
-                  <a:srgbClr val="000000"/>
-                </a:solidFill>
-                <a:effectLst/>
-                <a:uFillTx/>
-                <a:latin typeface="Times New Roman"/>
-              </a:defRPr>
-            </a:lvl1pPr>
-          </a:lstStyle>
-          <a:p>
-            <a:pPr indent="0" algn="ctr">
-              <a:buNone/>
-            </a:pPr>
-            <a:r>
-              <a:rPr lang="en-GB" sz="1400" b="0" u="none" strike="noStrike">
-                <a:solidFill>
-                  <a:srgbClr val="000000"/>
-                </a:solidFill>
-                <a:effectLst/>
-                <a:uFillTx/>
-                <a:latin typeface="Times New Roman"/>
-              </a:rPr>
-              <a:t>&lt;footer&gt;</a:t>
-            </a:r>
-            <a:endParaRPr lang="en-GB" sz="1400" b="0" u="none" strike="noStrike">
-              <a:solidFill>
-                <a:srgbClr val="000000"/>
-              </a:solidFill>
-              <a:effectLst/>
-              <a:uFillTx/>
-              <a:latin typeface="Times New Roman"/>
-            </a:endParaRPr>
-          </a:p>
-        </p:txBody>
-      </p:sp>
-      <p:sp>
-        <p:nvSpPr>
-          <p:cNvPr id="11" name="PlaceHolder 5"/>
-          <p:cNvSpPr>
-            <a:spLocks noGrp="1"/>
-          </p:cNvSpPr>
-          <p:nvPr>
-            <p:ph type="sldNum" idx="6"/>
-          </p:nvPr>
-        </p:nvSpPr>
-        <p:spPr>
-          <a:xfrm>
-            <a:off x="8610480" y="6356520"/>
-            <a:ext cx="2742840" cy="364680"/>
-          </a:xfrm>
-          <a:prstGeom prst="rect">
-            <a:avLst/>
-          </a:prstGeom>
-          <a:noFill/>
-          <a:ln w="0">
-            <a:noFill/>
-          </a:ln>
-        </p:spPr>
-        <p:txBody>
-          <a:bodyPr lIns="91440" rIns="91440" tIns="45720" bIns="45720" anchor="ctr">
-            <a:noAutofit/>
-          </a:bodyPr>
-          <a:lstStyle>
-            <a:lvl1pPr indent="0" algn="r" defTabSz="914400">
-              <a:lnSpc>
-                <a:spcPct val="100000"/>
-              </a:lnSpc>
-              <a:buNone/>
-              <a:defRPr lang="en-BE" sz="1200" b="0" u="none" strike="noStrike">
-                <a:solidFill>
-                  <a:schemeClr val="dk1">
-                    <a:tint val="75000"/>
-                  </a:schemeClr>
-                </a:solidFill>
-                <a:effectLst/>
-                <a:uFillTx/>
-                <a:latin typeface="Calibri"/>
-              </a:defRPr>
-            </a:lvl1pPr>
-          </a:lstStyle>
-          <a:p>
-            <a:pPr indent="0" algn="r" defTabSz="914400">
-              <a:lnSpc>
-                <a:spcPct val="100000"/>
-              </a:lnSpc>
-              <a:buNone/>
-            </a:pPr>
-            <a:fld id="{14DABC3E-2F15-44BF-97DD-E370D9DB79F6}" type="slidenum">
-              <a:rPr lang="en-BE" sz="1200" b="0" u="none" strike="noStrike">
-                <a:solidFill>
-                  <a:schemeClr val="dk1">
-                    <a:tint val="75000"/>
-                  </a:schemeClr>
-                </a:solidFill>
-                <a:effectLst/>
-                <a:uFillTx/>
-                <a:latin typeface="Calibri"/>
-              </a:rPr>
-              <a:t>&lt;number&gt;</a:t>
-            </a:fld>
-            <a:endParaRPr lang="en-GB" sz="1200" b="0" u="none" strike="noStrike">
-              <a:solidFill>
-                <a:srgbClr val="000000"/>
-              </a:solidFill>
-              <a:effectLst/>
-              <a:uFillTx/>
-              <a:latin typeface="Times New Roman"/>
-            </a:endParaRPr>
-          </a:p>
-        </p:txBody>
-      </p:sp>
-    </p:spTree>
-  </p:cSld>
-</p:sldLayout>
-</file>
-
-<file path=ppt/slideLayouts/slideLayout3.xml><?xml version="1.0" encoding="utf-8"?>
-<p:sldLayout xmlns:a="http://schemas.openxmlformats.org/drawingml/2006/main" xmlns:p="http://schemas.openxmlformats.org/presentationml/2006/main" xmlns:r="http://schemas.openxmlformats.org/officeDocument/2006/relationships" xmlns:p14="http://schemas.microsoft.com/office/powerpoint/2010/main" xmlns:p15="http://schemas.microsoft.com/office/powerpoint/2012/main" xmlns:mc="http://schemas.openxmlformats.org/markup-compatibility/2006" type="vertTitleAndTx" preserve="1">
-  <p:cSld name="Vertical Title and Text">
-    <p:bg>
-      <p:bgPr>
-        <a:solidFill>
-          <a:srgbClr val="ffffff"/>
-        </a:solidFill>
-      </p:bgPr>
-    </p:bg>
-    <p:spTree>
-      <p:nvGrpSpPr>
-        <p:cNvPr id="1" name=""/>
-        <p:cNvGrpSpPr/>
-        <p:nvPr/>
-      </p:nvGrpSpPr>
-      <p:grpSpPr>
-        <a:xfrm>
-          <a:off x="0" y="0"/>
-          <a:ext cx="0" cy="0"/>
-          <a:chOff x="0" y="0"/>
-          <a:chExt cx="0" cy="0"/>
-        </a:xfrm>
-      </p:grpSpPr>
-      <p:sp>
-        <p:nvSpPr>
-          <p:cNvPr id="12" name="PlaceHolder 1"/>
-          <p:cNvSpPr>
-            <a:spLocks noGrp="1"/>
-          </p:cNvSpPr>
-          <p:nvPr>
-            <p:ph type="title"/>
-          </p:nvPr>
-        </p:nvSpPr>
-        <p:spPr>
-          <a:xfrm>
-            <a:off x="8724960" y="365040"/>
-            <a:ext cx="2628720" cy="5811480"/>
-          </a:xfrm>
-          <a:prstGeom prst="rect">
-            <a:avLst/>
-          </a:prstGeom>
-          <a:noFill/>
-          <a:ln w="0">
-            <a:noFill/>
-          </a:ln>
-        </p:spPr>
-        <p:txBody>
-          <a:bodyPr lIns="91440" rIns="91440" tIns="45720" bIns="45720" anchor="ctr" vert="eaVert">
-            <a:noAutofit/>
-          </a:bodyPr>
-          <a:p>
-            <a:pPr indent="0" defTabSz="914400">
-              <a:lnSpc>
-                <a:spcPct val="90000"/>
-              </a:lnSpc>
-              <a:buNone/>
-            </a:pPr>
-            <a:r>
-              <a:rPr lang="en-US" sz="4400" b="0" u="none" strike="noStrike">
-                <a:solidFill>
-                  <a:schemeClr val="dk1"/>
-                </a:solidFill>
-                <a:effectLst/>
-                <a:uFillTx/>
-                <a:latin typeface="Calibri Light"/>
-              </a:rPr>
-              <a:t>Click to edit Master title style</a:t>
-            </a:r>
-            <a:endParaRPr lang="en-BE" sz="4400" b="0" u="none" strike="noStrike">
-              <a:solidFill>
-                <a:schemeClr val="dk1"/>
-              </a:solidFill>
-              <a:effectLst/>
-              <a:uFillTx/>
-              <a:latin typeface="Calibri"/>
-            </a:endParaRPr>
-          </a:p>
-        </p:txBody>
-      </p:sp>
-      <p:sp>
-        <p:nvSpPr>
-          <p:cNvPr id="13" name="PlaceHolder 2"/>
-          <p:cNvSpPr>
-            <a:spLocks noGrp="1"/>
-          </p:cNvSpPr>
-          <p:nvPr>
-            <p:ph type="body"/>
-          </p:nvPr>
-        </p:nvSpPr>
-        <p:spPr>
-          <a:xfrm>
-            <a:off x="838080" y="365040"/>
-            <a:ext cx="7733880" cy="5811480"/>
-          </a:xfrm>
-          <a:prstGeom prst="rect">
-            <a:avLst/>
-          </a:prstGeom>
-          <a:noFill/>
-          <a:ln w="0">
-            <a:noFill/>
-          </a:ln>
-        </p:spPr>
-        <p:txBody>
-          <a:bodyPr lIns="91440" rIns="91440" tIns="45720" bIns="45720" anchor="t" vert="eaVert">
-            <a:noAutofit/>
-          </a:bodyPr>
-          <a:p>
-            <a:pPr marL="228600" indent="-228600" defTabSz="914400">
-              <a:lnSpc>
-                <a:spcPct val="90000"/>
-              </a:lnSpc>
-              <a:spcBef>
-                <a:spcPts val="1001"/>
-              </a:spcBef>
-              <a:buClr>
-                <a:srgbClr val="000000"/>
-              </a:buClr>
-              <a:buFont typeface="Arial"/>
-              <a:buChar char="•"/>
-            </a:pPr>
-            <a:r>
-              <a:rPr lang="en-US" sz="2800" b="0" u="none" strike="noStrike">
-                <a:solidFill>
-                  <a:schemeClr val="dk1"/>
-                </a:solidFill>
-                <a:effectLst/>
-                <a:uFillTx/>
-                <a:latin typeface="Calibri"/>
-              </a:rPr>
-              <a:t>Click to edit Master text styles</a:t>
-            </a:r>
-            <a:endParaRPr lang="en-BE" sz="2800" b="0" u="none" strike="noStrike">
-              <a:solidFill>
-                <a:schemeClr val="dk1"/>
-              </a:solidFill>
-              <a:effectLst/>
-              <a:uFillTx/>
-              <a:latin typeface="Calibri"/>
-            </a:endParaRPr>
-          </a:p>
-          <a:p>
-            <a:pPr marL="685800" lvl="1" indent="-228600" defTabSz="914400">
-              <a:lnSpc>
-                <a:spcPct val="90000"/>
-              </a:lnSpc>
-              <a:spcBef>
-                <a:spcPts val="499"/>
-              </a:spcBef>
-              <a:buClr>
-                <a:srgbClr val="000000"/>
-              </a:buClr>
-              <a:buFont typeface="Arial"/>
-              <a:buChar char="•"/>
-            </a:pPr>
-            <a:r>
-              <a:rPr lang="en-US" sz="2400" b="0" u="none" strike="noStrike">
-                <a:solidFill>
-                  <a:schemeClr val="dk1"/>
-                </a:solidFill>
-                <a:effectLst/>
-                <a:uFillTx/>
-                <a:latin typeface="Calibri"/>
-              </a:rPr>
-              <a:t>Second level</a:t>
-            </a:r>
-            <a:endParaRPr lang="en-BE" sz="2400" b="0" u="none" strike="noStrike">
-              <a:solidFill>
-                <a:schemeClr val="dk1"/>
-              </a:solidFill>
-              <a:effectLst/>
-              <a:uFillTx/>
-              <a:latin typeface="Calibri"/>
-            </a:endParaRPr>
-          </a:p>
-          <a:p>
-            <a:pPr marL="1143000" lvl="2" indent="-228600" defTabSz="914400">
-              <a:lnSpc>
-                <a:spcPct val="90000"/>
-              </a:lnSpc>
-              <a:spcBef>
-                <a:spcPts val="499"/>
-              </a:spcBef>
-              <a:buClr>
-                <a:srgbClr val="000000"/>
-              </a:buClr>
-              <a:buFont typeface="Arial"/>
-              <a:buChar char="•"/>
-            </a:pPr>
-            <a:r>
-              <a:rPr lang="en-US" sz="2000" b="0" u="none" strike="noStrike">
-                <a:solidFill>
-                  <a:schemeClr val="dk1"/>
-                </a:solidFill>
-                <a:effectLst/>
-                <a:uFillTx/>
-                <a:latin typeface="Calibri"/>
-              </a:rPr>
-              <a:t>Third level</a:t>
-            </a:r>
-            <a:endParaRPr lang="en-BE" sz="2000" b="0" u="none" strike="noStrike">
-              <a:solidFill>
-                <a:schemeClr val="dk1"/>
-              </a:solidFill>
-              <a:effectLst/>
-              <a:uFillTx/>
-              <a:latin typeface="Calibri"/>
-            </a:endParaRPr>
-          </a:p>
-          <a:p>
-            <a:pPr marL="1600200" lvl="3" indent="-228600" defTabSz="914400">
-              <a:lnSpc>
-                <a:spcPct val="90000"/>
-              </a:lnSpc>
-              <a:spcBef>
-                <a:spcPts val="499"/>
-              </a:spcBef>
-              <a:buClr>
-                <a:srgbClr val="000000"/>
-              </a:buClr>
-              <a:buFont typeface="Arial"/>
-              <a:buChar char="•"/>
-            </a:pPr>
-            <a:r>
-              <a:rPr lang="en-US" sz="1800" b="0" u="none" strike="noStrike">
-                <a:solidFill>
-                  <a:schemeClr val="dk1"/>
-                </a:solidFill>
-                <a:effectLst/>
-                <a:uFillTx/>
-                <a:latin typeface="Calibri"/>
-              </a:rPr>
-              <a:t>Fourth level</a:t>
-            </a:r>
-            <a:endParaRPr lang="en-BE" sz="1800" b="0" u="none" strike="noStrike">
-              <a:solidFill>
-                <a:schemeClr val="dk1"/>
-              </a:solidFill>
-              <a:effectLst/>
-              <a:uFillTx/>
-              <a:latin typeface="Calibri"/>
-            </a:endParaRPr>
-          </a:p>
-          <a:p>
-            <a:pPr marL="2057400" lvl="4" indent="-228600" defTabSz="914400">
-              <a:lnSpc>
-                <a:spcPct val="90000"/>
-              </a:lnSpc>
-              <a:spcBef>
-                <a:spcPts val="499"/>
-              </a:spcBef>
-              <a:buClr>
-                <a:srgbClr val="000000"/>
-              </a:buClr>
-              <a:buFont typeface="Arial"/>
-              <a:buChar char="•"/>
-            </a:pPr>
-            <a:r>
-              <a:rPr lang="en-US" sz="1800" b="0" u="none" strike="noStrike">
-                <a:solidFill>
-                  <a:schemeClr val="dk1"/>
-                </a:solidFill>
-                <a:effectLst/>
-                <a:uFillTx/>
-                <a:latin typeface="Calibri"/>
-              </a:rPr>
-              <a:t>Fifth level</a:t>
-            </a:r>
-            <a:endParaRPr lang="en-BE" sz="1800" b="0" u="none" strike="noStrike">
-              <a:solidFill>
-                <a:schemeClr val="dk1"/>
-              </a:solidFill>
-              <a:effectLst/>
-              <a:uFillTx/>
-              <a:latin typeface="Calibri"/>
-            </a:endParaRPr>
-          </a:p>
-        </p:txBody>
-      </p:sp>
-      <p:sp>
-        <p:nvSpPr>
-          <p:cNvPr id="14" name="PlaceHolder 3"/>
-          <p:cNvSpPr>
-            <a:spLocks noGrp="1"/>
-          </p:cNvSpPr>
-          <p:nvPr>
-            <p:ph type="dt" idx="7"/>
-          </p:nvPr>
-        </p:nvSpPr>
-        <p:spPr>
-          <a:xfrm>
-            <a:off x="838080" y="6356520"/>
-            <a:ext cx="2742840" cy="364680"/>
-          </a:xfrm>
-          <a:prstGeom prst="rect">
-            <a:avLst/>
-          </a:prstGeom>
-          <a:noFill/>
-          <a:ln w="0">
-            <a:noFill/>
-          </a:ln>
-        </p:spPr>
-        <p:txBody>
-          <a:bodyPr lIns="91440" rIns="91440" tIns="45720" bIns="45720" anchor="ctr">
-            <a:noAutofit/>
-          </a:bodyPr>
-          <a:lstStyle>
-            <a:lvl1pPr indent="0" defTabSz="914400">
-              <a:lnSpc>
-                <a:spcPct val="100000"/>
-              </a:lnSpc>
-              <a:buNone/>
-              <a:defRPr lang="en-BE" sz="1200" b="0" u="none" strike="noStrike">
-                <a:solidFill>
-                  <a:schemeClr val="dk1">
-                    <a:tint val="75000"/>
-                  </a:schemeClr>
-                </a:solidFill>
-                <a:effectLst/>
-                <a:uFillTx/>
-                <a:latin typeface="Calibri"/>
-              </a:defRPr>
-            </a:lvl1pPr>
-          </a:lstStyle>
-          <a:p>
-            <a:pPr indent="0" defTabSz="914400">
-              <a:lnSpc>
-                <a:spcPct val="100000"/>
-              </a:lnSpc>
-              <a:buNone/>
-            </a:pPr>
-            <a:r>
-              <a:rPr lang="en-BE" sz="1200" b="0" u="none" strike="noStrike">
-                <a:solidFill>
-                  <a:schemeClr val="dk1">
-                    <a:tint val="75000"/>
-                  </a:schemeClr>
-                </a:solidFill>
-                <a:effectLst/>
-                <a:uFillTx/>
-                <a:latin typeface="Calibri"/>
-              </a:rPr>
-              <a:t>&lt;date/time&gt;</a:t>
-            </a:r>
-            <a:endParaRPr lang="en-GB" sz="1200" b="0" u="none" strike="noStrike">
-              <a:solidFill>
-                <a:srgbClr val="000000"/>
-              </a:solidFill>
-              <a:effectLst/>
-              <a:uFillTx/>
-              <a:latin typeface="Times New Roman"/>
-            </a:endParaRPr>
-          </a:p>
-        </p:txBody>
-      </p:sp>
-      <p:sp>
-        <p:nvSpPr>
-          <p:cNvPr id="15" name="PlaceHolder 4"/>
-          <p:cNvSpPr>
-            <a:spLocks noGrp="1"/>
-          </p:cNvSpPr>
-          <p:nvPr>
-            <p:ph type="ftr" idx="8"/>
-          </p:nvPr>
-        </p:nvSpPr>
-        <p:spPr>
-          <a:xfrm>
-            <a:off x="4038480" y="6356520"/>
-            <a:ext cx="4114440" cy="364680"/>
-          </a:xfrm>
-          <a:prstGeom prst="rect">
-            <a:avLst/>
-          </a:prstGeom>
-          <a:noFill/>
-          <a:ln w="0">
-            <a:noFill/>
-          </a:ln>
-        </p:spPr>
-        <p:txBody>
-          <a:bodyPr lIns="91440" rIns="91440" tIns="45720" bIns="45720" anchor="ctr">
-            <a:noAutofit/>
-          </a:bodyPr>
-          <a:lstStyle>
-            <a:lvl1pPr indent="0" algn="ctr">
-              <a:buNone/>
-              <a:defRPr lang="en-GB" sz="1400" b="0" u="none" strike="noStrike">
-                <a:solidFill>
-                  <a:srgbClr val="000000"/>
-                </a:solidFill>
-                <a:effectLst/>
-                <a:uFillTx/>
-                <a:latin typeface="Times New Roman"/>
-              </a:defRPr>
-            </a:lvl1pPr>
-          </a:lstStyle>
-          <a:p>
-            <a:pPr indent="0" algn="ctr">
-              <a:buNone/>
-            </a:pPr>
-            <a:r>
-              <a:rPr lang="en-GB" sz="1400" b="0" u="none" strike="noStrike">
-                <a:solidFill>
-                  <a:srgbClr val="000000"/>
-                </a:solidFill>
-                <a:effectLst/>
-                <a:uFillTx/>
-                <a:latin typeface="Times New Roman"/>
-              </a:rPr>
-              <a:t>&lt;footer&gt;</a:t>
-            </a:r>
-            <a:endParaRPr lang="en-GB" sz="1400" b="0" u="none" strike="noStrike">
-              <a:solidFill>
-                <a:srgbClr val="000000"/>
-              </a:solidFill>
-              <a:effectLst/>
-              <a:uFillTx/>
-              <a:latin typeface="Times New Roman"/>
-            </a:endParaRPr>
-          </a:p>
-        </p:txBody>
-      </p:sp>
-      <p:sp>
-        <p:nvSpPr>
-          <p:cNvPr id="16" name="PlaceHolder 5"/>
-          <p:cNvSpPr>
-            <a:spLocks noGrp="1"/>
-          </p:cNvSpPr>
-          <p:nvPr>
-            <p:ph type="sldNum" idx="9"/>
-          </p:nvPr>
-        </p:nvSpPr>
-        <p:spPr>
-          <a:xfrm>
-            <a:off x="8610480" y="6356520"/>
-            <a:ext cx="2742840" cy="364680"/>
-          </a:xfrm>
-          <a:prstGeom prst="rect">
-            <a:avLst/>
-          </a:prstGeom>
-          <a:noFill/>
-          <a:ln w="0">
-            <a:noFill/>
-          </a:ln>
-        </p:spPr>
-        <p:txBody>
-          <a:bodyPr lIns="91440" rIns="91440" tIns="45720" bIns="45720" anchor="ctr">
-            <a:noAutofit/>
-          </a:bodyPr>
-          <a:lstStyle>
-            <a:lvl1pPr indent="0" algn="r" defTabSz="914400">
-              <a:lnSpc>
-                <a:spcPct val="100000"/>
-              </a:lnSpc>
-              <a:buNone/>
-              <a:defRPr lang="en-BE" sz="1200" b="0" u="none" strike="noStrike">
-                <a:solidFill>
-                  <a:schemeClr val="dk1">
-                    <a:tint val="75000"/>
-                  </a:schemeClr>
-                </a:solidFill>
-                <a:effectLst/>
-                <a:uFillTx/>
-                <a:latin typeface="Calibri"/>
-              </a:defRPr>
-            </a:lvl1pPr>
-          </a:lstStyle>
-          <a:p>
-            <a:pPr indent="0" algn="r" defTabSz="914400">
-              <a:lnSpc>
-                <a:spcPct val="100000"/>
-              </a:lnSpc>
-              <a:buNone/>
-            </a:pPr>
-            <a:fld id="{AEC5E4B2-6954-431F-9817-5E8E4B847F7C}" type="slidenum">
+              <a:tabLst>
+                <a:tab algn="l" pos="0"/>
+              </a:tabLst>
+            </a:pPr>
+            <a:fld id="{35CF2AAD-7B52-48E2-853E-17871AFD663F}" type="slidenum">
               <a:rPr lang="en-BE" sz="1200" b="0" u="none" strike="noStrike">
                 <a:solidFill>
                   <a:schemeClr val="dk1">
@@ -2802,8 +2728,8 @@
 </file>
 
 <file path=ppt/slideLayouts/slideLayout4.xml><?xml version="1.0" encoding="utf-8"?>
-<p:sldLayout xmlns:a="http://schemas.openxmlformats.org/drawingml/2006/main" xmlns:p="http://schemas.openxmlformats.org/presentationml/2006/main" xmlns:r="http://schemas.openxmlformats.org/officeDocument/2006/relationships" xmlns:p14="http://schemas.microsoft.com/office/powerpoint/2010/main" xmlns:p15="http://schemas.microsoft.com/office/powerpoint/2012/main" xmlns:mc="http://schemas.openxmlformats.org/markup-compatibility/2006" type="obj" preserve="1">
-  <p:cSld name="Title and Content">
+<p:sldLayout xmlns:a="http://schemas.openxmlformats.org/drawingml/2006/main" xmlns:p="http://schemas.openxmlformats.org/presentationml/2006/main" xmlns:r="http://schemas.openxmlformats.org/officeDocument/2006/relationships" xmlns:p14="http://schemas.microsoft.com/office/powerpoint/2010/main" xmlns:p15="http://schemas.microsoft.com/office/powerpoint/2012/main" xmlns:mc="http://schemas.openxmlformats.org/markup-compatibility/2006" type="title" preserve="1">
+  <p:cSld name="Title Slide">
     <p:bg>
       <p:bgPr>
         <a:solidFill>
@@ -2837,8 +2763,8 @@
         </p:nvSpPr>
         <p:spPr>
           <a:xfrm>
-            <a:off x="838080" y="365040"/>
-            <a:ext cx="10515240" cy="1325160"/>
+            <a:off x="1523880" y="1122480"/>
+            <a:ext cx="9143280" cy="2386800"/>
           </a:xfrm>
           <a:prstGeom prst="rect">
             <a:avLst/>
@@ -2849,18 +2775,21 @@
           </a:ln>
         </p:spPr>
         <p:txBody>
-          <a:bodyPr lIns="91440" rIns="91440" tIns="45720" bIns="45720" anchor="ctr">
+          <a:bodyPr lIns="91440" rIns="91440" tIns="45720" bIns="45720" anchor="b">
             <a:noAutofit/>
           </a:bodyPr>
           <a:p>
-            <a:pPr indent="0" defTabSz="914400">
-              <a:lnSpc>
-                <a:spcPct val="90000"/>
-              </a:lnSpc>
-              <a:buNone/>
-            </a:pPr>
-            <a:r>
-              <a:rPr lang="en-US" sz="4400" b="0" u="none" strike="noStrike">
+            <a:pPr indent="0" algn="ctr" defTabSz="914400">
+              <a:lnSpc>
+                <a:spcPct val="90000"/>
+              </a:lnSpc>
+              <a:buNone/>
+              <a:tabLst>
+                <a:tab algn="l" pos="0"/>
+              </a:tabLst>
+            </a:pPr>
+            <a:r>
+              <a:rPr lang="en-US" sz="6000" b="0" u="none" strike="noStrike">
                 <a:solidFill>
                   <a:schemeClr val="dk1"/>
                 </a:solidFill>
@@ -2870,13 +2799,13 @@
               </a:rPr>
               <a:t>Click to edit Master title style</a:t>
             </a:r>
-            <a:endParaRPr lang="en-BE" sz="4400" b="0" u="none" strike="noStrike">
-              <a:solidFill>
-                <a:schemeClr val="dk1"/>
-              </a:solidFill>
-              <a:effectLst/>
-              <a:uFillTx/>
-              <a:latin typeface="Calibri"/>
+            <a:endParaRPr lang="en-GB" sz="6000" b="0" u="none" strike="noStrike">
+              <a:solidFill>
+                <a:srgbClr val="000000"/>
+              </a:solidFill>
+              <a:effectLst/>
+              <a:uFillTx/>
+              <a:latin typeface="Arial"/>
             </a:endParaRPr>
           </a:p>
         </p:txBody>
@@ -2884,205 +2813,6 @@
       <p:sp>
         <p:nvSpPr>
           <p:cNvPr id="18" name="PlaceHolder 2"/>
-          <p:cNvSpPr>
-            <a:spLocks noGrp="1"/>
-          </p:cNvSpPr>
-          <p:nvPr>
-            <p:ph type="body"/>
-          </p:nvPr>
-        </p:nvSpPr>
-        <p:spPr>
-          <a:xfrm>
-            <a:off x="838080" y="1825560"/>
-            <a:ext cx="10515240" cy="4350960"/>
-          </a:xfrm>
-          <a:prstGeom prst="rect">
-            <a:avLst/>
-          </a:prstGeom>
-          <a:noFill/>
-          <a:ln w="0">
-            <a:noFill/>
-          </a:ln>
-        </p:spPr>
-        <p:txBody>
-          <a:bodyPr lIns="91440" rIns="91440" tIns="45720" bIns="45720" anchor="t">
-            <a:noAutofit/>
-          </a:bodyPr>
-          <a:p>
-            <a:pPr marL="228600" indent="-228600" defTabSz="914400">
-              <a:lnSpc>
-                <a:spcPct val="90000"/>
-              </a:lnSpc>
-              <a:spcBef>
-                <a:spcPts val="1001"/>
-              </a:spcBef>
-              <a:buClr>
-                <a:srgbClr val="000000"/>
-              </a:buClr>
-              <a:buFont typeface="Arial"/>
-              <a:buChar char="•"/>
-            </a:pPr>
-            <a:r>
-              <a:rPr lang="en-US" sz="2800" b="0" u="none" strike="noStrike">
-                <a:solidFill>
-                  <a:schemeClr val="dk1"/>
-                </a:solidFill>
-                <a:effectLst/>
-                <a:uFillTx/>
-                <a:latin typeface="Calibri"/>
-              </a:rPr>
-              <a:t>Click to edit Master text styles</a:t>
-            </a:r>
-            <a:endParaRPr lang="en-BE" sz="2800" b="0" u="none" strike="noStrike">
-              <a:solidFill>
-                <a:schemeClr val="dk1"/>
-              </a:solidFill>
-              <a:effectLst/>
-              <a:uFillTx/>
-              <a:latin typeface="Calibri"/>
-            </a:endParaRPr>
-          </a:p>
-          <a:p>
-            <a:pPr marL="685800" lvl="1" indent="-228600" defTabSz="914400">
-              <a:lnSpc>
-                <a:spcPct val="90000"/>
-              </a:lnSpc>
-              <a:spcBef>
-                <a:spcPts val="499"/>
-              </a:spcBef>
-              <a:buClr>
-                <a:srgbClr val="000000"/>
-              </a:buClr>
-              <a:buFont typeface="Arial"/>
-              <a:buChar char="•"/>
-            </a:pPr>
-            <a:r>
-              <a:rPr lang="en-US" sz="2400" b="0" u="none" strike="noStrike">
-                <a:solidFill>
-                  <a:schemeClr val="dk1"/>
-                </a:solidFill>
-                <a:effectLst/>
-                <a:uFillTx/>
-                <a:latin typeface="Calibri"/>
-              </a:rPr>
-              <a:t>Second level</a:t>
-            </a:r>
-            <a:endParaRPr lang="en-BE" sz="2400" b="0" u="none" strike="noStrike">
-              <a:solidFill>
-                <a:schemeClr val="dk1"/>
-              </a:solidFill>
-              <a:effectLst/>
-              <a:uFillTx/>
-              <a:latin typeface="Calibri"/>
-            </a:endParaRPr>
-          </a:p>
-          <a:p>
-            <a:pPr marL="1143000" lvl="2" indent="-228600" defTabSz="914400">
-              <a:lnSpc>
-                <a:spcPct val="90000"/>
-              </a:lnSpc>
-              <a:spcBef>
-                <a:spcPts val="499"/>
-              </a:spcBef>
-              <a:buClr>
-                <a:srgbClr val="000000"/>
-              </a:buClr>
-              <a:buFont typeface="Arial"/>
-              <a:buChar char="•"/>
-            </a:pPr>
-            <a:r>
-              <a:rPr lang="en-US" sz="2000" b="0" u="none" strike="noStrike">
-                <a:solidFill>
-                  <a:schemeClr val="dk1"/>
-                </a:solidFill>
-                <a:effectLst/>
-                <a:uFillTx/>
-                <a:latin typeface="Calibri"/>
-              </a:rPr>
-              <a:t>Third level</a:t>
-            </a:r>
-            <a:endParaRPr lang="en-BE" sz="2000" b="0" u="none" strike="noStrike">
-              <a:solidFill>
-                <a:schemeClr val="dk1"/>
-              </a:solidFill>
-              <a:effectLst/>
-              <a:uFillTx/>
-              <a:latin typeface="Calibri"/>
-            </a:endParaRPr>
-          </a:p>
-          <a:p>
-            <a:pPr marL="1600200" lvl="3" indent="-228600" defTabSz="914400">
-              <a:lnSpc>
-                <a:spcPct val="90000"/>
-              </a:lnSpc>
-              <a:spcBef>
-                <a:spcPts val="499"/>
-              </a:spcBef>
-              <a:buClr>
-                <a:srgbClr val="000000"/>
-              </a:buClr>
-              <a:buFont typeface="Arial"/>
-              <a:buChar char="•"/>
-            </a:pPr>
-            <a:r>
-              <a:rPr lang="en-US" sz="1800" b="0" u="none" strike="noStrike">
-                <a:solidFill>
-                  <a:schemeClr val="dk1"/>
-                </a:solidFill>
-                <a:effectLst/>
-                <a:uFillTx/>
-                <a:latin typeface="Calibri"/>
-              </a:rPr>
-              <a:t>Fourth level</a:t>
-            </a:r>
-            <a:endParaRPr lang="en-BE" sz="1800" b="0" u="none" strike="noStrike">
-              <a:solidFill>
-                <a:schemeClr val="dk1"/>
-              </a:solidFill>
-              <a:effectLst/>
-              <a:uFillTx/>
-              <a:latin typeface="Calibri"/>
-            </a:endParaRPr>
-          </a:p>
-          <a:p>
-            <a:pPr marL="2057400" lvl="4" indent="-228600" defTabSz="914400">
-              <a:lnSpc>
-                <a:spcPct val="90000"/>
-              </a:lnSpc>
-              <a:spcBef>
-                <a:spcPts val="499"/>
-              </a:spcBef>
-              <a:buClr>
-                <a:srgbClr val="000000"/>
-              </a:buClr>
-              <a:buFont typeface="Arial"/>
-              <a:buChar char="•"/>
-            </a:pPr>
-            <a:r>
-              <a:rPr lang="en-US" sz="1800" b="0" u="none" strike="noStrike">
-                <a:solidFill>
-                  <a:schemeClr val="dk1"/>
-                </a:solidFill>
-                <a:effectLst/>
-                <a:uFillTx/>
-                <a:latin typeface="Calibri"/>
-              </a:rPr>
-              <a:t>Fifth level</a:t>
-            </a:r>
-            <a:endParaRPr lang="en-BE" sz="1800" b="0" u="none" strike="noStrike">
-              <a:solidFill>
-                <a:schemeClr val="dk1"/>
-              </a:solidFill>
-              <a:effectLst/>
-              <a:uFillTx/>
-              <a:latin typeface="Calibri"/>
-            </a:endParaRPr>
-          </a:p>
-        </p:txBody>
-      </p:sp>
-      <p:sp>
-        <p:nvSpPr>
-          <p:cNvPr id="19" name="PlaceHolder 3"/>
           <p:cNvSpPr>
             <a:spLocks noGrp="1"/>
           </p:cNvSpPr>
@@ -3093,7 +2823,7 @@
         <p:spPr>
           <a:xfrm>
             <a:off x="838080" y="6356520"/>
-            <a:ext cx="2742840" cy="364680"/>
+            <a:ext cx="2742480" cy="364320"/>
           </a:xfrm>
           <a:prstGeom prst="rect">
             <a:avLst/>
@@ -3113,6 +2843,9 @@
                 <a:spcPct val="100000"/>
               </a:lnSpc>
               <a:buNone/>
+              <a:tabLst>
+                <a:tab algn="l" pos="0"/>
+              </a:tabLst>
               <a:defRPr lang="en-BE" sz="1200" b="0" u="none" strike="noStrike">
                 <a:solidFill>
                   <a:schemeClr val="dk1">
@@ -3131,6 +2864,9 @@
                 <a:spcPct val="100000"/>
               </a:lnSpc>
               <a:buNone/>
+              <a:tabLst>
+                <a:tab algn="l" pos="0"/>
+              </a:tabLst>
             </a:pPr>
             <a:r>
               <a:rPr lang="en-BE" sz="1200" b="0" u="none" strike="noStrike">
@@ -3158,7 +2894,7 @@
       </p:sp>
       <p:sp>
         <p:nvSpPr>
-          <p:cNvPr id="20" name="PlaceHolder 4"/>
+          <p:cNvPr id="19" name="PlaceHolder 3"/>
           <p:cNvSpPr>
             <a:spLocks noGrp="1"/>
           </p:cNvSpPr>
@@ -3169,7 +2905,7 @@
         <p:spPr>
           <a:xfrm>
             <a:off x="4038480" y="6356520"/>
-            <a:ext cx="4114440" cy="364680"/>
+            <a:ext cx="4114080" cy="364320"/>
           </a:xfrm>
           <a:prstGeom prst="rect">
             <a:avLst/>
@@ -3185,7 +2921,13 @@
           </a:bodyPr>
           <a:lstStyle>
             <a:lvl1pPr indent="0" algn="ctr">
-              <a:buNone/>
+              <a:lnSpc>
+                <a:spcPct val="100000"/>
+              </a:lnSpc>
+              <a:buNone/>
+              <a:tabLst>
+                <a:tab algn="l" pos="0"/>
+              </a:tabLst>
               <a:defRPr lang="en-GB" sz="1400" b="0" u="none" strike="noStrike">
                 <a:solidFill>
                   <a:srgbClr val="000000"/>
@@ -3198,7 +2940,13 @@
           </a:lstStyle>
           <a:p>
             <a:pPr indent="0" algn="ctr">
-              <a:buNone/>
+              <a:lnSpc>
+                <a:spcPct val="100000"/>
+              </a:lnSpc>
+              <a:buNone/>
+              <a:tabLst>
+                <a:tab algn="l" pos="0"/>
+              </a:tabLst>
             </a:pPr>
             <a:r>
               <a:rPr lang="en-GB" sz="1400" b="0" u="none" strike="noStrike">
@@ -3224,7 +2972,7 @@
       </p:sp>
       <p:sp>
         <p:nvSpPr>
-          <p:cNvPr id="21" name="PlaceHolder 5"/>
+          <p:cNvPr id="20" name="PlaceHolder 4"/>
           <p:cNvSpPr>
             <a:spLocks noGrp="1"/>
           </p:cNvSpPr>
@@ -3235,7 +2983,7 @@
         <p:spPr>
           <a:xfrm>
             <a:off x="8610480" y="6356520"/>
-            <a:ext cx="2742840" cy="364680"/>
+            <a:ext cx="2742480" cy="364320"/>
           </a:xfrm>
           <a:prstGeom prst="rect">
             <a:avLst/>
@@ -3255,6 +3003,9 @@
                 <a:spcPct val="100000"/>
               </a:lnSpc>
               <a:buNone/>
+              <a:tabLst>
+                <a:tab algn="l" pos="0"/>
+              </a:tabLst>
               <a:defRPr lang="en-BE" sz="1200" b="0" u="none" strike="noStrike">
                 <a:solidFill>
                   <a:schemeClr val="dk1">
@@ -3273,8 +3024,11 @@
                 <a:spcPct val="100000"/>
               </a:lnSpc>
               <a:buNone/>
-            </a:pPr>
-            <a:fld id="{5E0040C8-5BE2-4CC6-952F-AA666655B254}" type="slidenum">
+              <a:tabLst>
+                <a:tab algn="l" pos="0"/>
+              </a:tabLst>
+            </a:pPr>
+            <a:fld id="{E2D29958-A861-48B8-A9E7-30903B1AB94E}" type="slidenum">
               <a:rPr lang="en-BE" sz="1200" b="0" u="none" strike="noStrike">
                 <a:solidFill>
                   <a:schemeClr val="dk1">
@@ -3294,6 +3048,280 @@
               <a:effectLst/>
               <a:uFillTx/>
               <a:latin typeface="Times New Roman"/>
+            </a:endParaRPr>
+          </a:p>
+        </p:txBody>
+      </p:sp>
+      <p:sp>
+        <p:nvSpPr>
+          <p:cNvPr id="21" name="PlaceHolder 5"/>
+          <p:cNvSpPr>
+            <a:spLocks noGrp="1"/>
+          </p:cNvSpPr>
+          <p:nvPr>
+            <p:ph type="body"/>
+          </p:nvPr>
+        </p:nvSpPr>
+        <p:spPr>
+          <a:xfrm>
+            <a:off x="609480" y="1604520"/>
+            <a:ext cx="10972080" cy="3976920"/>
+          </a:xfrm>
+          <a:prstGeom prst="rect">
+            <a:avLst/>
+          </a:prstGeom>
+          <a:noFill/>
+          <a:ln w="0">
+            <a:noFill/>
+          </a:ln>
+        </p:spPr>
+        <p:txBody>
+          <a:bodyPr lIns="0" rIns="0" tIns="0" bIns="0" anchor="t">
+            <a:normAutofit/>
+          </a:bodyPr>
+          <a:p>
+            <a:pPr marL="432000" indent="-324000">
+              <a:lnSpc>
+                <a:spcPct val="90000"/>
+              </a:lnSpc>
+              <a:spcBef>
+                <a:spcPts val="1417"/>
+              </a:spcBef>
+              <a:buClr>
+                <a:srgbClr val="000000"/>
+              </a:buClr>
+              <a:buSzPct val="45000"/>
+              <a:buFont typeface="Wingdings" charset="2"/>
+              <a:buChar char=""/>
+            </a:pPr>
+            <a:r>
+              <a:rPr lang="en-BE" sz="2800" b="0" u="none" strike="noStrike">
+                <a:solidFill>
+                  <a:schemeClr val="dk1"/>
+                </a:solidFill>
+                <a:effectLst/>
+                <a:uFillTx/>
+                <a:latin typeface="Calibri"/>
+              </a:rPr>
+              <a:t>Click to edit the outline text format</a:t>
+            </a:r>
+            <a:endParaRPr lang="en-GB" sz="2800" b="0" u="none" strike="noStrike">
+              <a:solidFill>
+                <a:srgbClr val="000000"/>
+              </a:solidFill>
+              <a:effectLst/>
+              <a:uFillTx/>
+              <a:latin typeface="Arial"/>
+            </a:endParaRPr>
+          </a:p>
+          <a:p>
+            <a:pPr marL="864000" lvl="1" indent="-324000">
+              <a:lnSpc>
+                <a:spcPct val="90000"/>
+              </a:lnSpc>
+              <a:spcBef>
+                <a:spcPts val="1134"/>
+              </a:spcBef>
+              <a:buClr>
+                <a:srgbClr val="000000"/>
+              </a:buClr>
+              <a:buSzPct val="75000"/>
+              <a:buFont typeface="Symbol" charset="2"/>
+              <a:buChar char=""/>
+            </a:pPr>
+            <a:r>
+              <a:rPr lang="en-BE" sz="2000" b="0" u="none" strike="noStrike">
+                <a:solidFill>
+                  <a:schemeClr val="dk1"/>
+                </a:solidFill>
+                <a:effectLst/>
+                <a:uFillTx/>
+                <a:latin typeface="Calibri"/>
+              </a:rPr>
+              <a:t>Second Outline Level</a:t>
+            </a:r>
+            <a:endParaRPr lang="en-GB" sz="2000" b="0" u="none" strike="noStrike">
+              <a:solidFill>
+                <a:srgbClr val="000000"/>
+              </a:solidFill>
+              <a:effectLst/>
+              <a:uFillTx/>
+              <a:latin typeface="Arial"/>
+            </a:endParaRPr>
+          </a:p>
+          <a:p>
+            <a:pPr marL="1296000" lvl="2" indent="-288000">
+              <a:lnSpc>
+                <a:spcPct val="90000"/>
+              </a:lnSpc>
+              <a:spcBef>
+                <a:spcPts val="850"/>
+              </a:spcBef>
+              <a:buClr>
+                <a:srgbClr val="000000"/>
+              </a:buClr>
+              <a:buSzPct val="45000"/>
+              <a:buFont typeface="Wingdings" charset="2"/>
+              <a:buChar char=""/>
+            </a:pPr>
+            <a:r>
+              <a:rPr lang="en-BE" sz="1800" b="0" u="none" strike="noStrike">
+                <a:solidFill>
+                  <a:schemeClr val="dk1"/>
+                </a:solidFill>
+                <a:effectLst/>
+                <a:uFillTx/>
+                <a:latin typeface="Calibri"/>
+              </a:rPr>
+              <a:t>Third Outline Level</a:t>
+            </a:r>
+            <a:endParaRPr lang="en-GB" sz="1800" b="0" u="none" strike="noStrike">
+              <a:solidFill>
+                <a:srgbClr val="000000"/>
+              </a:solidFill>
+              <a:effectLst/>
+              <a:uFillTx/>
+              <a:latin typeface="Arial"/>
+            </a:endParaRPr>
+          </a:p>
+          <a:p>
+            <a:pPr marL="1728000" lvl="3" indent="-216000">
+              <a:lnSpc>
+                <a:spcPct val="90000"/>
+              </a:lnSpc>
+              <a:spcBef>
+                <a:spcPts val="567"/>
+              </a:spcBef>
+              <a:buClr>
+                <a:srgbClr val="000000"/>
+              </a:buClr>
+              <a:buSzPct val="75000"/>
+              <a:buFont typeface="Symbol" charset="2"/>
+              <a:buChar char=""/>
+            </a:pPr>
+            <a:r>
+              <a:rPr lang="en-BE" sz="1800" b="0" u="none" strike="noStrike">
+                <a:solidFill>
+                  <a:schemeClr val="dk1"/>
+                </a:solidFill>
+                <a:effectLst/>
+                <a:uFillTx/>
+                <a:latin typeface="Calibri"/>
+              </a:rPr>
+              <a:t>Fourth Outline Level</a:t>
+            </a:r>
+            <a:endParaRPr lang="en-GB" sz="1800" b="0" u="none" strike="noStrike">
+              <a:solidFill>
+                <a:srgbClr val="000000"/>
+              </a:solidFill>
+              <a:effectLst/>
+              <a:uFillTx/>
+              <a:latin typeface="Arial"/>
+            </a:endParaRPr>
+          </a:p>
+          <a:p>
+            <a:pPr marL="2160000" lvl="4" indent="-216000">
+              <a:lnSpc>
+                <a:spcPct val="90000"/>
+              </a:lnSpc>
+              <a:spcBef>
+                <a:spcPts val="283"/>
+              </a:spcBef>
+              <a:buClr>
+                <a:srgbClr val="000000"/>
+              </a:buClr>
+              <a:buSzPct val="45000"/>
+              <a:buFont typeface="Wingdings" charset="2"/>
+              <a:buChar char=""/>
+            </a:pPr>
+            <a:r>
+              <a:rPr lang="en-BE" sz="2000" b="0" u="none" strike="noStrike">
+                <a:solidFill>
+                  <a:schemeClr val="dk1"/>
+                </a:solidFill>
+                <a:effectLst/>
+                <a:uFillTx/>
+                <a:latin typeface="Calibri"/>
+              </a:rPr>
+              <a:t>Fifth Outline Level</a:t>
+            </a:r>
+            <a:endParaRPr lang="en-GB" sz="2000" b="0" u="none" strike="noStrike">
+              <a:solidFill>
+                <a:srgbClr val="000000"/>
+              </a:solidFill>
+              <a:effectLst/>
+              <a:uFillTx/>
+              <a:latin typeface="Arial"/>
+            </a:endParaRPr>
+          </a:p>
+          <a:p>
+            <a:pPr marL="2592000" lvl="5" indent="-216000">
+              <a:lnSpc>
+                <a:spcPct val="90000"/>
+              </a:lnSpc>
+              <a:spcBef>
+                <a:spcPts val="283"/>
+              </a:spcBef>
+              <a:buClr>
+                <a:srgbClr val="000000"/>
+              </a:buClr>
+              <a:buSzPct val="45000"/>
+              <a:buFont typeface="Wingdings" charset="2"/>
+              <a:buChar char=""/>
+            </a:pPr>
+            <a:r>
+              <a:rPr lang="en-BE" sz="2000" b="0" u="none" strike="noStrike">
+                <a:solidFill>
+                  <a:schemeClr val="dk1"/>
+                </a:solidFill>
+                <a:effectLst/>
+                <a:uFillTx/>
+                <a:latin typeface="Calibri"/>
+              </a:rPr>
+              <a:t>Sixth Outline Level</a:t>
+            </a:r>
+            <a:endParaRPr lang="en-GB" sz="2000" b="0" u="none" strike="noStrike">
+              <a:solidFill>
+                <a:srgbClr val="000000"/>
+              </a:solidFill>
+              <a:effectLst/>
+              <a:uFillTx/>
+              <a:latin typeface="Arial"/>
+            </a:endParaRPr>
+          </a:p>
+          <a:p>
+            <a:pPr marL="3024000" lvl="6" indent="-216000">
+              <a:lnSpc>
+                <a:spcPct val="90000"/>
+              </a:lnSpc>
+              <a:spcBef>
+                <a:spcPts val="283"/>
+              </a:spcBef>
+              <a:buClr>
+                <a:srgbClr val="000000"/>
+              </a:buClr>
+              <a:buSzPct val="45000"/>
+              <a:buFont typeface="Wingdings" charset="2"/>
+              <a:buChar char=""/>
+            </a:pPr>
+            <a:r>
+              <a:rPr lang="en-BE" sz="2000" b="0" u="none" strike="noStrike">
+                <a:solidFill>
+                  <a:schemeClr val="dk1"/>
+                </a:solidFill>
+                <a:effectLst/>
+                <a:uFillTx/>
+                <a:latin typeface="Calibri"/>
+              </a:rPr>
+              <a:t>Seventh Outline Level</a:t>
+            </a:r>
+            <a:endParaRPr lang="en-GB" sz="2000" b="0" u="none" strike="noStrike">
+              <a:solidFill>
+                <a:srgbClr val="000000"/>
+              </a:solidFill>
+              <a:effectLst/>
+              <a:uFillTx/>
+              <a:latin typeface="Arial"/>
             </a:endParaRPr>
           </a:p>
         </p:txBody>
@@ -3304,8 +3332,8 @@
 </file>
 
 <file path=ppt/slideLayouts/slideLayout5.xml><?xml version="1.0" encoding="utf-8"?>
-<p:sldLayout xmlns:a="http://schemas.openxmlformats.org/drawingml/2006/main" xmlns:p="http://schemas.openxmlformats.org/presentationml/2006/main" xmlns:r="http://schemas.openxmlformats.org/officeDocument/2006/relationships" xmlns:p14="http://schemas.microsoft.com/office/powerpoint/2010/main" xmlns:p15="http://schemas.microsoft.com/office/powerpoint/2012/main" xmlns:mc="http://schemas.openxmlformats.org/markup-compatibility/2006" type="blank" preserve="1">
-  <p:cSld name="Section Header">
+<p:sldLayout xmlns:a="http://schemas.openxmlformats.org/drawingml/2006/main" xmlns:p="http://schemas.openxmlformats.org/presentationml/2006/main" xmlns:r="http://schemas.openxmlformats.org/officeDocument/2006/relationships" xmlns:p14="http://schemas.microsoft.com/office/powerpoint/2010/main" xmlns:p15="http://schemas.microsoft.com/office/powerpoint/2012/main" xmlns:mc="http://schemas.openxmlformats.org/markup-compatibility/2006" type="vertTx" preserve="1">
+  <p:cSld name="Title and Vertical Text">
     <p:bg>
       <p:bgPr>
         <a:solidFill>
@@ -3339,8 +3367,8 @@
         </p:nvSpPr>
         <p:spPr>
           <a:xfrm>
-            <a:off x="831960" y="1709640"/>
-            <a:ext cx="10515240" cy="2852280"/>
+            <a:off x="838080" y="365040"/>
+            <a:ext cx="10514880" cy="1324800"/>
           </a:xfrm>
           <a:prstGeom prst="rect">
             <a:avLst/>
@@ -3351,7 +3379,7 @@
           </a:ln>
         </p:spPr>
         <p:txBody>
-          <a:bodyPr lIns="91440" rIns="91440" tIns="45720" bIns="45720" anchor="b">
+          <a:bodyPr lIns="91440" rIns="91440" tIns="45720" bIns="45720" anchor="ctr">
             <a:noAutofit/>
           </a:bodyPr>
           <a:p>
@@ -3360,9 +3388,12 @@
                 <a:spcPct val="90000"/>
               </a:lnSpc>
               <a:buNone/>
-            </a:pPr>
-            <a:r>
-              <a:rPr lang="en-US" sz="6000" b="0" u="none" strike="noStrike">
+              <a:tabLst>
+                <a:tab algn="l" pos="0"/>
+              </a:tabLst>
+            </a:pPr>
+            <a:r>
+              <a:rPr lang="en-US" sz="4400" b="0" u="none" strike="noStrike">
                 <a:solidFill>
                   <a:schemeClr val="dk1"/>
                 </a:solidFill>
@@ -3372,13 +3403,13 @@
               </a:rPr>
               <a:t>Click to edit Master title style</a:t>
             </a:r>
-            <a:endParaRPr lang="en-BE" sz="6000" b="0" u="none" strike="noStrike">
-              <a:solidFill>
-                <a:schemeClr val="dk1"/>
-              </a:solidFill>
-              <a:effectLst/>
-              <a:uFillTx/>
-              <a:latin typeface="Calibri"/>
+            <a:endParaRPr lang="en-GB" sz="4400" b="0" u="none" strike="noStrike">
+              <a:solidFill>
+                <a:srgbClr val="000000"/>
+              </a:solidFill>
+              <a:effectLst/>
+              <a:uFillTx/>
+              <a:latin typeface="Arial"/>
             </a:endParaRPr>
           </a:p>
         </p:txBody>
@@ -3395,8 +3426,8 @@
         </p:nvSpPr>
         <p:spPr>
           <a:xfrm>
-            <a:off x="831960" y="4589640"/>
-            <a:ext cx="10515240" cy="1499760"/>
+            <a:off x="838080" y="1825560"/>
+            <a:ext cx="10514880" cy="4350600"/>
           </a:xfrm>
           <a:prstGeom prst="rect">
             <a:avLst/>
@@ -3407,42 +3438,177 @@
           </a:ln>
         </p:spPr>
         <p:txBody>
-          <a:bodyPr lIns="91440" rIns="91440" tIns="45720" bIns="45720" anchor="t">
+          <a:bodyPr lIns="91440" rIns="91440" tIns="45720" bIns="45720" anchor="t" vert="eaVert">
             <a:noAutofit/>
           </a:bodyPr>
           <a:p>
-            <a:pPr indent="0" defTabSz="914400">
+            <a:pPr marL="228600" indent="-228600" defTabSz="914400">
               <a:lnSpc>
                 <a:spcPct val="90000"/>
               </a:lnSpc>
               <a:spcBef>
                 <a:spcPts val="1001"/>
               </a:spcBef>
-              <a:buNone/>
-              <a:tabLst>
-                <a:tab algn="l" pos="0"/>
-              </a:tabLst>
+              <a:buClr>
+                <a:srgbClr val="000000"/>
+              </a:buClr>
+              <a:buFont typeface="Arial"/>
+              <a:buChar char="•"/>
+            </a:pPr>
+            <a:r>
+              <a:rPr lang="en-US" sz="2800" b="0" u="none" strike="noStrike">
+                <a:solidFill>
+                  <a:schemeClr val="dk1"/>
+                </a:solidFill>
+                <a:effectLst/>
+                <a:uFillTx/>
+                <a:latin typeface="Calibri"/>
+              </a:rPr>
+              <a:t>Click to edit Master text styles</a:t>
+            </a:r>
+            <a:endParaRPr lang="en-GB" sz="2800" b="0" u="none" strike="noStrike">
+              <a:solidFill>
+                <a:srgbClr val="000000"/>
+              </a:solidFill>
+              <a:effectLst/>
+              <a:uFillTx/>
+              <a:latin typeface="Arial"/>
+            </a:endParaRPr>
+          </a:p>
+          <a:p>
+            <a:pPr marL="685800" lvl="1" indent="-228600" defTabSz="914400">
+              <a:lnSpc>
+                <a:spcPct val="90000"/>
+              </a:lnSpc>
+              <a:spcBef>
+                <a:spcPts val="499"/>
+              </a:spcBef>
+              <a:buClr>
+                <a:srgbClr val="000000"/>
+              </a:buClr>
+              <a:buFont typeface="Arial"/>
+              <a:buChar char="•"/>
             </a:pPr>
             <a:r>
               <a:rPr lang="en-US" sz="2400" b="0" u="none" strike="noStrike">
                 <a:solidFill>
-                  <a:schemeClr val="dk1">
-                    <a:tint val="75000"/>
-                  </a:schemeClr>
-                </a:solidFill>
-                <a:effectLst/>
-                <a:uFillTx/>
-                <a:latin typeface="Calibri"/>
-              </a:rPr>
-              <a:t>Click to edit Master text styles</a:t>
-            </a:r>
-            <a:endParaRPr lang="en-BE" sz="2400" b="0" u="none" strike="noStrike">
-              <a:solidFill>
-                <a:schemeClr val="dk1"/>
-              </a:solidFill>
-              <a:effectLst/>
-              <a:uFillTx/>
-              <a:latin typeface="Calibri"/>
+                  <a:schemeClr val="dk1"/>
+                </a:solidFill>
+                <a:effectLst/>
+                <a:uFillTx/>
+                <a:latin typeface="Calibri"/>
+              </a:rPr>
+              <a:t>Second level</a:t>
+            </a:r>
+            <a:endParaRPr lang="en-GB" sz="2400" b="0" u="none" strike="noStrike">
+              <a:solidFill>
+                <a:srgbClr val="000000"/>
+              </a:solidFill>
+              <a:effectLst/>
+              <a:uFillTx/>
+              <a:latin typeface="Arial"/>
+            </a:endParaRPr>
+          </a:p>
+          <a:p>
+            <a:pPr marL="1143000" lvl="2" indent="-228600" defTabSz="914400">
+              <a:lnSpc>
+                <a:spcPct val="90000"/>
+              </a:lnSpc>
+              <a:spcBef>
+                <a:spcPts val="499"/>
+              </a:spcBef>
+              <a:buClr>
+                <a:srgbClr val="000000"/>
+              </a:buClr>
+              <a:buFont typeface="Arial"/>
+              <a:buChar char="•"/>
+            </a:pPr>
+            <a:r>
+              <a:rPr lang="en-US" sz="2000" b="0" u="none" strike="noStrike">
+                <a:solidFill>
+                  <a:schemeClr val="dk1"/>
+                </a:solidFill>
+                <a:effectLst/>
+                <a:uFillTx/>
+                <a:latin typeface="Calibri"/>
+              </a:rPr>
+              <a:t>Third level</a:t>
+            </a:r>
+            <a:endParaRPr lang="en-GB" sz="2000" b="0" u="none" strike="noStrike">
+              <a:solidFill>
+                <a:srgbClr val="000000"/>
+              </a:solidFill>
+              <a:effectLst/>
+              <a:uFillTx/>
+              <a:latin typeface="Arial"/>
+            </a:endParaRPr>
+          </a:p>
+          <a:p>
+            <a:pPr marL="1600200" lvl="3" indent="-228600" defTabSz="914400">
+              <a:lnSpc>
+                <a:spcPct val="90000"/>
+              </a:lnSpc>
+              <a:spcBef>
+                <a:spcPts val="499"/>
+              </a:spcBef>
+              <a:buClr>
+                <a:srgbClr val="000000"/>
+              </a:buClr>
+              <a:buFont typeface="Arial"/>
+              <a:buChar char="•"/>
+            </a:pPr>
+            <a:r>
+              <a:rPr lang="en-US" sz="1800" b="0" u="none" strike="noStrike">
+                <a:solidFill>
+                  <a:schemeClr val="dk1"/>
+                </a:solidFill>
+                <a:effectLst/>
+                <a:uFillTx/>
+                <a:latin typeface="Calibri"/>
+              </a:rPr>
+              <a:t>Fourth level</a:t>
+            </a:r>
+            <a:endParaRPr lang="en-GB" sz="1800" b="0" u="none" strike="noStrike">
+              <a:solidFill>
+                <a:srgbClr val="000000"/>
+              </a:solidFill>
+              <a:effectLst/>
+              <a:uFillTx/>
+              <a:latin typeface="Arial"/>
+            </a:endParaRPr>
+          </a:p>
+          <a:p>
+            <a:pPr marL="2057400" lvl="4" indent="-228600" defTabSz="914400">
+              <a:lnSpc>
+                <a:spcPct val="90000"/>
+              </a:lnSpc>
+              <a:spcBef>
+                <a:spcPts val="499"/>
+              </a:spcBef>
+              <a:buClr>
+                <a:srgbClr val="000000"/>
+              </a:buClr>
+              <a:buFont typeface="Arial"/>
+              <a:buChar char="•"/>
+            </a:pPr>
+            <a:r>
+              <a:rPr lang="en-US" sz="1800" b="0" u="none" strike="noStrike">
+                <a:solidFill>
+                  <a:schemeClr val="dk1"/>
+                </a:solidFill>
+                <a:effectLst/>
+                <a:uFillTx/>
+                <a:latin typeface="Calibri"/>
+              </a:rPr>
+              <a:t>Fifth level</a:t>
+            </a:r>
+            <a:endParaRPr lang="en-GB" sz="1800" b="0" u="none" strike="noStrike">
+              <a:solidFill>
+                <a:srgbClr val="000000"/>
+              </a:solidFill>
+              <a:effectLst/>
+              <a:uFillTx/>
+              <a:latin typeface="Arial"/>
             </a:endParaRPr>
           </a:p>
         </p:txBody>
@@ -3460,7 +3626,7 @@
         <p:spPr>
           <a:xfrm>
             <a:off x="838080" y="6356520"/>
-            <a:ext cx="2742840" cy="364680"/>
+            <a:ext cx="2742480" cy="364320"/>
           </a:xfrm>
           <a:prstGeom prst="rect">
             <a:avLst/>
@@ -3480,6 +3646,9 @@
                 <a:spcPct val="100000"/>
               </a:lnSpc>
               <a:buNone/>
+              <a:tabLst>
+                <a:tab algn="l" pos="0"/>
+              </a:tabLst>
               <a:defRPr lang="en-BE" sz="1200" b="0" u="none" strike="noStrike">
                 <a:solidFill>
                   <a:schemeClr val="dk1">
@@ -3498,6 +3667,9 @@
                 <a:spcPct val="100000"/>
               </a:lnSpc>
               <a:buNone/>
+              <a:tabLst>
+                <a:tab algn="l" pos="0"/>
+              </a:tabLst>
             </a:pPr>
             <a:r>
               <a:rPr lang="en-BE" sz="1200" b="0" u="none" strike="noStrike">
@@ -3536,7 +3708,7 @@
         <p:spPr>
           <a:xfrm>
             <a:off x="4038480" y="6356520"/>
-            <a:ext cx="4114440" cy="364680"/>
+            <a:ext cx="4114080" cy="364320"/>
           </a:xfrm>
           <a:prstGeom prst="rect">
             <a:avLst/>
@@ -3552,7 +3724,13 @@
           </a:bodyPr>
           <a:lstStyle>
             <a:lvl1pPr indent="0" algn="ctr">
-              <a:buNone/>
+              <a:lnSpc>
+                <a:spcPct val="100000"/>
+              </a:lnSpc>
+              <a:buNone/>
+              <a:tabLst>
+                <a:tab algn="l" pos="0"/>
+              </a:tabLst>
               <a:defRPr lang="en-GB" sz="1400" b="0" u="none" strike="noStrike">
                 <a:solidFill>
                   <a:srgbClr val="000000"/>
@@ -3565,7 +3743,13 @@
           </a:lstStyle>
           <a:p>
             <a:pPr indent="0" algn="ctr">
-              <a:buNone/>
+              <a:lnSpc>
+                <a:spcPct val="100000"/>
+              </a:lnSpc>
+              <a:buNone/>
+              <a:tabLst>
+                <a:tab algn="l" pos="0"/>
+              </a:tabLst>
             </a:pPr>
             <a:r>
               <a:rPr lang="en-GB" sz="1400" b="0" u="none" strike="noStrike">
@@ -3602,7 +3786,7 @@
         <p:spPr>
           <a:xfrm>
             <a:off x="8610480" y="6356520"/>
-            <a:ext cx="2742840" cy="364680"/>
+            <a:ext cx="2742480" cy="364320"/>
           </a:xfrm>
           <a:prstGeom prst="rect">
             <a:avLst/>
@@ -3622,6 +3806,9 @@
                 <a:spcPct val="100000"/>
               </a:lnSpc>
               <a:buNone/>
+              <a:tabLst>
+                <a:tab algn="l" pos="0"/>
+              </a:tabLst>
               <a:defRPr lang="en-BE" sz="1200" b="0" u="none" strike="noStrike">
                 <a:solidFill>
                   <a:schemeClr val="dk1">
@@ -3640,8 +3827,11 @@
                 <a:spcPct val="100000"/>
               </a:lnSpc>
               <a:buNone/>
-            </a:pPr>
-            <a:fld id="{0FA3D8E9-BB04-4FCE-93BB-BF037FC1405C}" type="slidenum">
+              <a:tabLst>
+                <a:tab algn="l" pos="0"/>
+              </a:tabLst>
+            </a:pPr>
+            <a:fld id="{0A694AFA-B145-4FEE-B950-903FB2CB1927}" type="slidenum">
               <a:rPr lang="en-BE" sz="1200" b="0" u="none" strike="noStrike">
                 <a:solidFill>
                   <a:schemeClr val="dk1">
@@ -3671,8 +3861,8 @@
 </file>
 
 <file path=ppt/slideLayouts/slideLayout6.xml><?xml version="1.0" encoding="utf-8"?>
-<p:sldLayout xmlns:a="http://schemas.openxmlformats.org/drawingml/2006/main" xmlns:p="http://schemas.openxmlformats.org/presentationml/2006/main" xmlns:r="http://schemas.openxmlformats.org/officeDocument/2006/relationships" xmlns:p14="http://schemas.microsoft.com/office/powerpoint/2010/main" xmlns:p15="http://schemas.microsoft.com/office/powerpoint/2012/main" xmlns:mc="http://schemas.openxmlformats.org/markup-compatibility/2006" type="twoObj" preserve="1">
-  <p:cSld name="Two Content">
+<p:sldLayout xmlns:a="http://schemas.openxmlformats.org/drawingml/2006/main" xmlns:p="http://schemas.openxmlformats.org/presentationml/2006/main" xmlns:r="http://schemas.openxmlformats.org/officeDocument/2006/relationships" xmlns:p14="http://schemas.microsoft.com/office/powerpoint/2010/main" xmlns:p15="http://schemas.microsoft.com/office/powerpoint/2012/main" xmlns:mc="http://schemas.openxmlformats.org/markup-compatibility/2006" type="vertTitleAndTx" preserve="1">
+  <p:cSld name="Vertical Title and Text">
     <p:bg>
       <p:bgPr>
         <a:solidFill>
@@ -3706,8 +3896,8 @@
         </p:nvSpPr>
         <p:spPr>
           <a:xfrm>
-            <a:off x="838080" y="365040"/>
-            <a:ext cx="10515240" cy="1325160"/>
+            <a:off x="8724960" y="365040"/>
+            <a:ext cx="2628360" cy="5811120"/>
           </a:xfrm>
           <a:prstGeom prst="rect">
             <a:avLst/>
@@ -3718,7 +3908,7 @@
           </a:ln>
         </p:spPr>
         <p:txBody>
-          <a:bodyPr lIns="91440" rIns="91440" tIns="45720" bIns="45720" anchor="ctr">
+          <a:bodyPr lIns="91440" rIns="91440" tIns="45720" bIns="45720" anchor="ctr" vert="eaVert">
             <a:noAutofit/>
           </a:bodyPr>
           <a:p>
@@ -3727,6 +3917,9 @@
                 <a:spcPct val="90000"/>
               </a:lnSpc>
               <a:buNone/>
+              <a:tabLst>
+                <a:tab algn="l" pos="0"/>
+              </a:tabLst>
             </a:pPr>
             <a:r>
               <a:rPr lang="en-US" sz="4400" b="0" u="none" strike="noStrike">
@@ -3739,13 +3932,13 @@
               </a:rPr>
               <a:t>Click to edit Master title style</a:t>
             </a:r>
-            <a:endParaRPr lang="en-BE" sz="4400" b="0" u="none" strike="noStrike">
-              <a:solidFill>
-                <a:schemeClr val="dk1"/>
-              </a:solidFill>
-              <a:effectLst/>
-              <a:uFillTx/>
-              <a:latin typeface="Calibri"/>
+            <a:endParaRPr lang="en-GB" sz="4400" b="0" u="none" strike="noStrike">
+              <a:solidFill>
+                <a:srgbClr val="000000"/>
+              </a:solidFill>
+              <a:effectLst/>
+              <a:uFillTx/>
+              <a:latin typeface="Arial"/>
             </a:endParaRPr>
           </a:p>
         </p:txBody>
@@ -3762,8 +3955,8 @@
         </p:nvSpPr>
         <p:spPr>
           <a:xfrm>
-            <a:off x="838080" y="1825560"/>
-            <a:ext cx="5181120" cy="4350960"/>
+            <a:off x="838080" y="365040"/>
+            <a:ext cx="7733520" cy="5811120"/>
           </a:xfrm>
           <a:prstGeom prst="rect">
             <a:avLst/>
@@ -3774,7 +3967,7 @@
           </a:ln>
         </p:spPr>
         <p:txBody>
-          <a:bodyPr lIns="91440" rIns="91440" tIns="45720" bIns="45720" anchor="t">
+          <a:bodyPr lIns="91440" rIns="91440" tIns="45720" bIns="45720" anchor="t" vert="eaVert">
             <a:noAutofit/>
           </a:bodyPr>
           <a:p>
@@ -3802,13 +3995,13 @@
               </a:rPr>
               <a:t>Click to edit Master text styles</a:t>
             </a:r>
-            <a:endParaRPr lang="en-BE" sz="2800" b="0" u="none" strike="noStrike">
-              <a:solidFill>
-                <a:schemeClr val="dk1"/>
-              </a:solidFill>
-              <a:effectLst/>
-              <a:uFillTx/>
-              <a:latin typeface="Calibri"/>
+            <a:endParaRPr lang="en-GB" sz="2800" b="0" u="none" strike="noStrike">
+              <a:solidFill>
+                <a:srgbClr val="000000"/>
+              </a:solidFill>
+              <a:effectLst/>
+              <a:uFillTx/>
+              <a:latin typeface="Arial"/>
             </a:endParaRPr>
           </a:p>
           <a:p>
@@ -3836,13 +4029,13 @@
               </a:rPr>
               <a:t>Second level</a:t>
             </a:r>
-            <a:endParaRPr lang="en-BE" sz="2400" b="0" u="none" strike="noStrike">
-              <a:solidFill>
-                <a:schemeClr val="dk1"/>
-              </a:solidFill>
-              <a:effectLst/>
-              <a:uFillTx/>
-              <a:latin typeface="Calibri"/>
+            <a:endParaRPr lang="en-GB" sz="2400" b="0" u="none" strike="noStrike">
+              <a:solidFill>
+                <a:srgbClr val="000000"/>
+              </a:solidFill>
+              <a:effectLst/>
+              <a:uFillTx/>
+              <a:latin typeface="Arial"/>
             </a:endParaRPr>
           </a:p>
           <a:p>
@@ -3870,13 +4063,13 @@
               </a:rPr>
               <a:t>Third level</a:t>
             </a:r>
-            <a:endParaRPr lang="en-BE" sz="2000" b="0" u="none" strike="noStrike">
-              <a:solidFill>
-                <a:schemeClr val="dk1"/>
-              </a:solidFill>
-              <a:effectLst/>
-              <a:uFillTx/>
-              <a:latin typeface="Calibri"/>
+            <a:endParaRPr lang="en-GB" sz="2000" b="0" u="none" strike="noStrike">
+              <a:solidFill>
+                <a:srgbClr val="000000"/>
+              </a:solidFill>
+              <a:effectLst/>
+              <a:uFillTx/>
+              <a:latin typeface="Arial"/>
             </a:endParaRPr>
           </a:p>
           <a:p>
@@ -3904,13 +4097,13 @@
               </a:rPr>
               <a:t>Fourth level</a:t>
             </a:r>
-            <a:endParaRPr lang="en-BE" sz="1800" b="0" u="none" strike="noStrike">
-              <a:solidFill>
-                <a:schemeClr val="dk1"/>
-              </a:solidFill>
-              <a:effectLst/>
-              <a:uFillTx/>
-              <a:latin typeface="Calibri"/>
+            <a:endParaRPr lang="en-GB" sz="1800" b="0" u="none" strike="noStrike">
+              <a:solidFill>
+                <a:srgbClr val="000000"/>
+              </a:solidFill>
+              <a:effectLst/>
+              <a:uFillTx/>
+              <a:latin typeface="Arial"/>
             </a:endParaRPr>
           </a:p>
           <a:p>
@@ -3938,13 +4131,13 @@
               </a:rPr>
               <a:t>Fifth level</a:t>
             </a:r>
-            <a:endParaRPr lang="en-BE" sz="1800" b="0" u="none" strike="noStrike">
-              <a:solidFill>
-                <a:schemeClr val="dk1"/>
-              </a:solidFill>
-              <a:effectLst/>
-              <a:uFillTx/>
-              <a:latin typeface="Calibri"/>
+            <a:endParaRPr lang="en-GB" sz="1800" b="0" u="none" strike="noStrike">
+              <a:solidFill>
+                <a:srgbClr val="000000"/>
+              </a:solidFill>
+              <a:effectLst/>
+              <a:uFillTx/>
+              <a:latin typeface="Arial"/>
             </a:endParaRPr>
           </a:p>
         </p:txBody>
@@ -3952,205 +4145,6 @@
       <p:sp>
         <p:nvSpPr>
           <p:cNvPr id="29" name="PlaceHolder 3"/>
-          <p:cNvSpPr>
-            <a:spLocks noGrp="1"/>
-          </p:cNvSpPr>
-          <p:nvPr>
-            <p:ph type="body"/>
-          </p:nvPr>
-        </p:nvSpPr>
-        <p:spPr>
-          <a:xfrm>
-            <a:off x="6172200" y="1825560"/>
-            <a:ext cx="5181120" cy="4350960"/>
-          </a:xfrm>
-          <a:prstGeom prst="rect">
-            <a:avLst/>
-          </a:prstGeom>
-          <a:noFill/>
-          <a:ln w="0">
-            <a:noFill/>
-          </a:ln>
-        </p:spPr>
-        <p:txBody>
-          <a:bodyPr lIns="91440" rIns="91440" tIns="45720" bIns="45720" anchor="t">
-            <a:noAutofit/>
-          </a:bodyPr>
-          <a:p>
-            <a:pPr marL="228600" indent="-228600" defTabSz="914400">
-              <a:lnSpc>
-                <a:spcPct val="90000"/>
-              </a:lnSpc>
-              <a:spcBef>
-                <a:spcPts val="1001"/>
-              </a:spcBef>
-              <a:buClr>
-                <a:srgbClr val="000000"/>
-              </a:buClr>
-              <a:buFont typeface="Arial"/>
-              <a:buChar char="•"/>
-            </a:pPr>
-            <a:r>
-              <a:rPr lang="en-US" sz="2800" b="0" u="none" strike="noStrike">
-                <a:solidFill>
-                  <a:schemeClr val="dk1"/>
-                </a:solidFill>
-                <a:effectLst/>
-                <a:uFillTx/>
-                <a:latin typeface="Calibri"/>
-              </a:rPr>
-              <a:t>Click to edit Master text styles</a:t>
-            </a:r>
-            <a:endParaRPr lang="en-BE" sz="2800" b="0" u="none" strike="noStrike">
-              <a:solidFill>
-                <a:schemeClr val="dk1"/>
-              </a:solidFill>
-              <a:effectLst/>
-              <a:uFillTx/>
-              <a:latin typeface="Calibri"/>
-            </a:endParaRPr>
-          </a:p>
-          <a:p>
-            <a:pPr marL="685800" lvl="1" indent="-228600" defTabSz="914400">
-              <a:lnSpc>
-                <a:spcPct val="90000"/>
-              </a:lnSpc>
-              <a:spcBef>
-                <a:spcPts val="499"/>
-              </a:spcBef>
-              <a:buClr>
-                <a:srgbClr val="000000"/>
-              </a:buClr>
-              <a:buFont typeface="Arial"/>
-              <a:buChar char="•"/>
-            </a:pPr>
-            <a:r>
-              <a:rPr lang="en-US" sz="2400" b="0" u="none" strike="noStrike">
-                <a:solidFill>
-                  <a:schemeClr val="dk1"/>
-                </a:solidFill>
-                <a:effectLst/>
-                <a:uFillTx/>
-                <a:latin typeface="Calibri"/>
-              </a:rPr>
-              <a:t>Second level</a:t>
-            </a:r>
-            <a:endParaRPr lang="en-BE" sz="2400" b="0" u="none" strike="noStrike">
-              <a:solidFill>
-                <a:schemeClr val="dk1"/>
-              </a:solidFill>
-              <a:effectLst/>
-              <a:uFillTx/>
-              <a:latin typeface="Calibri"/>
-            </a:endParaRPr>
-          </a:p>
-          <a:p>
-            <a:pPr marL="1143000" lvl="2" indent="-228600" defTabSz="914400">
-              <a:lnSpc>
-                <a:spcPct val="90000"/>
-              </a:lnSpc>
-              <a:spcBef>
-                <a:spcPts val="499"/>
-              </a:spcBef>
-              <a:buClr>
-                <a:srgbClr val="000000"/>
-              </a:buClr>
-              <a:buFont typeface="Arial"/>
-              <a:buChar char="•"/>
-            </a:pPr>
-            <a:r>
-              <a:rPr lang="en-US" sz="2000" b="0" u="none" strike="noStrike">
-                <a:solidFill>
-                  <a:schemeClr val="dk1"/>
-                </a:solidFill>
-                <a:effectLst/>
-                <a:uFillTx/>
-                <a:latin typeface="Calibri"/>
-              </a:rPr>
-              <a:t>Third level</a:t>
-            </a:r>
-            <a:endParaRPr lang="en-BE" sz="2000" b="0" u="none" strike="noStrike">
-              <a:solidFill>
-                <a:schemeClr val="dk1"/>
-              </a:solidFill>
-              <a:effectLst/>
-              <a:uFillTx/>
-              <a:latin typeface="Calibri"/>
-            </a:endParaRPr>
-          </a:p>
-          <a:p>
-            <a:pPr marL="1600200" lvl="3" indent="-228600" defTabSz="914400">
-              <a:lnSpc>
-                <a:spcPct val="90000"/>
-              </a:lnSpc>
-              <a:spcBef>
-                <a:spcPts val="499"/>
-              </a:spcBef>
-              <a:buClr>
-                <a:srgbClr val="000000"/>
-              </a:buClr>
-              <a:buFont typeface="Arial"/>
-              <a:buChar char="•"/>
-            </a:pPr>
-            <a:r>
-              <a:rPr lang="en-US" sz="1800" b="0" u="none" strike="noStrike">
-                <a:solidFill>
-                  <a:schemeClr val="dk1"/>
-                </a:solidFill>
-                <a:effectLst/>
-                <a:uFillTx/>
-                <a:latin typeface="Calibri"/>
-              </a:rPr>
-              <a:t>Fourth level</a:t>
-            </a:r>
-            <a:endParaRPr lang="en-BE" sz="1800" b="0" u="none" strike="noStrike">
-              <a:solidFill>
-                <a:schemeClr val="dk1"/>
-              </a:solidFill>
-              <a:effectLst/>
-              <a:uFillTx/>
-              <a:latin typeface="Calibri"/>
-            </a:endParaRPr>
-          </a:p>
-          <a:p>
-            <a:pPr marL="2057400" lvl="4" indent="-228600" defTabSz="914400">
-              <a:lnSpc>
-                <a:spcPct val="90000"/>
-              </a:lnSpc>
-              <a:spcBef>
-                <a:spcPts val="499"/>
-              </a:spcBef>
-              <a:buClr>
-                <a:srgbClr val="000000"/>
-              </a:buClr>
-              <a:buFont typeface="Arial"/>
-              <a:buChar char="•"/>
-            </a:pPr>
-            <a:r>
-              <a:rPr lang="en-US" sz="1800" b="0" u="none" strike="noStrike">
-                <a:solidFill>
-                  <a:schemeClr val="dk1"/>
-                </a:solidFill>
-                <a:effectLst/>
-                <a:uFillTx/>
-                <a:latin typeface="Calibri"/>
-              </a:rPr>
-              <a:t>Fifth level</a:t>
-            </a:r>
-            <a:endParaRPr lang="en-BE" sz="1800" b="0" u="none" strike="noStrike">
-              <a:solidFill>
-                <a:schemeClr val="dk1"/>
-              </a:solidFill>
-              <a:effectLst/>
-              <a:uFillTx/>
-              <a:latin typeface="Calibri"/>
-            </a:endParaRPr>
-          </a:p>
-        </p:txBody>
-      </p:sp>
-      <p:sp>
-        <p:nvSpPr>
-          <p:cNvPr id="30" name="PlaceHolder 4"/>
           <p:cNvSpPr>
             <a:spLocks noGrp="1"/>
           </p:cNvSpPr>
@@ -4161,7 +4155,7 @@
         <p:spPr>
           <a:xfrm>
             <a:off x="838080" y="6356520"/>
-            <a:ext cx="2742840" cy="364680"/>
+            <a:ext cx="2742480" cy="364320"/>
           </a:xfrm>
           <a:prstGeom prst="rect">
             <a:avLst/>
@@ -4181,6 +4175,9 @@
                 <a:spcPct val="100000"/>
               </a:lnSpc>
               <a:buNone/>
+              <a:tabLst>
+                <a:tab algn="l" pos="0"/>
+              </a:tabLst>
               <a:defRPr lang="en-BE" sz="1200" b="0" u="none" strike="noStrike">
                 <a:solidFill>
                   <a:schemeClr val="dk1">
@@ -4199,6 +4196,9 @@
                 <a:spcPct val="100000"/>
               </a:lnSpc>
               <a:buNone/>
+              <a:tabLst>
+                <a:tab algn="l" pos="0"/>
+              </a:tabLst>
             </a:pPr>
             <a:r>
               <a:rPr lang="en-BE" sz="1200" b="0" u="none" strike="noStrike">
@@ -4226,7 +4226,7 @@
       </p:sp>
       <p:sp>
         <p:nvSpPr>
-          <p:cNvPr id="31" name="PlaceHolder 5"/>
+          <p:cNvPr id="30" name="PlaceHolder 4"/>
           <p:cNvSpPr>
             <a:spLocks noGrp="1"/>
           </p:cNvSpPr>
@@ -4237,7 +4237,7 @@
         <p:spPr>
           <a:xfrm>
             <a:off x="4038480" y="6356520"/>
-            <a:ext cx="4114440" cy="364680"/>
+            <a:ext cx="4114080" cy="364320"/>
           </a:xfrm>
           <a:prstGeom prst="rect">
             <a:avLst/>
@@ -4253,7 +4253,13 @@
           </a:bodyPr>
           <a:lstStyle>
             <a:lvl1pPr indent="0" algn="ctr">
-              <a:buNone/>
+              <a:lnSpc>
+                <a:spcPct val="100000"/>
+              </a:lnSpc>
+              <a:buNone/>
+              <a:tabLst>
+                <a:tab algn="l" pos="0"/>
+              </a:tabLst>
               <a:defRPr lang="en-GB" sz="1400" b="0" u="none" strike="noStrike">
                 <a:solidFill>
                   <a:srgbClr val="000000"/>
@@ -4266,7 +4272,13 @@
           </a:lstStyle>
           <a:p>
             <a:pPr indent="0" algn="ctr">
-              <a:buNone/>
+              <a:lnSpc>
+                <a:spcPct val="100000"/>
+              </a:lnSpc>
+              <a:buNone/>
+              <a:tabLst>
+                <a:tab algn="l" pos="0"/>
+              </a:tabLst>
             </a:pPr>
             <a:r>
               <a:rPr lang="en-GB" sz="1400" b="0" u="none" strike="noStrike">
@@ -4292,7 +4304,7 @@
       </p:sp>
       <p:sp>
         <p:nvSpPr>
-          <p:cNvPr id="32" name="PlaceHolder 6"/>
+          <p:cNvPr id="31" name="PlaceHolder 5"/>
           <p:cNvSpPr>
             <a:spLocks noGrp="1"/>
           </p:cNvSpPr>
@@ -4303,7 +4315,7 @@
         <p:spPr>
           <a:xfrm>
             <a:off x="8610480" y="6356520"/>
-            <a:ext cx="2742840" cy="364680"/>
+            <a:ext cx="2742480" cy="364320"/>
           </a:xfrm>
           <a:prstGeom prst="rect">
             <a:avLst/>
@@ -4323,6 +4335,9 @@
                 <a:spcPct val="100000"/>
               </a:lnSpc>
               <a:buNone/>
+              <a:tabLst>
+                <a:tab algn="l" pos="0"/>
+              </a:tabLst>
               <a:defRPr lang="en-BE" sz="1200" b="0" u="none" strike="noStrike">
                 <a:solidFill>
                   <a:schemeClr val="dk1">
@@ -4341,8 +4356,11 @@
                 <a:spcPct val="100000"/>
               </a:lnSpc>
               <a:buNone/>
-            </a:pPr>
-            <a:fld id="{C14B5FDC-C2BC-4A0E-BB1A-A8DCF499F742}" type="slidenum">
+              <a:tabLst>
+                <a:tab algn="l" pos="0"/>
+              </a:tabLst>
+            </a:pPr>
+            <a:fld id="{B2F7C048-642A-4CB5-9DB3-46F1D84EB09C}" type="slidenum">
               <a:rPr lang="en-BE" sz="1200" b="0" u="none" strike="noStrike">
                 <a:solidFill>
                   <a:schemeClr val="dk1">
@@ -4372,8 +4390,8 @@
 </file>
 
 <file path=ppt/slideLayouts/slideLayout7.xml><?xml version="1.0" encoding="utf-8"?>
-<p:sldLayout xmlns:a="http://schemas.openxmlformats.org/drawingml/2006/main" xmlns:p="http://schemas.openxmlformats.org/presentationml/2006/main" xmlns:r="http://schemas.openxmlformats.org/officeDocument/2006/relationships" xmlns:p14="http://schemas.microsoft.com/office/powerpoint/2010/main" xmlns:p15="http://schemas.microsoft.com/office/powerpoint/2012/main" xmlns:mc="http://schemas.openxmlformats.org/markup-compatibility/2006" type="blank" preserve="1">
-  <p:cSld name="Comparison">
+<p:sldLayout xmlns:a="http://schemas.openxmlformats.org/drawingml/2006/main" xmlns:p="http://schemas.openxmlformats.org/presentationml/2006/main" xmlns:r="http://schemas.openxmlformats.org/officeDocument/2006/relationships" xmlns:p14="http://schemas.microsoft.com/office/powerpoint/2010/main" xmlns:p15="http://schemas.microsoft.com/office/powerpoint/2012/main" xmlns:mc="http://schemas.openxmlformats.org/markup-compatibility/2006" type="obj" preserve="1">
+  <p:cSld name="Title and Content">
     <p:bg>
       <p:bgPr>
         <a:solidFill>
@@ -4397,7 +4415,7 @@
       </p:grpSpPr>
       <p:sp>
         <p:nvSpPr>
-          <p:cNvPr id="33" name="PlaceHolder 1"/>
+          <p:cNvPr id="32" name="PlaceHolder 1"/>
           <p:cNvSpPr>
             <a:spLocks noGrp="1"/>
           </p:cNvSpPr>
@@ -4407,8 +4425,8 @@
         </p:nvSpPr>
         <p:spPr>
           <a:xfrm>
-            <a:off x="839880" y="365040"/>
-            <a:ext cx="10515240" cy="1325160"/>
+            <a:off x="838080" y="365040"/>
+            <a:ext cx="10514880" cy="1324800"/>
           </a:xfrm>
           <a:prstGeom prst="rect">
             <a:avLst/>
@@ -4428,6 +4446,9 @@
                 <a:spcPct val="90000"/>
               </a:lnSpc>
               <a:buNone/>
+              <a:tabLst>
+                <a:tab algn="l" pos="0"/>
+              </a:tabLst>
             </a:pPr>
             <a:r>
               <a:rPr lang="en-US" sz="4400" b="0" u="none" strike="noStrike">
@@ -4440,20 +4461,20 @@
               </a:rPr>
               <a:t>Click to edit Master title style</a:t>
             </a:r>
-            <a:endParaRPr lang="en-BE" sz="4400" b="0" u="none" strike="noStrike">
-              <a:solidFill>
-                <a:schemeClr val="dk1"/>
-              </a:solidFill>
-              <a:effectLst/>
-              <a:uFillTx/>
-              <a:latin typeface="Calibri"/>
+            <a:endParaRPr lang="en-GB" sz="4400" b="0" u="none" strike="noStrike">
+              <a:solidFill>
+                <a:srgbClr val="000000"/>
+              </a:solidFill>
+              <a:effectLst/>
+              <a:uFillTx/>
+              <a:latin typeface="Arial"/>
             </a:endParaRPr>
           </a:p>
         </p:txBody>
       </p:sp>
       <p:sp>
         <p:nvSpPr>
-          <p:cNvPr id="34" name="PlaceHolder 2"/>
+          <p:cNvPr id="33" name="PlaceHolder 2"/>
           <p:cNvSpPr>
             <a:spLocks noGrp="1"/>
           </p:cNvSpPr>
@@ -4463,70 +4484,8 @@
         </p:nvSpPr>
         <p:spPr>
           <a:xfrm>
-            <a:off x="839880" y="1681200"/>
-            <a:ext cx="5157360" cy="823680"/>
-          </a:xfrm>
-          <a:prstGeom prst="rect">
-            <a:avLst/>
-          </a:prstGeom>
-          <a:noFill/>
-          <a:ln w="0">
-            <a:noFill/>
-          </a:ln>
-        </p:spPr>
-        <p:txBody>
-          <a:bodyPr lIns="91440" rIns="91440" tIns="45720" bIns="45720" anchor="b">
-            <a:noAutofit/>
-          </a:bodyPr>
-          <a:p>
-            <a:pPr indent="0" defTabSz="914400">
-              <a:lnSpc>
-                <a:spcPct val="90000"/>
-              </a:lnSpc>
-              <a:spcBef>
-                <a:spcPts val="1001"/>
-              </a:spcBef>
-              <a:buNone/>
-              <a:tabLst>
-                <a:tab algn="l" pos="0"/>
-              </a:tabLst>
-            </a:pPr>
-            <a:r>
-              <a:rPr lang="en-US" sz="2400" b="1" u="none" strike="noStrike">
-                <a:solidFill>
-                  <a:schemeClr val="dk1"/>
-                </a:solidFill>
-                <a:effectLst/>
-                <a:uFillTx/>
-                <a:latin typeface="Calibri"/>
-              </a:rPr>
-              <a:t>Click to edit Master text styles</a:t>
-            </a:r>
-            <a:endParaRPr lang="en-BE" sz="2400" b="0" u="none" strike="noStrike">
-              <a:solidFill>
-                <a:schemeClr val="dk1"/>
-              </a:solidFill>
-              <a:effectLst/>
-              <a:uFillTx/>
-              <a:latin typeface="Calibri"/>
-            </a:endParaRPr>
-          </a:p>
-        </p:txBody>
-      </p:sp>
-      <p:sp>
-        <p:nvSpPr>
-          <p:cNvPr id="35" name="PlaceHolder 3"/>
-          <p:cNvSpPr>
-            <a:spLocks noGrp="1"/>
-          </p:cNvSpPr>
-          <p:nvPr>
-            <p:ph type="body"/>
-          </p:nvPr>
-        </p:nvSpPr>
-        <p:spPr>
-          <a:xfrm>
-            <a:off x="839880" y="2505240"/>
-            <a:ext cx="5157360" cy="3684240"/>
+            <a:off x="838080" y="1825560"/>
+            <a:ext cx="10514880" cy="4350600"/>
           </a:xfrm>
           <a:prstGeom prst="rect">
             <a:avLst/>
@@ -4565,13 +4524,13 @@
               </a:rPr>
               <a:t>Click to edit Master text styles</a:t>
             </a:r>
-            <a:endParaRPr lang="en-BE" sz="2800" b="0" u="none" strike="noStrike">
-              <a:solidFill>
-                <a:schemeClr val="dk1"/>
-              </a:solidFill>
-              <a:effectLst/>
-              <a:uFillTx/>
-              <a:latin typeface="Calibri"/>
+            <a:endParaRPr lang="en-GB" sz="2800" b="0" u="none" strike="noStrike">
+              <a:solidFill>
+                <a:srgbClr val="000000"/>
+              </a:solidFill>
+              <a:effectLst/>
+              <a:uFillTx/>
+              <a:latin typeface="Arial"/>
             </a:endParaRPr>
           </a:p>
           <a:p>
@@ -4599,13 +4558,13 @@
               </a:rPr>
               <a:t>Second level</a:t>
             </a:r>
-            <a:endParaRPr lang="en-BE" sz="2400" b="0" u="none" strike="noStrike">
-              <a:solidFill>
-                <a:schemeClr val="dk1"/>
-              </a:solidFill>
-              <a:effectLst/>
-              <a:uFillTx/>
-              <a:latin typeface="Calibri"/>
+            <a:endParaRPr lang="en-GB" sz="2400" b="0" u="none" strike="noStrike">
+              <a:solidFill>
+                <a:srgbClr val="000000"/>
+              </a:solidFill>
+              <a:effectLst/>
+              <a:uFillTx/>
+              <a:latin typeface="Arial"/>
             </a:endParaRPr>
           </a:p>
           <a:p>
@@ -4633,13 +4592,13 @@
               </a:rPr>
               <a:t>Third level</a:t>
             </a:r>
-            <a:endParaRPr lang="en-BE" sz="2000" b="0" u="none" strike="noStrike">
-              <a:solidFill>
-                <a:schemeClr val="dk1"/>
-              </a:solidFill>
-              <a:effectLst/>
-              <a:uFillTx/>
-              <a:latin typeface="Calibri"/>
+            <a:endParaRPr lang="en-GB" sz="2000" b="0" u="none" strike="noStrike">
+              <a:solidFill>
+                <a:srgbClr val="000000"/>
+              </a:solidFill>
+              <a:effectLst/>
+              <a:uFillTx/>
+              <a:latin typeface="Arial"/>
             </a:endParaRPr>
           </a:p>
           <a:p>
@@ -4667,13 +4626,13 @@
               </a:rPr>
               <a:t>Fourth level</a:t>
             </a:r>
-            <a:endParaRPr lang="en-BE" sz="1800" b="0" u="none" strike="noStrike">
-              <a:solidFill>
-                <a:schemeClr val="dk1"/>
-              </a:solidFill>
-              <a:effectLst/>
-              <a:uFillTx/>
-              <a:latin typeface="Calibri"/>
+            <a:endParaRPr lang="en-GB" sz="1800" b="0" u="none" strike="noStrike">
+              <a:solidFill>
+                <a:srgbClr val="000000"/>
+              </a:solidFill>
+              <a:effectLst/>
+              <a:uFillTx/>
+              <a:latin typeface="Arial"/>
             </a:endParaRPr>
           </a:p>
           <a:p>
@@ -4701,281 +4660,20 @@
               </a:rPr>
               <a:t>Fifth level</a:t>
             </a:r>
-            <a:endParaRPr lang="en-BE" sz="1800" b="0" u="none" strike="noStrike">
-              <a:solidFill>
-                <a:schemeClr val="dk1"/>
-              </a:solidFill>
-              <a:effectLst/>
-              <a:uFillTx/>
-              <a:latin typeface="Calibri"/>
+            <a:endParaRPr lang="en-GB" sz="1800" b="0" u="none" strike="noStrike">
+              <a:solidFill>
+                <a:srgbClr val="000000"/>
+              </a:solidFill>
+              <a:effectLst/>
+              <a:uFillTx/>
+              <a:latin typeface="Arial"/>
             </a:endParaRPr>
           </a:p>
         </p:txBody>
       </p:sp>
       <p:sp>
         <p:nvSpPr>
-          <p:cNvPr id="36" name="PlaceHolder 4"/>
-          <p:cNvSpPr>
-            <a:spLocks noGrp="1"/>
-          </p:cNvSpPr>
-          <p:nvPr>
-            <p:ph type="body"/>
-          </p:nvPr>
-        </p:nvSpPr>
-        <p:spPr>
-          <a:xfrm>
-            <a:off x="6172200" y="1681200"/>
-            <a:ext cx="5182920" cy="823680"/>
-          </a:xfrm>
-          <a:prstGeom prst="rect">
-            <a:avLst/>
-          </a:prstGeom>
-          <a:noFill/>
-          <a:ln w="0">
-            <a:noFill/>
-          </a:ln>
-        </p:spPr>
-        <p:txBody>
-          <a:bodyPr lIns="91440" rIns="91440" tIns="45720" bIns="45720" anchor="b">
-            <a:noAutofit/>
-          </a:bodyPr>
-          <a:p>
-            <a:pPr indent="0" defTabSz="914400">
-              <a:lnSpc>
-                <a:spcPct val="90000"/>
-              </a:lnSpc>
-              <a:spcBef>
-                <a:spcPts val="1001"/>
-              </a:spcBef>
-              <a:buNone/>
-              <a:tabLst>
-                <a:tab algn="l" pos="0"/>
-              </a:tabLst>
-            </a:pPr>
-            <a:r>
-              <a:rPr lang="en-US" sz="2400" b="1" u="none" strike="noStrike">
-                <a:solidFill>
-                  <a:schemeClr val="dk1"/>
-                </a:solidFill>
-                <a:effectLst/>
-                <a:uFillTx/>
-                <a:latin typeface="Calibri"/>
-              </a:rPr>
-              <a:t>Click to edit Master text styles</a:t>
-            </a:r>
-            <a:endParaRPr lang="en-BE" sz="2400" b="0" u="none" strike="noStrike">
-              <a:solidFill>
-                <a:schemeClr val="dk1"/>
-              </a:solidFill>
-              <a:effectLst/>
-              <a:uFillTx/>
-              <a:latin typeface="Calibri"/>
-            </a:endParaRPr>
-          </a:p>
-        </p:txBody>
-      </p:sp>
-      <p:sp>
-        <p:nvSpPr>
-          <p:cNvPr id="37" name="PlaceHolder 5"/>
-          <p:cNvSpPr>
-            <a:spLocks noGrp="1"/>
-          </p:cNvSpPr>
-          <p:nvPr>
-            <p:ph type="body"/>
-          </p:nvPr>
-        </p:nvSpPr>
-        <p:spPr>
-          <a:xfrm>
-            <a:off x="6172200" y="2505240"/>
-            <a:ext cx="5182920" cy="3684240"/>
-          </a:xfrm>
-          <a:prstGeom prst="rect">
-            <a:avLst/>
-          </a:prstGeom>
-          <a:noFill/>
-          <a:ln w="0">
-            <a:noFill/>
-          </a:ln>
-        </p:spPr>
-        <p:txBody>
-          <a:bodyPr lIns="91440" rIns="91440" tIns="45720" bIns="45720" anchor="t">
-            <a:noAutofit/>
-          </a:bodyPr>
-          <a:p>
-            <a:pPr marL="228600" indent="-228600" defTabSz="914400">
-              <a:lnSpc>
-                <a:spcPct val="90000"/>
-              </a:lnSpc>
-              <a:spcBef>
-                <a:spcPts val="1001"/>
-              </a:spcBef>
-              <a:buClr>
-                <a:srgbClr val="000000"/>
-              </a:buClr>
-              <a:buFont typeface="Arial"/>
-              <a:buChar char="•"/>
-            </a:pPr>
-            <a:r>
-              <a:rPr lang="en-US" sz="2800" b="0" u="none" strike="noStrike">
-                <a:solidFill>
-                  <a:schemeClr val="dk1"/>
-                </a:solidFill>
-                <a:effectLst/>
-                <a:uFillTx/>
-                <a:latin typeface="Calibri"/>
-              </a:rPr>
-              <a:t>Click to edit Master text styles</a:t>
-            </a:r>
-            <a:endParaRPr lang="en-BE" sz="2800" b="0" u="none" strike="noStrike">
-              <a:solidFill>
-                <a:schemeClr val="dk1"/>
-              </a:solidFill>
-              <a:effectLst/>
-              <a:uFillTx/>
-              <a:latin typeface="Calibri"/>
-            </a:endParaRPr>
-          </a:p>
-          <a:p>
-            <a:pPr marL="685800" lvl="1" indent="-228600" defTabSz="914400">
-              <a:lnSpc>
-                <a:spcPct val="90000"/>
-              </a:lnSpc>
-              <a:spcBef>
-                <a:spcPts val="499"/>
-              </a:spcBef>
-              <a:buClr>
-                <a:srgbClr val="000000"/>
-              </a:buClr>
-              <a:buFont typeface="Arial"/>
-              <a:buChar char="•"/>
-            </a:pPr>
-            <a:r>
-              <a:rPr lang="en-US" sz="2400" b="0" u="none" strike="noStrike">
-                <a:solidFill>
-                  <a:schemeClr val="dk1"/>
-                </a:solidFill>
-                <a:effectLst/>
-                <a:uFillTx/>
-                <a:latin typeface="Calibri"/>
-              </a:rPr>
-              <a:t>Second level</a:t>
-            </a:r>
-            <a:endParaRPr lang="en-BE" sz="2400" b="0" u="none" strike="noStrike">
-              <a:solidFill>
-                <a:schemeClr val="dk1"/>
-              </a:solidFill>
-              <a:effectLst/>
-              <a:uFillTx/>
-              <a:latin typeface="Calibri"/>
-            </a:endParaRPr>
-          </a:p>
-          <a:p>
-            <a:pPr marL="1143000" lvl="2" indent="-228600" defTabSz="914400">
-              <a:lnSpc>
-                <a:spcPct val="90000"/>
-              </a:lnSpc>
-              <a:spcBef>
-                <a:spcPts val="499"/>
-              </a:spcBef>
-              <a:buClr>
-                <a:srgbClr val="000000"/>
-              </a:buClr>
-              <a:buFont typeface="Arial"/>
-              <a:buChar char="•"/>
-            </a:pPr>
-            <a:r>
-              <a:rPr lang="en-US" sz="2000" b="0" u="none" strike="noStrike">
-                <a:solidFill>
-                  <a:schemeClr val="dk1"/>
-                </a:solidFill>
-                <a:effectLst/>
-                <a:uFillTx/>
-                <a:latin typeface="Calibri"/>
-              </a:rPr>
-              <a:t>Third level</a:t>
-            </a:r>
-            <a:endParaRPr lang="en-BE" sz="2000" b="0" u="none" strike="noStrike">
-              <a:solidFill>
-                <a:schemeClr val="dk1"/>
-              </a:solidFill>
-              <a:effectLst/>
-              <a:uFillTx/>
-              <a:latin typeface="Calibri"/>
-            </a:endParaRPr>
-          </a:p>
-          <a:p>
-            <a:pPr marL="1600200" lvl="3" indent="-228600" defTabSz="914400">
-              <a:lnSpc>
-                <a:spcPct val="90000"/>
-              </a:lnSpc>
-              <a:spcBef>
-                <a:spcPts val="499"/>
-              </a:spcBef>
-              <a:buClr>
-                <a:srgbClr val="000000"/>
-              </a:buClr>
-              <a:buFont typeface="Arial"/>
-              <a:buChar char="•"/>
-            </a:pPr>
-            <a:r>
-              <a:rPr lang="en-US" sz="1800" b="0" u="none" strike="noStrike">
-                <a:solidFill>
-                  <a:schemeClr val="dk1"/>
-                </a:solidFill>
-                <a:effectLst/>
-                <a:uFillTx/>
-                <a:latin typeface="Calibri"/>
-              </a:rPr>
-              <a:t>Fourth level</a:t>
-            </a:r>
-            <a:endParaRPr lang="en-BE" sz="1800" b="0" u="none" strike="noStrike">
-              <a:solidFill>
-                <a:schemeClr val="dk1"/>
-              </a:solidFill>
-              <a:effectLst/>
-              <a:uFillTx/>
-              <a:latin typeface="Calibri"/>
-            </a:endParaRPr>
-          </a:p>
-          <a:p>
-            <a:pPr marL="2057400" lvl="4" indent="-228600" defTabSz="914400">
-              <a:lnSpc>
-                <a:spcPct val="90000"/>
-              </a:lnSpc>
-              <a:spcBef>
-                <a:spcPts val="499"/>
-              </a:spcBef>
-              <a:buClr>
-                <a:srgbClr val="000000"/>
-              </a:buClr>
-              <a:buFont typeface="Arial"/>
-              <a:buChar char="•"/>
-            </a:pPr>
-            <a:r>
-              <a:rPr lang="en-US" sz="1800" b="0" u="none" strike="noStrike">
-                <a:solidFill>
-                  <a:schemeClr val="dk1"/>
-                </a:solidFill>
-                <a:effectLst/>
-                <a:uFillTx/>
-                <a:latin typeface="Calibri"/>
-              </a:rPr>
-              <a:t>Fifth level</a:t>
-            </a:r>
-            <a:endParaRPr lang="en-BE" sz="1800" b="0" u="none" strike="noStrike">
-              <a:solidFill>
-                <a:schemeClr val="dk1"/>
-              </a:solidFill>
-              <a:effectLst/>
-              <a:uFillTx/>
-              <a:latin typeface="Calibri"/>
-            </a:endParaRPr>
-          </a:p>
-        </p:txBody>
-      </p:sp>
-      <p:sp>
-        <p:nvSpPr>
-          <p:cNvPr id="38" name="PlaceHolder 6"/>
+          <p:cNvPr id="34" name="PlaceHolder 3"/>
           <p:cNvSpPr>
             <a:spLocks noGrp="1"/>
           </p:cNvSpPr>
@@ -4986,7 +4684,7 @@
         <p:spPr>
           <a:xfrm>
             <a:off x="838080" y="6356520"/>
-            <a:ext cx="2742840" cy="364680"/>
+            <a:ext cx="2742480" cy="364320"/>
           </a:xfrm>
           <a:prstGeom prst="rect">
             <a:avLst/>
@@ -5006,6 +4704,9 @@
                 <a:spcPct val="100000"/>
               </a:lnSpc>
               <a:buNone/>
+              <a:tabLst>
+                <a:tab algn="l" pos="0"/>
+              </a:tabLst>
               <a:defRPr lang="en-BE" sz="1200" b="0" u="none" strike="noStrike">
                 <a:solidFill>
                   <a:schemeClr val="dk1">
@@ -5024,6 +4725,9 @@
                 <a:spcPct val="100000"/>
               </a:lnSpc>
               <a:buNone/>
+              <a:tabLst>
+                <a:tab algn="l" pos="0"/>
+              </a:tabLst>
             </a:pPr>
             <a:r>
               <a:rPr lang="en-BE" sz="1200" b="0" u="none" strike="noStrike">
@@ -5051,7 +4755,7 @@
       </p:sp>
       <p:sp>
         <p:nvSpPr>
-          <p:cNvPr id="39" name="PlaceHolder 7"/>
+          <p:cNvPr id="35" name="PlaceHolder 4"/>
           <p:cNvSpPr>
             <a:spLocks noGrp="1"/>
           </p:cNvSpPr>
@@ -5062,7 +4766,7 @@
         <p:spPr>
           <a:xfrm>
             <a:off x="4038480" y="6356520"/>
-            <a:ext cx="4114440" cy="364680"/>
+            <a:ext cx="4114080" cy="364320"/>
           </a:xfrm>
           <a:prstGeom prst="rect">
             <a:avLst/>
@@ -5078,7 +4782,13 @@
           </a:bodyPr>
           <a:lstStyle>
             <a:lvl1pPr indent="0" algn="ctr">
-              <a:buNone/>
+              <a:lnSpc>
+                <a:spcPct val="100000"/>
+              </a:lnSpc>
+              <a:buNone/>
+              <a:tabLst>
+                <a:tab algn="l" pos="0"/>
+              </a:tabLst>
               <a:defRPr lang="en-GB" sz="1400" b="0" u="none" strike="noStrike">
                 <a:solidFill>
                   <a:srgbClr val="000000"/>
@@ -5091,7 +4801,13 @@
           </a:lstStyle>
           <a:p>
             <a:pPr indent="0" algn="ctr">
-              <a:buNone/>
+              <a:lnSpc>
+                <a:spcPct val="100000"/>
+              </a:lnSpc>
+              <a:buNone/>
+              <a:tabLst>
+                <a:tab algn="l" pos="0"/>
+              </a:tabLst>
             </a:pPr>
             <a:r>
               <a:rPr lang="en-GB" sz="1400" b="0" u="none" strike="noStrike">
@@ -5117,7 +4833,7 @@
       </p:sp>
       <p:sp>
         <p:nvSpPr>
-          <p:cNvPr id="40" name="PlaceHolder 8"/>
+          <p:cNvPr id="36" name="PlaceHolder 5"/>
           <p:cNvSpPr>
             <a:spLocks noGrp="1"/>
           </p:cNvSpPr>
@@ -5128,7 +4844,7 @@
         <p:spPr>
           <a:xfrm>
             <a:off x="8610480" y="6356520"/>
-            <a:ext cx="2742840" cy="364680"/>
+            <a:ext cx="2742480" cy="364320"/>
           </a:xfrm>
           <a:prstGeom prst="rect">
             <a:avLst/>
@@ -5148,6 +4864,9 @@
                 <a:spcPct val="100000"/>
               </a:lnSpc>
               <a:buNone/>
+              <a:tabLst>
+                <a:tab algn="l" pos="0"/>
+              </a:tabLst>
               <a:defRPr lang="en-BE" sz="1200" b="0" u="none" strike="noStrike">
                 <a:solidFill>
                   <a:schemeClr val="dk1">
@@ -5166,8 +4885,11 @@
                 <a:spcPct val="100000"/>
               </a:lnSpc>
               <a:buNone/>
-            </a:pPr>
-            <a:fld id="{A41C9886-4B10-478E-B18D-01E95E2C0D05}" type="slidenum">
+              <a:tabLst>
+                <a:tab algn="l" pos="0"/>
+              </a:tabLst>
+            </a:pPr>
+            <a:fld id="{F50ECA5C-EA0F-4191-9D8A-61A233353CC3}" type="slidenum">
               <a:rPr lang="en-BE" sz="1200" b="0" u="none" strike="noStrike">
                 <a:solidFill>
                   <a:schemeClr val="dk1">
@@ -5197,8 +4919,8 @@
 </file>
 
 <file path=ppt/slideLayouts/slideLayout8.xml><?xml version="1.0" encoding="utf-8"?>
-<p:sldLayout xmlns:a="http://schemas.openxmlformats.org/drawingml/2006/main" xmlns:p="http://schemas.openxmlformats.org/presentationml/2006/main" xmlns:r="http://schemas.openxmlformats.org/officeDocument/2006/relationships" xmlns:p14="http://schemas.microsoft.com/office/powerpoint/2010/main" xmlns:p15="http://schemas.microsoft.com/office/powerpoint/2012/main" xmlns:mc="http://schemas.openxmlformats.org/markup-compatibility/2006" type="titleOnly" preserve="1">
-  <p:cSld name="Title Only">
+<p:sldLayout xmlns:a="http://schemas.openxmlformats.org/drawingml/2006/main" xmlns:p="http://schemas.openxmlformats.org/presentationml/2006/main" xmlns:r="http://schemas.openxmlformats.org/officeDocument/2006/relationships" xmlns:p14="http://schemas.microsoft.com/office/powerpoint/2010/main" xmlns:p15="http://schemas.microsoft.com/office/powerpoint/2012/main" xmlns:mc="http://schemas.openxmlformats.org/markup-compatibility/2006" type="blank" preserve="1">
+  <p:cSld name="Section Header">
     <p:bg>
       <p:bgPr>
         <a:solidFill>
@@ -5222,7 +4944,7 @@
       </p:grpSpPr>
       <p:sp>
         <p:nvSpPr>
-          <p:cNvPr id="41" name="PlaceHolder 1"/>
+          <p:cNvPr id="37" name="PlaceHolder 1"/>
           <p:cNvSpPr>
             <a:spLocks noGrp="1"/>
           </p:cNvSpPr>
@@ -5232,8 +4954,8 @@
         </p:nvSpPr>
         <p:spPr>
           <a:xfrm>
-            <a:off x="838080" y="365040"/>
-            <a:ext cx="10515240" cy="1325160"/>
+            <a:off x="831960" y="1709640"/>
+            <a:ext cx="10514880" cy="2851920"/>
           </a:xfrm>
           <a:prstGeom prst="rect">
             <a:avLst/>
@@ -5244,7 +4966,7 @@
           </a:ln>
         </p:spPr>
         <p:txBody>
-          <a:bodyPr lIns="91440" rIns="91440" tIns="45720" bIns="45720" anchor="ctr">
+          <a:bodyPr lIns="91440" rIns="91440" tIns="45720" bIns="45720" anchor="b">
             <a:noAutofit/>
           </a:bodyPr>
           <a:p>
@@ -5253,9 +4975,12 @@
                 <a:spcPct val="90000"/>
               </a:lnSpc>
               <a:buNone/>
-            </a:pPr>
-            <a:r>
-              <a:rPr lang="en-US" sz="4400" b="0" u="none" strike="noStrike">
+              <a:tabLst>
+                <a:tab algn="l" pos="0"/>
+              </a:tabLst>
+            </a:pPr>
+            <a:r>
+              <a:rPr lang="en-US" sz="6000" b="0" u="none" strike="noStrike">
                 <a:solidFill>
                   <a:schemeClr val="dk1"/>
                 </a:solidFill>
@@ -5265,20 +4990,84 @@
               </a:rPr>
               <a:t>Click to edit Master title style</a:t>
             </a:r>
-            <a:endParaRPr lang="en-BE" sz="4400" b="0" u="none" strike="noStrike">
-              <a:solidFill>
-                <a:schemeClr val="dk1"/>
-              </a:solidFill>
-              <a:effectLst/>
-              <a:uFillTx/>
-              <a:latin typeface="Calibri"/>
+            <a:endParaRPr lang="en-GB" sz="6000" b="0" u="none" strike="noStrike">
+              <a:solidFill>
+                <a:srgbClr val="000000"/>
+              </a:solidFill>
+              <a:effectLst/>
+              <a:uFillTx/>
+              <a:latin typeface="Arial"/>
             </a:endParaRPr>
           </a:p>
         </p:txBody>
       </p:sp>
       <p:sp>
         <p:nvSpPr>
-          <p:cNvPr id="42" name="PlaceHolder 2"/>
+          <p:cNvPr id="38" name="PlaceHolder 2"/>
+          <p:cNvSpPr>
+            <a:spLocks noGrp="1"/>
+          </p:cNvSpPr>
+          <p:nvPr>
+            <p:ph type="body"/>
+          </p:nvPr>
+        </p:nvSpPr>
+        <p:spPr>
+          <a:xfrm>
+            <a:off x="831960" y="4589640"/>
+            <a:ext cx="10514880" cy="1499400"/>
+          </a:xfrm>
+          <a:prstGeom prst="rect">
+            <a:avLst/>
+          </a:prstGeom>
+          <a:noFill/>
+          <a:ln w="0">
+            <a:noFill/>
+          </a:ln>
+        </p:spPr>
+        <p:txBody>
+          <a:bodyPr lIns="91440" rIns="91440" tIns="45720" bIns="45720" anchor="t">
+            <a:noAutofit/>
+          </a:bodyPr>
+          <a:p>
+            <a:pPr indent="0" defTabSz="914400">
+              <a:lnSpc>
+                <a:spcPct val="90000"/>
+              </a:lnSpc>
+              <a:spcBef>
+                <a:spcPts val="1001"/>
+              </a:spcBef>
+              <a:buNone/>
+              <a:tabLst>
+                <a:tab algn="l" pos="0"/>
+              </a:tabLst>
+            </a:pPr>
+            <a:r>
+              <a:rPr lang="en-US" sz="2400" b="0" u="none" strike="noStrike">
+                <a:solidFill>
+                  <a:schemeClr val="dk1">
+                    <a:tint val="75000"/>
+                  </a:schemeClr>
+                </a:solidFill>
+                <a:effectLst/>
+                <a:uFillTx/>
+                <a:latin typeface="Calibri"/>
+              </a:rPr>
+              <a:t>Click to edit Master text styles</a:t>
+            </a:r>
+            <a:endParaRPr lang="en-GB" sz="2400" b="0" u="none" strike="noStrike">
+              <a:solidFill>
+                <a:srgbClr val="000000"/>
+              </a:solidFill>
+              <a:effectLst/>
+              <a:uFillTx/>
+              <a:latin typeface="Arial"/>
+            </a:endParaRPr>
+          </a:p>
+        </p:txBody>
+      </p:sp>
+      <p:sp>
+        <p:nvSpPr>
+          <p:cNvPr id="39" name="PlaceHolder 3"/>
           <p:cNvSpPr>
             <a:spLocks noGrp="1"/>
           </p:cNvSpPr>
@@ -5289,7 +5078,7 @@
         <p:spPr>
           <a:xfrm>
             <a:off x="838080" y="6356520"/>
-            <a:ext cx="2742840" cy="364680"/>
+            <a:ext cx="2742480" cy="364320"/>
           </a:xfrm>
           <a:prstGeom prst="rect">
             <a:avLst/>
@@ -5309,6 +5098,9 @@
                 <a:spcPct val="100000"/>
               </a:lnSpc>
               <a:buNone/>
+              <a:tabLst>
+                <a:tab algn="l" pos="0"/>
+              </a:tabLst>
               <a:defRPr lang="en-BE" sz="1200" b="0" u="none" strike="noStrike">
                 <a:solidFill>
                   <a:schemeClr val="dk1">
@@ -5327,6 +5119,9 @@
                 <a:spcPct val="100000"/>
               </a:lnSpc>
               <a:buNone/>
+              <a:tabLst>
+                <a:tab algn="l" pos="0"/>
+              </a:tabLst>
             </a:pPr>
             <a:r>
               <a:rPr lang="en-BE" sz="1200" b="0" u="none" strike="noStrike">
@@ -5354,7 +5149,7 @@
       </p:sp>
       <p:sp>
         <p:nvSpPr>
-          <p:cNvPr id="43" name="PlaceHolder 3"/>
+          <p:cNvPr id="40" name="PlaceHolder 4"/>
           <p:cNvSpPr>
             <a:spLocks noGrp="1"/>
           </p:cNvSpPr>
@@ -5365,7 +5160,7 @@
         <p:spPr>
           <a:xfrm>
             <a:off x="4038480" y="6356520"/>
-            <a:ext cx="4114440" cy="364680"/>
+            <a:ext cx="4114080" cy="364320"/>
           </a:xfrm>
           <a:prstGeom prst="rect">
             <a:avLst/>
@@ -5381,7 +5176,13 @@
           </a:bodyPr>
           <a:lstStyle>
             <a:lvl1pPr indent="0" algn="ctr">
-              <a:buNone/>
+              <a:lnSpc>
+                <a:spcPct val="100000"/>
+              </a:lnSpc>
+              <a:buNone/>
+              <a:tabLst>
+                <a:tab algn="l" pos="0"/>
+              </a:tabLst>
               <a:defRPr lang="en-GB" sz="1400" b="0" u="none" strike="noStrike">
                 <a:solidFill>
                   <a:srgbClr val="000000"/>
@@ -5394,7 +5195,13 @@
           </a:lstStyle>
           <a:p>
             <a:pPr indent="0" algn="ctr">
-              <a:buNone/>
+              <a:lnSpc>
+                <a:spcPct val="100000"/>
+              </a:lnSpc>
+              <a:buNone/>
+              <a:tabLst>
+                <a:tab algn="l" pos="0"/>
+              </a:tabLst>
             </a:pPr>
             <a:r>
               <a:rPr lang="en-GB" sz="1400" b="0" u="none" strike="noStrike">
@@ -5420,7 +5227,7 @@
       </p:sp>
       <p:sp>
         <p:nvSpPr>
-          <p:cNvPr id="44" name="PlaceHolder 4"/>
+          <p:cNvPr id="41" name="PlaceHolder 5"/>
           <p:cNvSpPr>
             <a:spLocks noGrp="1"/>
           </p:cNvSpPr>
@@ -5431,7 +5238,7 @@
         <p:spPr>
           <a:xfrm>
             <a:off x="8610480" y="6356520"/>
-            <a:ext cx="2742840" cy="364680"/>
+            <a:ext cx="2742480" cy="364320"/>
           </a:xfrm>
           <a:prstGeom prst="rect">
             <a:avLst/>
@@ -5451,6 +5258,9 @@
                 <a:spcPct val="100000"/>
               </a:lnSpc>
               <a:buNone/>
+              <a:tabLst>
+                <a:tab algn="l" pos="0"/>
+              </a:tabLst>
               <a:defRPr lang="en-BE" sz="1200" b="0" u="none" strike="noStrike">
                 <a:solidFill>
                   <a:schemeClr val="dk1">
@@ -5469,8 +5279,11 @@
                 <a:spcPct val="100000"/>
               </a:lnSpc>
               <a:buNone/>
-            </a:pPr>
-            <a:fld id="{69846506-62AD-443E-BB41-EB5C1A7A06FF}" type="slidenum">
+              <a:tabLst>
+                <a:tab algn="l" pos="0"/>
+              </a:tabLst>
+            </a:pPr>
+            <a:fld id="{3529FEF5-4537-4BCE-B942-F39C87D1823A}" type="slidenum">
               <a:rPr lang="en-BE" sz="1200" b="0" u="none" strike="noStrike">
                 <a:solidFill>
                   <a:schemeClr val="dk1">
@@ -5500,8 +5313,8 @@
 </file>
 
 <file path=ppt/slideLayouts/slideLayout9.xml><?xml version="1.0" encoding="utf-8"?>
-<p:sldLayout xmlns:a="http://schemas.openxmlformats.org/drawingml/2006/main" xmlns:p="http://schemas.openxmlformats.org/presentationml/2006/main" xmlns:r="http://schemas.openxmlformats.org/officeDocument/2006/relationships" xmlns:p14="http://schemas.microsoft.com/office/powerpoint/2010/main" xmlns:p15="http://schemas.microsoft.com/office/powerpoint/2012/main" xmlns:mc="http://schemas.openxmlformats.org/markup-compatibility/2006" type="blank" preserve="1">
-  <p:cSld name="Blank">
+<p:sldLayout xmlns:a="http://schemas.openxmlformats.org/drawingml/2006/main" xmlns:p="http://schemas.openxmlformats.org/presentationml/2006/main" xmlns:r="http://schemas.openxmlformats.org/officeDocument/2006/relationships" xmlns:p14="http://schemas.microsoft.com/office/powerpoint/2010/main" xmlns:p15="http://schemas.microsoft.com/office/powerpoint/2012/main" xmlns:mc="http://schemas.openxmlformats.org/markup-compatibility/2006" type="twoObj" preserve="1">
+  <p:cSld name="Two Content">
     <p:bg>
       <p:bgPr>
         <a:solidFill>
@@ -5525,7 +5338,464 @@
       </p:grpSpPr>
       <p:sp>
         <p:nvSpPr>
-          <p:cNvPr id="45" name="PlaceHolder 1"/>
+          <p:cNvPr id="42" name="PlaceHolder 1"/>
+          <p:cNvSpPr>
+            <a:spLocks noGrp="1"/>
+          </p:cNvSpPr>
+          <p:nvPr>
+            <p:ph type="title"/>
+          </p:nvPr>
+        </p:nvSpPr>
+        <p:spPr>
+          <a:xfrm>
+            <a:off x="838080" y="365040"/>
+            <a:ext cx="10514880" cy="1324800"/>
+          </a:xfrm>
+          <a:prstGeom prst="rect">
+            <a:avLst/>
+          </a:prstGeom>
+          <a:noFill/>
+          <a:ln w="0">
+            <a:noFill/>
+          </a:ln>
+        </p:spPr>
+        <p:txBody>
+          <a:bodyPr lIns="91440" rIns="91440" tIns="45720" bIns="45720" anchor="ctr">
+            <a:noAutofit/>
+          </a:bodyPr>
+          <a:p>
+            <a:pPr indent="0" defTabSz="914400">
+              <a:lnSpc>
+                <a:spcPct val="90000"/>
+              </a:lnSpc>
+              <a:buNone/>
+              <a:tabLst>
+                <a:tab algn="l" pos="0"/>
+              </a:tabLst>
+            </a:pPr>
+            <a:r>
+              <a:rPr lang="en-US" sz="4400" b="0" u="none" strike="noStrike">
+                <a:solidFill>
+                  <a:schemeClr val="dk1"/>
+                </a:solidFill>
+                <a:effectLst/>
+                <a:uFillTx/>
+                <a:latin typeface="Calibri Light"/>
+              </a:rPr>
+              <a:t>Click to edit Master title style</a:t>
+            </a:r>
+            <a:endParaRPr lang="en-GB" sz="4400" b="0" u="none" strike="noStrike">
+              <a:solidFill>
+                <a:srgbClr val="000000"/>
+              </a:solidFill>
+              <a:effectLst/>
+              <a:uFillTx/>
+              <a:latin typeface="Arial"/>
+            </a:endParaRPr>
+          </a:p>
+        </p:txBody>
+      </p:sp>
+      <p:sp>
+        <p:nvSpPr>
+          <p:cNvPr id="43" name="PlaceHolder 2"/>
+          <p:cNvSpPr>
+            <a:spLocks noGrp="1"/>
+          </p:cNvSpPr>
+          <p:nvPr>
+            <p:ph type="body"/>
+          </p:nvPr>
+        </p:nvSpPr>
+        <p:spPr>
+          <a:xfrm>
+            <a:off x="838080" y="1825560"/>
+            <a:ext cx="5180760" cy="4350600"/>
+          </a:xfrm>
+          <a:prstGeom prst="rect">
+            <a:avLst/>
+          </a:prstGeom>
+          <a:noFill/>
+          <a:ln w="0">
+            <a:noFill/>
+          </a:ln>
+        </p:spPr>
+        <p:txBody>
+          <a:bodyPr lIns="91440" rIns="91440" tIns="45720" bIns="45720" anchor="t">
+            <a:noAutofit/>
+          </a:bodyPr>
+          <a:p>
+            <a:pPr marL="228600" indent="-228600" defTabSz="914400">
+              <a:lnSpc>
+                <a:spcPct val="90000"/>
+              </a:lnSpc>
+              <a:spcBef>
+                <a:spcPts val="1001"/>
+              </a:spcBef>
+              <a:buClr>
+                <a:srgbClr val="000000"/>
+              </a:buClr>
+              <a:buFont typeface="Arial"/>
+              <a:buChar char="•"/>
+            </a:pPr>
+            <a:r>
+              <a:rPr lang="en-US" sz="2800" b="0" u="none" strike="noStrike">
+                <a:solidFill>
+                  <a:schemeClr val="dk1"/>
+                </a:solidFill>
+                <a:effectLst/>
+                <a:uFillTx/>
+                <a:latin typeface="Calibri"/>
+              </a:rPr>
+              <a:t>Click to edit Master text styles</a:t>
+            </a:r>
+            <a:endParaRPr lang="en-GB" sz="2800" b="0" u="none" strike="noStrike">
+              <a:solidFill>
+                <a:srgbClr val="000000"/>
+              </a:solidFill>
+              <a:effectLst/>
+              <a:uFillTx/>
+              <a:latin typeface="Arial"/>
+            </a:endParaRPr>
+          </a:p>
+          <a:p>
+            <a:pPr marL="685800" lvl="1" indent="-228600" defTabSz="914400">
+              <a:lnSpc>
+                <a:spcPct val="90000"/>
+              </a:lnSpc>
+              <a:spcBef>
+                <a:spcPts val="499"/>
+              </a:spcBef>
+              <a:buClr>
+                <a:srgbClr val="000000"/>
+              </a:buClr>
+              <a:buFont typeface="Arial"/>
+              <a:buChar char="•"/>
+            </a:pPr>
+            <a:r>
+              <a:rPr lang="en-US" sz="2400" b="0" u="none" strike="noStrike">
+                <a:solidFill>
+                  <a:schemeClr val="dk1"/>
+                </a:solidFill>
+                <a:effectLst/>
+                <a:uFillTx/>
+                <a:latin typeface="Calibri"/>
+              </a:rPr>
+              <a:t>Second level</a:t>
+            </a:r>
+            <a:endParaRPr lang="en-GB" sz="2400" b="0" u="none" strike="noStrike">
+              <a:solidFill>
+                <a:srgbClr val="000000"/>
+              </a:solidFill>
+              <a:effectLst/>
+              <a:uFillTx/>
+              <a:latin typeface="Arial"/>
+            </a:endParaRPr>
+          </a:p>
+          <a:p>
+            <a:pPr marL="1143000" lvl="2" indent="-228600" defTabSz="914400">
+              <a:lnSpc>
+                <a:spcPct val="90000"/>
+              </a:lnSpc>
+              <a:spcBef>
+                <a:spcPts val="499"/>
+              </a:spcBef>
+              <a:buClr>
+                <a:srgbClr val="000000"/>
+              </a:buClr>
+              <a:buFont typeface="Arial"/>
+              <a:buChar char="•"/>
+            </a:pPr>
+            <a:r>
+              <a:rPr lang="en-US" sz="2000" b="0" u="none" strike="noStrike">
+                <a:solidFill>
+                  <a:schemeClr val="dk1"/>
+                </a:solidFill>
+                <a:effectLst/>
+                <a:uFillTx/>
+                <a:latin typeface="Calibri"/>
+              </a:rPr>
+              <a:t>Third level</a:t>
+            </a:r>
+            <a:endParaRPr lang="en-GB" sz="2000" b="0" u="none" strike="noStrike">
+              <a:solidFill>
+                <a:srgbClr val="000000"/>
+              </a:solidFill>
+              <a:effectLst/>
+              <a:uFillTx/>
+              <a:latin typeface="Arial"/>
+            </a:endParaRPr>
+          </a:p>
+          <a:p>
+            <a:pPr marL="1600200" lvl="3" indent="-228600" defTabSz="914400">
+              <a:lnSpc>
+                <a:spcPct val="90000"/>
+              </a:lnSpc>
+              <a:spcBef>
+                <a:spcPts val="499"/>
+              </a:spcBef>
+              <a:buClr>
+                <a:srgbClr val="000000"/>
+              </a:buClr>
+              <a:buFont typeface="Arial"/>
+              <a:buChar char="•"/>
+            </a:pPr>
+            <a:r>
+              <a:rPr lang="en-US" sz="1800" b="0" u="none" strike="noStrike">
+                <a:solidFill>
+                  <a:schemeClr val="dk1"/>
+                </a:solidFill>
+                <a:effectLst/>
+                <a:uFillTx/>
+                <a:latin typeface="Calibri"/>
+              </a:rPr>
+              <a:t>Fourth level</a:t>
+            </a:r>
+            <a:endParaRPr lang="en-GB" sz="1800" b="0" u="none" strike="noStrike">
+              <a:solidFill>
+                <a:srgbClr val="000000"/>
+              </a:solidFill>
+              <a:effectLst/>
+              <a:uFillTx/>
+              <a:latin typeface="Arial"/>
+            </a:endParaRPr>
+          </a:p>
+          <a:p>
+            <a:pPr marL="2057400" lvl="4" indent="-228600" defTabSz="914400">
+              <a:lnSpc>
+                <a:spcPct val="90000"/>
+              </a:lnSpc>
+              <a:spcBef>
+                <a:spcPts val="499"/>
+              </a:spcBef>
+              <a:buClr>
+                <a:srgbClr val="000000"/>
+              </a:buClr>
+              <a:buFont typeface="Arial"/>
+              <a:buChar char="•"/>
+            </a:pPr>
+            <a:r>
+              <a:rPr lang="en-US" sz="1800" b="0" u="none" strike="noStrike">
+                <a:solidFill>
+                  <a:schemeClr val="dk1"/>
+                </a:solidFill>
+                <a:effectLst/>
+                <a:uFillTx/>
+                <a:latin typeface="Calibri"/>
+              </a:rPr>
+              <a:t>Fifth level</a:t>
+            </a:r>
+            <a:endParaRPr lang="en-GB" sz="1800" b="0" u="none" strike="noStrike">
+              <a:solidFill>
+                <a:srgbClr val="000000"/>
+              </a:solidFill>
+              <a:effectLst/>
+              <a:uFillTx/>
+              <a:latin typeface="Arial"/>
+            </a:endParaRPr>
+          </a:p>
+        </p:txBody>
+      </p:sp>
+      <p:sp>
+        <p:nvSpPr>
+          <p:cNvPr id="44" name="PlaceHolder 3"/>
+          <p:cNvSpPr>
+            <a:spLocks noGrp="1"/>
+          </p:cNvSpPr>
+          <p:nvPr>
+            <p:ph type="body"/>
+          </p:nvPr>
+        </p:nvSpPr>
+        <p:spPr>
+          <a:xfrm>
+            <a:off x="6172200" y="1825560"/>
+            <a:ext cx="5180760" cy="4350600"/>
+          </a:xfrm>
+          <a:prstGeom prst="rect">
+            <a:avLst/>
+          </a:prstGeom>
+          <a:noFill/>
+          <a:ln w="0">
+            <a:noFill/>
+          </a:ln>
+        </p:spPr>
+        <p:txBody>
+          <a:bodyPr lIns="91440" rIns="91440" tIns="45720" bIns="45720" anchor="t">
+            <a:noAutofit/>
+          </a:bodyPr>
+          <a:p>
+            <a:pPr marL="228600" indent="-228600" defTabSz="914400">
+              <a:lnSpc>
+                <a:spcPct val="90000"/>
+              </a:lnSpc>
+              <a:spcBef>
+                <a:spcPts val="1001"/>
+              </a:spcBef>
+              <a:buClr>
+                <a:srgbClr val="000000"/>
+              </a:buClr>
+              <a:buFont typeface="Arial"/>
+              <a:buChar char="•"/>
+            </a:pPr>
+            <a:r>
+              <a:rPr lang="en-US" sz="2800" b="0" u="none" strike="noStrike">
+                <a:solidFill>
+                  <a:schemeClr val="dk1"/>
+                </a:solidFill>
+                <a:effectLst/>
+                <a:uFillTx/>
+                <a:latin typeface="Calibri"/>
+              </a:rPr>
+              <a:t>Click to edit Master text styles</a:t>
+            </a:r>
+            <a:endParaRPr lang="en-GB" sz="2800" b="0" u="none" strike="noStrike">
+              <a:solidFill>
+                <a:srgbClr val="000000"/>
+              </a:solidFill>
+              <a:effectLst/>
+              <a:uFillTx/>
+              <a:latin typeface="Arial"/>
+            </a:endParaRPr>
+          </a:p>
+          <a:p>
+            <a:pPr marL="685800" lvl="1" indent="-228600" defTabSz="914400">
+              <a:lnSpc>
+                <a:spcPct val="90000"/>
+              </a:lnSpc>
+              <a:spcBef>
+                <a:spcPts val="499"/>
+              </a:spcBef>
+              <a:buClr>
+                <a:srgbClr val="000000"/>
+              </a:buClr>
+              <a:buFont typeface="Arial"/>
+              <a:buChar char="•"/>
+            </a:pPr>
+            <a:r>
+              <a:rPr lang="en-US" sz="2400" b="0" u="none" strike="noStrike">
+                <a:solidFill>
+                  <a:schemeClr val="dk1"/>
+                </a:solidFill>
+                <a:effectLst/>
+                <a:uFillTx/>
+                <a:latin typeface="Calibri"/>
+              </a:rPr>
+              <a:t>Second level</a:t>
+            </a:r>
+            <a:endParaRPr lang="en-GB" sz="2400" b="0" u="none" strike="noStrike">
+              <a:solidFill>
+                <a:srgbClr val="000000"/>
+              </a:solidFill>
+              <a:effectLst/>
+              <a:uFillTx/>
+              <a:latin typeface="Arial"/>
+            </a:endParaRPr>
+          </a:p>
+          <a:p>
+            <a:pPr marL="1143000" lvl="2" indent="-228600" defTabSz="914400">
+              <a:lnSpc>
+                <a:spcPct val="90000"/>
+              </a:lnSpc>
+              <a:spcBef>
+                <a:spcPts val="499"/>
+              </a:spcBef>
+              <a:buClr>
+                <a:srgbClr val="000000"/>
+              </a:buClr>
+              <a:buFont typeface="Arial"/>
+              <a:buChar char="•"/>
+            </a:pPr>
+            <a:r>
+              <a:rPr lang="en-US" sz="2000" b="0" u="none" strike="noStrike">
+                <a:solidFill>
+                  <a:schemeClr val="dk1"/>
+                </a:solidFill>
+                <a:effectLst/>
+                <a:uFillTx/>
+                <a:latin typeface="Calibri"/>
+              </a:rPr>
+              <a:t>Third level</a:t>
+            </a:r>
+            <a:endParaRPr lang="en-GB" sz="2000" b="0" u="none" strike="noStrike">
+              <a:solidFill>
+                <a:srgbClr val="000000"/>
+              </a:solidFill>
+              <a:effectLst/>
+              <a:uFillTx/>
+              <a:latin typeface="Arial"/>
+            </a:endParaRPr>
+          </a:p>
+          <a:p>
+            <a:pPr marL="1600200" lvl="3" indent="-228600" defTabSz="914400">
+              <a:lnSpc>
+                <a:spcPct val="90000"/>
+              </a:lnSpc>
+              <a:spcBef>
+                <a:spcPts val="499"/>
+              </a:spcBef>
+              <a:buClr>
+                <a:srgbClr val="000000"/>
+              </a:buClr>
+              <a:buFont typeface="Arial"/>
+              <a:buChar char="•"/>
+            </a:pPr>
+            <a:r>
+              <a:rPr lang="en-US" sz="1800" b="0" u="none" strike="noStrike">
+                <a:solidFill>
+                  <a:schemeClr val="dk1"/>
+                </a:solidFill>
+                <a:effectLst/>
+                <a:uFillTx/>
+                <a:latin typeface="Calibri"/>
+              </a:rPr>
+              <a:t>Fourth level</a:t>
+            </a:r>
+            <a:endParaRPr lang="en-GB" sz="1800" b="0" u="none" strike="noStrike">
+              <a:solidFill>
+                <a:srgbClr val="000000"/>
+              </a:solidFill>
+              <a:effectLst/>
+              <a:uFillTx/>
+              <a:latin typeface="Arial"/>
+            </a:endParaRPr>
+          </a:p>
+          <a:p>
+            <a:pPr marL="2057400" lvl="4" indent="-228600" defTabSz="914400">
+              <a:lnSpc>
+                <a:spcPct val="90000"/>
+              </a:lnSpc>
+              <a:spcBef>
+                <a:spcPts val="499"/>
+              </a:spcBef>
+              <a:buClr>
+                <a:srgbClr val="000000"/>
+              </a:buClr>
+              <a:buFont typeface="Arial"/>
+              <a:buChar char="•"/>
+            </a:pPr>
+            <a:r>
+              <a:rPr lang="en-US" sz="1800" b="0" u="none" strike="noStrike">
+                <a:solidFill>
+                  <a:schemeClr val="dk1"/>
+                </a:solidFill>
+                <a:effectLst/>
+                <a:uFillTx/>
+                <a:latin typeface="Calibri"/>
+              </a:rPr>
+              <a:t>Fifth level</a:t>
+            </a:r>
+            <a:endParaRPr lang="en-GB" sz="1800" b="0" u="none" strike="noStrike">
+              <a:solidFill>
+                <a:srgbClr val="000000"/>
+              </a:solidFill>
+              <a:effectLst/>
+              <a:uFillTx/>
+              <a:latin typeface="Arial"/>
+            </a:endParaRPr>
+          </a:p>
+        </p:txBody>
+      </p:sp>
+      <p:sp>
+        <p:nvSpPr>
+          <p:cNvPr id="45" name="PlaceHolder 4"/>
           <p:cNvSpPr>
             <a:spLocks noGrp="1"/>
           </p:cNvSpPr>
@@ -5536,7 +5806,7 @@
         <p:spPr>
           <a:xfrm>
             <a:off x="838080" y="6356520"/>
-            <a:ext cx="2742840" cy="364680"/>
+            <a:ext cx="2742480" cy="364320"/>
           </a:xfrm>
           <a:prstGeom prst="rect">
             <a:avLst/>
@@ -5556,6 +5826,9 @@
                 <a:spcPct val="100000"/>
               </a:lnSpc>
               <a:buNone/>
+              <a:tabLst>
+                <a:tab algn="l" pos="0"/>
+              </a:tabLst>
               <a:defRPr lang="en-BE" sz="1200" b="0" u="none" strike="noStrike">
                 <a:solidFill>
                   <a:schemeClr val="dk1">
@@ -5574,6 +5847,9 @@
                 <a:spcPct val="100000"/>
               </a:lnSpc>
               <a:buNone/>
+              <a:tabLst>
+                <a:tab algn="l" pos="0"/>
+              </a:tabLst>
             </a:pPr>
             <a:r>
               <a:rPr lang="en-BE" sz="1200" b="0" u="none" strike="noStrike">
@@ -5601,7 +5877,7 @@
       </p:sp>
       <p:sp>
         <p:nvSpPr>
-          <p:cNvPr id="46" name="PlaceHolder 2"/>
+          <p:cNvPr id="46" name="PlaceHolder 5"/>
           <p:cNvSpPr>
             <a:spLocks noGrp="1"/>
           </p:cNvSpPr>
@@ -5612,7 +5888,7 @@
         <p:spPr>
           <a:xfrm>
             <a:off x="4038480" y="6356520"/>
-            <a:ext cx="4114440" cy="364680"/>
+            <a:ext cx="4114080" cy="364320"/>
           </a:xfrm>
           <a:prstGeom prst="rect">
             <a:avLst/>
@@ -5628,7 +5904,13 @@
           </a:bodyPr>
           <a:lstStyle>
             <a:lvl1pPr indent="0" algn="ctr">
-              <a:buNone/>
+              <a:lnSpc>
+                <a:spcPct val="100000"/>
+              </a:lnSpc>
+              <a:buNone/>
+              <a:tabLst>
+                <a:tab algn="l" pos="0"/>
+              </a:tabLst>
               <a:defRPr lang="en-GB" sz="1400" b="0" u="none" strike="noStrike">
                 <a:solidFill>
                   <a:srgbClr val="000000"/>
@@ -5641,7 +5923,13 @@
           </a:lstStyle>
           <a:p>
             <a:pPr indent="0" algn="ctr">
-              <a:buNone/>
+              <a:lnSpc>
+                <a:spcPct val="100000"/>
+              </a:lnSpc>
+              <a:buNone/>
+              <a:tabLst>
+                <a:tab algn="l" pos="0"/>
+              </a:tabLst>
             </a:pPr>
             <a:r>
               <a:rPr lang="en-GB" sz="1400" b="0" u="none" strike="noStrike">
@@ -5667,7 +5955,7 @@
       </p:sp>
       <p:sp>
         <p:nvSpPr>
-          <p:cNvPr id="47" name="PlaceHolder 3"/>
+          <p:cNvPr id="47" name="PlaceHolder 6"/>
           <p:cNvSpPr>
             <a:spLocks noGrp="1"/>
           </p:cNvSpPr>
@@ -5678,7 +5966,7 @@
         <p:spPr>
           <a:xfrm>
             <a:off x="8610480" y="6356520"/>
-            <a:ext cx="2742840" cy="364680"/>
+            <a:ext cx="2742480" cy="364320"/>
           </a:xfrm>
           <a:prstGeom prst="rect">
             <a:avLst/>
@@ -5698,6 +5986,9 @@
                 <a:spcPct val="100000"/>
               </a:lnSpc>
               <a:buNone/>
+              <a:tabLst>
+                <a:tab algn="l" pos="0"/>
+              </a:tabLst>
               <a:defRPr lang="en-BE" sz="1200" b="0" u="none" strike="noStrike">
                 <a:solidFill>
                   <a:schemeClr val="dk1">
@@ -5716,8 +6007,11 @@
                 <a:spcPct val="100000"/>
               </a:lnSpc>
               <a:buNone/>
-            </a:pPr>
-            <a:fld id="{0FB3FAB4-598A-4023-B32B-7CFAFC5B27A9}" type="slidenum">
+              <a:tabLst>
+                <a:tab algn="l" pos="0"/>
+              </a:tabLst>
+            </a:pPr>
+            <a:fld id="{627B57B1-4CCD-4491-882D-FC1F4F7D3DD4}" type="slidenum">
               <a:rPr lang="en-BE" sz="1200" b="0" u="none" strike="noStrike">
                 <a:solidFill>
                   <a:schemeClr val="dk1">
@@ -5812,7 +6106,7 @@
         <p:spPr>
           <a:xfrm>
             <a:off x="1523880" y="1122480"/>
-            <a:ext cx="9143640" cy="2387160"/>
+            <a:ext cx="9143280" cy="2386800"/>
           </a:xfrm>
           <a:prstGeom prst="rect">
             <a:avLst/>
@@ -5832,6 +6126,9 @@
                 <a:spcPct val="90000"/>
               </a:lnSpc>
               <a:buNone/>
+              <a:tabLst>
+                <a:tab algn="l" pos="0"/>
+              </a:tabLst>
             </a:pPr>
             <a:r>
               <a:rPr lang="en-US" sz="6000" b="0" u="none" strike="noStrike">
@@ -5844,13 +6141,13 @@
               </a:rPr>
               <a:t>GPP Exam: Zombie AI</a:t>
             </a:r>
-            <a:endParaRPr lang="en-BE" sz="6000" b="0" u="none" strike="noStrike">
-              <a:solidFill>
-                <a:schemeClr val="dk1"/>
-              </a:solidFill>
-              <a:effectLst/>
-              <a:uFillTx/>
-              <a:latin typeface="Calibri"/>
+            <a:endParaRPr lang="en-GB" sz="6000" b="0" u="none" strike="noStrike">
+              <a:solidFill>
+                <a:srgbClr val="000000"/>
+              </a:solidFill>
+              <a:effectLst/>
+              <a:uFillTx/>
+              <a:latin typeface="Arial"/>
             </a:endParaRPr>
           </a:p>
         </p:txBody>
@@ -5868,7 +6165,7 @@
         <p:spPr>
           <a:xfrm>
             <a:off x="1523880" y="3602160"/>
-            <a:ext cx="9143640" cy="1655280"/>
+            <a:ext cx="9143280" cy="1654920"/>
           </a:xfrm>
           <a:prstGeom prst="rect">
             <a:avLst/>
@@ -5962,7 +6259,7 @@
         <p:spPr>
           <a:xfrm>
             <a:off x="838080" y="365040"/>
-            <a:ext cx="10515240" cy="1325160"/>
+            <a:ext cx="10514880" cy="1324800"/>
           </a:xfrm>
           <a:prstGeom prst="rect">
             <a:avLst/>
@@ -5982,6 +6279,9 @@
                 <a:spcPct val="90000"/>
               </a:lnSpc>
               <a:buNone/>
+              <a:tabLst>
+                <a:tab algn="l" pos="0"/>
+              </a:tabLst>
             </a:pPr>
             <a:r>
               <a:rPr lang="en-US" sz="4400" b="0" u="none" strike="noStrike">
@@ -5994,13 +6294,13 @@
               </a:rPr>
               <a:t>Decision Making</a:t>
             </a:r>
-            <a:endParaRPr lang="en-BE" sz="4400" b="0" u="none" strike="noStrike">
-              <a:solidFill>
-                <a:schemeClr val="dk1"/>
-              </a:solidFill>
-              <a:effectLst/>
-              <a:uFillTx/>
-              <a:latin typeface="Calibri"/>
+            <a:endParaRPr lang="en-GB" sz="4400" b="0" u="none" strike="noStrike">
+              <a:solidFill>
+                <a:srgbClr val="000000"/>
+              </a:solidFill>
+              <a:effectLst/>
+              <a:uFillTx/>
+              <a:latin typeface="Arial"/>
             </a:endParaRPr>
           </a:p>
         </p:txBody>
@@ -6018,7 +6318,7 @@
         <p:spPr>
           <a:xfrm>
             <a:off x="1035720" y="1440000"/>
-            <a:ext cx="8864280" cy="4962600"/>
+            <a:ext cx="8863920" cy="4962240"/>
           </a:xfrm>
           <a:prstGeom prst="rect">
             <a:avLst/>
@@ -6072,7 +6372,7 @@
         <p:spPr>
           <a:xfrm>
             <a:off x="838080" y="365040"/>
-            <a:ext cx="10515240" cy="1325160"/>
+            <a:ext cx="10514880" cy="1324800"/>
           </a:xfrm>
           <a:prstGeom prst="rect">
             <a:avLst/>
@@ -6092,6 +6392,9 @@
                 <a:spcPct val="90000"/>
               </a:lnSpc>
               <a:buNone/>
+              <a:tabLst>
+                <a:tab algn="l" pos="0"/>
+              </a:tabLst>
             </a:pPr>
             <a:r>
               <a:rPr lang="en-US" sz="4400" b="0" u="none" strike="noStrike">
@@ -6104,13 +6407,13 @@
               </a:rPr>
               <a:t>Enemy handling</a:t>
             </a:r>
-            <a:endParaRPr lang="en-BE" sz="4400" b="0" u="none" strike="noStrike">
-              <a:solidFill>
-                <a:schemeClr val="dk1"/>
-              </a:solidFill>
-              <a:effectLst/>
-              <a:uFillTx/>
-              <a:latin typeface="Calibri"/>
+            <a:endParaRPr lang="en-GB" sz="4400" b="0" u="none" strike="noStrike">
+              <a:solidFill>
+                <a:srgbClr val="000000"/>
+              </a:solidFill>
+              <a:effectLst/>
+              <a:uFillTx/>
+              <a:latin typeface="Arial"/>
             </a:endParaRPr>
           </a:p>
         </p:txBody>
@@ -6128,7 +6431,7 @@
         <p:spPr>
           <a:xfrm>
             <a:off x="838080" y="1825560"/>
-            <a:ext cx="10515240" cy="4350960"/>
+            <a:ext cx="10514880" cy="4350600"/>
           </a:xfrm>
           <a:prstGeom prst="rect">
             <a:avLst/>
@@ -6167,13 +6470,13 @@
               </a:rPr>
               <a:t>Each movement tree node also has an evade blended in for each zombie</a:t>
             </a:r>
-            <a:endParaRPr lang="en-BE" sz="2800" b="0" u="none" strike="noStrike">
-              <a:solidFill>
-                <a:schemeClr val="dk1"/>
-              </a:solidFill>
-              <a:effectLst/>
-              <a:uFillTx/>
-              <a:latin typeface="Calibri"/>
+            <a:endParaRPr lang="en-GB" sz="2800" b="0" u="none" strike="noStrike">
+              <a:solidFill>
+                <a:srgbClr val="000000"/>
+              </a:solidFill>
+              <a:effectLst/>
+              <a:uFillTx/>
+              <a:latin typeface="Arial"/>
             </a:endParaRPr>
           </a:p>
           <a:p>
@@ -6201,13 +6504,13 @@
               </a:rPr>
               <a:t>When a zombie gets too close (500 for shotgun, 800 for pistol) The survivor faces them and then shoots</a:t>
             </a:r>
-            <a:endParaRPr lang="en-BE" sz="2800" b="0" u="none" strike="noStrike">
-              <a:solidFill>
-                <a:schemeClr val="dk1"/>
-              </a:solidFill>
-              <a:effectLst/>
-              <a:uFillTx/>
-              <a:latin typeface="Calibri"/>
+            <a:endParaRPr lang="en-GB" sz="2800" b="0" u="none" strike="noStrike">
+              <a:solidFill>
+                <a:srgbClr val="000000"/>
+              </a:solidFill>
+              <a:effectLst/>
+              <a:uFillTx/>
+              <a:latin typeface="Arial"/>
             </a:endParaRPr>
           </a:p>
           <a:p>
@@ -6237,13 +6540,13 @@
               </a:rPr>
               <a:t>USE IMAGES/GIFS</a:t>
             </a:r>
-            <a:endParaRPr lang="en-BE" sz="2800" b="0" u="none" strike="noStrike">
-              <a:solidFill>
-                <a:schemeClr val="dk1"/>
-              </a:solidFill>
-              <a:effectLst/>
-              <a:uFillTx/>
-              <a:latin typeface="Calibri"/>
+            <a:endParaRPr lang="en-GB" sz="2800" b="0" u="none" strike="noStrike">
+              <a:solidFill>
+                <a:srgbClr val="000000"/>
+              </a:solidFill>
+              <a:effectLst/>
+              <a:uFillTx/>
+              <a:latin typeface="Arial"/>
             </a:endParaRPr>
           </a:p>
         </p:txBody>
@@ -6291,7 +6594,7 @@
         <p:spPr>
           <a:xfrm>
             <a:off x="838080" y="365040"/>
-            <a:ext cx="10515240" cy="1325160"/>
+            <a:ext cx="10514880" cy="1324800"/>
           </a:xfrm>
           <a:prstGeom prst="rect">
             <a:avLst/>
@@ -6311,6 +6614,9 @@
                 <a:spcPct val="90000"/>
               </a:lnSpc>
               <a:buNone/>
+              <a:tabLst>
+                <a:tab algn="l" pos="0"/>
+              </a:tabLst>
             </a:pPr>
             <a:r>
               <a:rPr lang="en-US" sz="4400" b="0" u="none" strike="noStrike">
@@ -6323,13 +6629,13 @@
               </a:rPr>
               <a:t>Inventory</a:t>
             </a:r>
-            <a:endParaRPr lang="en-BE" sz="4400" b="0" u="none" strike="noStrike">
-              <a:solidFill>
-                <a:schemeClr val="dk1"/>
-              </a:solidFill>
-              <a:effectLst/>
-              <a:uFillTx/>
-              <a:latin typeface="Calibri"/>
+            <a:endParaRPr lang="en-GB" sz="4400" b="0" u="none" strike="noStrike">
+              <a:solidFill>
+                <a:srgbClr val="000000"/>
+              </a:solidFill>
+              <a:effectLst/>
+              <a:uFillTx/>
+              <a:latin typeface="Arial"/>
             </a:endParaRPr>
           </a:p>
         </p:txBody>
@@ -6347,7 +6653,7 @@
         <p:spPr>
           <a:xfrm>
             <a:off x="838080" y="1825560"/>
-            <a:ext cx="10515240" cy="4350960"/>
+            <a:ext cx="10514880" cy="4350600"/>
           </a:xfrm>
           <a:prstGeom prst="rect">
             <a:avLst/>
@@ -6386,13 +6692,13 @@
               </a:rPr>
               <a:t>Each perceived item is remembered (TArray)</a:t>
             </a:r>
-            <a:endParaRPr lang="en-BE" sz="2800" b="0" u="none" strike="noStrike">
-              <a:solidFill>
-                <a:schemeClr val="dk1"/>
-              </a:solidFill>
-              <a:effectLst/>
-              <a:uFillTx/>
-              <a:latin typeface="Calibri"/>
+            <a:endParaRPr lang="en-GB" sz="2800" b="0" u="none" strike="noStrike">
+              <a:solidFill>
+                <a:srgbClr val="000000"/>
+              </a:solidFill>
+              <a:effectLst/>
+              <a:uFillTx/>
+              <a:latin typeface="Arial"/>
             </a:endParaRPr>
           </a:p>
           <a:p>
@@ -6420,13 +6726,13 @@
               </a:rPr>
               <a:t>Fixed inventory slots (0=medkit, 1=weapon, other=food)</a:t>
             </a:r>
-            <a:endParaRPr lang="en-BE" sz="2800" b="0" u="none" strike="noStrike">
-              <a:solidFill>
-                <a:schemeClr val="dk1"/>
-              </a:solidFill>
-              <a:effectLst/>
-              <a:uFillTx/>
-              <a:latin typeface="Calibri"/>
+            <a:endParaRPr lang="en-GB" sz="2800" b="0" u="none" strike="noStrike">
+              <a:solidFill>
+                <a:srgbClr val="000000"/>
+              </a:solidFill>
+              <a:effectLst/>
+              <a:uFillTx/>
+              <a:latin typeface="Arial"/>
             </a:endParaRPr>
           </a:p>
           <a:p>
@@ -6454,13 +6760,13 @@
               </a:rPr>
               <a:t>Items are used when health or stamina threshold is reached based on the items value</a:t>
             </a:r>
-            <a:endParaRPr lang="en-BE" sz="2800" b="0" u="none" strike="noStrike">
-              <a:solidFill>
-                <a:schemeClr val="dk1"/>
-              </a:solidFill>
-              <a:effectLst/>
-              <a:uFillTx/>
-              <a:latin typeface="Calibri"/>
+            <a:endParaRPr lang="en-GB" sz="2800" b="0" u="none" strike="noStrike">
+              <a:solidFill>
+                <a:srgbClr val="000000"/>
+              </a:solidFill>
+              <a:effectLst/>
+              <a:uFillTx/>
+              <a:latin typeface="Arial"/>
             </a:endParaRPr>
           </a:p>
           <a:p>
@@ -6488,13 +6794,13 @@
               </a:rPr>
               <a:t>Items are thrown away after a use when their value is 0</a:t>
             </a:r>
-            <a:endParaRPr lang="en-BE" sz="2800" b="0" u="none" strike="noStrike">
-              <a:solidFill>
-                <a:schemeClr val="dk1"/>
-              </a:solidFill>
-              <a:effectLst/>
-              <a:uFillTx/>
-              <a:latin typeface="Calibri"/>
+            <a:endParaRPr lang="en-GB" sz="2800" b="0" u="none" strike="noStrike">
+              <a:solidFill>
+                <a:srgbClr val="000000"/>
+              </a:solidFill>
+              <a:effectLst/>
+              <a:uFillTx/>
+              <a:latin typeface="Arial"/>
             </a:endParaRPr>
           </a:p>
           <a:p>
@@ -6506,14 +6812,17 @@
                 <a:spcPts val="1001"/>
               </a:spcBef>
               <a:buNone/>
-            </a:pPr>
-            <a:endParaRPr lang="en-BE" sz="2800" b="0" u="none" strike="noStrike">
-              <a:solidFill>
-                <a:schemeClr val="dk1"/>
-              </a:solidFill>
-              <a:effectLst/>
-              <a:uFillTx/>
-              <a:latin typeface="Calibri"/>
+              <a:tabLst>
+                <a:tab algn="l" pos="0"/>
+              </a:tabLst>
+            </a:pPr>
+            <a:endParaRPr lang="en-GB" sz="2800" b="0" u="none" strike="noStrike">
+              <a:solidFill>
+                <a:srgbClr val="000000"/>
+              </a:solidFill>
+              <a:effectLst/>
+              <a:uFillTx/>
+              <a:latin typeface="Arial"/>
             </a:endParaRPr>
           </a:p>
         </p:txBody>
@@ -6561,7 +6870,7 @@
         <p:spPr>
           <a:xfrm>
             <a:off x="838080" y="365040"/>
-            <a:ext cx="10515240" cy="1325160"/>
+            <a:ext cx="10514880" cy="1324800"/>
           </a:xfrm>
           <a:prstGeom prst="rect">
             <a:avLst/>
@@ -6581,6 +6890,9 @@
                 <a:spcPct val="90000"/>
               </a:lnSpc>
               <a:buNone/>
+              <a:tabLst>
+                <a:tab algn="l" pos="0"/>
+              </a:tabLst>
             </a:pPr>
             <a:r>
               <a:rPr lang="en-US" sz="4400" b="0" u="none" strike="noStrike">
@@ -6593,13 +6905,13 @@
               </a:rPr>
               <a:t>Movement - Steering</a:t>
             </a:r>
-            <a:endParaRPr lang="en-BE" sz="4400" b="0" u="none" strike="noStrike">
-              <a:solidFill>
-                <a:schemeClr val="dk1"/>
-              </a:solidFill>
-              <a:effectLst/>
-              <a:uFillTx/>
-              <a:latin typeface="Calibri"/>
+            <a:endParaRPr lang="en-GB" sz="4400" b="0" u="none" strike="noStrike">
+              <a:solidFill>
+                <a:srgbClr val="000000"/>
+              </a:solidFill>
+              <a:effectLst/>
+              <a:uFillTx/>
+              <a:latin typeface="Arial"/>
             </a:endParaRPr>
           </a:p>
         </p:txBody>
@@ -6617,7 +6929,7 @@
         <p:spPr>
           <a:xfrm>
             <a:off x="838080" y="1825560"/>
-            <a:ext cx="10515240" cy="4350960"/>
+            <a:ext cx="10514880" cy="4350600"/>
           </a:xfrm>
           <a:prstGeom prst="rect">
             <a:avLst/>
@@ -6656,13 +6968,13 @@
               </a:rPr>
               <a:t>Sprint only used when using seek (only when destination is known)</a:t>
             </a:r>
-            <a:endParaRPr lang="en-BE" sz="2800" b="0" u="none" strike="noStrike">
-              <a:solidFill>
-                <a:schemeClr val="dk1"/>
-              </a:solidFill>
-              <a:effectLst/>
-              <a:uFillTx/>
-              <a:latin typeface="Calibri"/>
+            <a:endParaRPr lang="en-GB" sz="2800" b="0" u="none" strike="noStrike">
+              <a:solidFill>
+                <a:srgbClr val="000000"/>
+              </a:solidFill>
+              <a:effectLst/>
+              <a:uFillTx/>
+              <a:latin typeface="Arial"/>
             </a:endParaRPr>
           </a:p>
           <a:p>
@@ -6690,13 +7002,13 @@
               </a:rPr>
               <a:t>Blended steering using:</a:t>
             </a:r>
-            <a:endParaRPr lang="en-BE" sz="2800" b="0" u="none" strike="noStrike">
-              <a:solidFill>
-                <a:schemeClr val="dk1"/>
-              </a:solidFill>
-              <a:effectLst/>
-              <a:uFillTx/>
-              <a:latin typeface="Calibri"/>
+            <a:endParaRPr lang="en-GB" sz="2800" b="0" u="none" strike="noStrike">
+              <a:solidFill>
+                <a:srgbClr val="000000"/>
+              </a:solidFill>
+              <a:effectLst/>
+              <a:uFillTx/>
+              <a:latin typeface="Arial"/>
             </a:endParaRPr>
           </a:p>
           <a:p>
@@ -6725,13 +7037,13 @@
               </a:rPr>
               <a:t>Seek (optional)</a:t>
             </a:r>
-            <a:endParaRPr lang="en-BE" sz="2800" b="0" u="none" strike="noStrike">
-              <a:solidFill>
-                <a:schemeClr val="dk1"/>
-              </a:solidFill>
-              <a:effectLst/>
-              <a:uFillTx/>
-              <a:latin typeface="Calibri"/>
+            <a:endParaRPr lang="en-GB" sz="2800" b="0" u="none" strike="noStrike">
+              <a:solidFill>
+                <a:srgbClr val="000000"/>
+              </a:solidFill>
+              <a:effectLst/>
+              <a:uFillTx/>
+              <a:latin typeface="Arial"/>
             </a:endParaRPr>
           </a:p>
           <a:p>
@@ -6760,13 +7072,13 @@
               </a:rPr>
               <a:t>Wander</a:t>
             </a:r>
-            <a:endParaRPr lang="en-BE" sz="2800" b="0" u="none" strike="noStrike">
-              <a:solidFill>
-                <a:schemeClr val="dk1"/>
-              </a:solidFill>
-              <a:effectLst/>
-              <a:uFillTx/>
-              <a:latin typeface="Calibri"/>
+            <a:endParaRPr lang="en-GB" sz="2800" b="0" u="none" strike="noStrike">
+              <a:solidFill>
+                <a:srgbClr val="000000"/>
+              </a:solidFill>
+              <a:effectLst/>
+              <a:uFillTx/>
+              <a:latin typeface="Arial"/>
             </a:endParaRPr>
           </a:p>
           <a:p>
@@ -6795,48 +7107,13 @@
               </a:rPr>
               <a:t>Evade (one for each remembered zombie)</a:t>
             </a:r>
-            <a:endParaRPr lang="en-BE" sz="2800" b="0" u="none" strike="noStrike">
-              <a:solidFill>
-                <a:schemeClr val="dk1"/>
-              </a:solidFill>
-              <a:effectLst/>
-              <a:uFillTx/>
-              <a:latin typeface="Calibri"/>
-            </a:endParaRPr>
-          </a:p>
-          <a:p>
-            <a:pPr marL="864000" lvl="1" indent="-324000" defTabSz="914400">
-              <a:lnSpc>
-                <a:spcPct val="90000"/>
-              </a:lnSpc>
-              <a:spcBef>
-                <a:spcPts val="1134"/>
-              </a:spcBef>
-              <a:buClr>
-                <a:srgbClr val="000000"/>
-              </a:buClr>
-              <a:buSzPct val="75000"/>
-              <a:buFont typeface="Symbol" charset="2"/>
-              <a:buChar char=""/>
-            </a:pPr>
-            <a:r>
-              <a:rPr lang="en-US" sz="2800" b="0" u="none" strike="noStrike">
-                <a:solidFill>
-                  <a:srgbClr val="000000"/>
-                </a:solidFill>
-                <a:effectLst/>
-                <a:uFillTx/>
-                <a:latin typeface="Calibri"/>
-              </a:rPr>
-              <a:t>Flee (one for each purge zone)</a:t>
-            </a:r>
-            <a:endParaRPr lang="en-BE" sz="2800" b="0" u="none" strike="noStrike">
-              <a:solidFill>
-                <a:schemeClr val="dk1"/>
-              </a:solidFill>
-              <a:effectLst/>
-              <a:uFillTx/>
-              <a:latin typeface="Calibri"/>
+            <a:endParaRPr lang="en-GB" sz="2800" b="0" u="none" strike="noStrike">
+              <a:solidFill>
+                <a:srgbClr val="000000"/>
+              </a:solidFill>
+              <a:effectLst/>
+              <a:uFillTx/>
+              <a:latin typeface="Arial"/>
             </a:endParaRPr>
           </a:p>
           <a:p>
@@ -6852,13 +7129,13 @@
                 <a:tab algn="l" pos="0"/>
               </a:tabLst>
             </a:pPr>
-            <a:endParaRPr lang="en-BE" sz="2800" b="0" u="none" strike="noStrike">
-              <a:solidFill>
-                <a:schemeClr val="dk1"/>
-              </a:solidFill>
-              <a:effectLst/>
-              <a:uFillTx/>
-              <a:latin typeface="Calibri"/>
+            <a:endParaRPr lang="en-GB" sz="2800" b="0" u="none" strike="noStrike">
+              <a:solidFill>
+                <a:srgbClr val="000000"/>
+              </a:solidFill>
+              <a:effectLst/>
+              <a:uFillTx/>
+              <a:latin typeface="Arial"/>
             </a:endParaRPr>
           </a:p>
         </p:txBody>
@@ -6906,7 +7183,7 @@
         <p:spPr>
           <a:xfrm>
             <a:off x="838080" y="365040"/>
-            <a:ext cx="10515240" cy="1325160"/>
+            <a:ext cx="10514880" cy="1324800"/>
           </a:xfrm>
           <a:prstGeom prst="rect">
             <a:avLst/>
@@ -6926,6 +7203,9 @@
                 <a:spcPct val="90000"/>
               </a:lnSpc>
               <a:buNone/>
+              <a:tabLst>
+                <a:tab algn="l" pos="0"/>
+              </a:tabLst>
             </a:pPr>
             <a:r>
               <a:rPr lang="en-US" sz="4400" b="0" u="none" strike="noStrike">
@@ -6938,13 +7218,13 @@
               </a:rPr>
               <a:t>Movement - Exploration</a:t>
             </a:r>
-            <a:endParaRPr lang="en-BE" sz="4400" b="0" u="none" strike="noStrike">
-              <a:solidFill>
-                <a:schemeClr val="dk1"/>
-              </a:solidFill>
-              <a:effectLst/>
-              <a:uFillTx/>
-              <a:latin typeface="Calibri"/>
+            <a:endParaRPr lang="en-GB" sz="4400" b="0" u="none" strike="noStrike">
+              <a:solidFill>
+                <a:srgbClr val="000000"/>
+              </a:solidFill>
+              <a:effectLst/>
+              <a:uFillTx/>
+              <a:latin typeface="Arial"/>
             </a:endParaRPr>
           </a:p>
         </p:txBody>
@@ -6962,7 +7242,7 @@
         <p:spPr>
           <a:xfrm>
             <a:off x="838080" y="1825560"/>
-            <a:ext cx="10515240" cy="4350960"/>
+            <a:ext cx="10514880" cy="4350600"/>
           </a:xfrm>
           <a:prstGeom prst="rect">
             <a:avLst/>
@@ -7001,13 +7281,13 @@
               </a:rPr>
               <a:t>All perceived houses are remembered</a:t>
             </a:r>
-            <a:endParaRPr lang="en-BE" sz="2800" b="0" u="none" strike="noStrike">
-              <a:solidFill>
-                <a:schemeClr val="dk1"/>
-              </a:solidFill>
-              <a:effectLst/>
-              <a:uFillTx/>
-              <a:latin typeface="Calibri"/>
+            <a:endParaRPr lang="en-GB" sz="2800" b="0" u="none" strike="noStrike">
+              <a:solidFill>
+                <a:srgbClr val="000000"/>
+              </a:solidFill>
+              <a:effectLst/>
+              <a:uFillTx/>
+              <a:latin typeface="Arial"/>
             </a:endParaRPr>
           </a:p>
           <a:p>
@@ -7035,13 +7315,13 @@
               </a:rPr>
               <a:t>When no pickups are needed seek the closest unvisited house</a:t>
             </a:r>
-            <a:endParaRPr lang="en-BE" sz="2800" b="0" u="none" strike="noStrike">
-              <a:solidFill>
-                <a:schemeClr val="dk1"/>
-              </a:solidFill>
-              <a:effectLst/>
-              <a:uFillTx/>
-              <a:latin typeface="Calibri"/>
+            <a:endParaRPr lang="en-GB" sz="2800" b="0" u="none" strike="noStrike">
+              <a:solidFill>
+                <a:srgbClr val="000000"/>
+              </a:solidFill>
+              <a:effectLst/>
+              <a:uFillTx/>
+              <a:latin typeface="Arial"/>
             </a:endParaRPr>
           </a:p>
           <a:p>
@@ -7069,13 +7349,13 @@
               </a:rPr>
               <a:t>When inside spin and add to visited houses</a:t>
             </a:r>
-            <a:endParaRPr lang="en-BE" sz="2800" b="0" u="none" strike="noStrike">
-              <a:solidFill>
-                <a:schemeClr val="dk1"/>
-              </a:solidFill>
-              <a:effectLst/>
-              <a:uFillTx/>
-              <a:latin typeface="Calibri"/>
+            <a:endParaRPr lang="en-GB" sz="2800" b="0" u="none" strike="noStrike">
+              <a:solidFill>
+                <a:srgbClr val="000000"/>
+              </a:solidFill>
+              <a:effectLst/>
+              <a:uFillTx/>
+              <a:latin typeface="Arial"/>
             </a:endParaRPr>
           </a:p>
           <a:p>
@@ -7103,13 +7383,13 @@
               </a:rPr>
               <a:t>No items and no houses left? Then we just wander around</a:t>
             </a:r>
-            <a:endParaRPr lang="en-BE" sz="2800" b="0" u="none" strike="noStrike">
-              <a:solidFill>
-                <a:schemeClr val="dk1"/>
-              </a:solidFill>
-              <a:effectLst/>
-              <a:uFillTx/>
-              <a:latin typeface="Calibri"/>
+            <a:endParaRPr lang="en-GB" sz="2800" b="0" u="none" strike="noStrike">
+              <a:solidFill>
+                <a:srgbClr val="000000"/>
+              </a:solidFill>
+              <a:effectLst/>
+              <a:uFillTx/>
+              <a:latin typeface="Arial"/>
             </a:endParaRPr>
           </a:p>
           <a:p>
@@ -7139,13 +7419,13 @@
               </a:rPr>
               <a:t>USE IMAGES/GIFS</a:t>
             </a:r>
-            <a:endParaRPr lang="en-BE" sz="2800" b="0" u="none" strike="noStrike">
-              <a:solidFill>
-                <a:schemeClr val="dk1"/>
-              </a:solidFill>
-              <a:effectLst/>
-              <a:uFillTx/>
-              <a:latin typeface="Calibri"/>
+            <a:endParaRPr lang="en-GB" sz="2800" b="0" u="none" strike="noStrike">
+              <a:solidFill>
+                <a:srgbClr val="000000"/>
+              </a:solidFill>
+              <a:effectLst/>
+              <a:uFillTx/>
+              <a:latin typeface="Arial"/>
             </a:endParaRPr>
           </a:p>
           <a:p>
@@ -7161,13 +7441,13 @@
                 <a:tab algn="l" pos="0"/>
               </a:tabLst>
             </a:pPr>
-            <a:endParaRPr lang="en-BE" sz="2800" b="0" u="none" strike="noStrike">
-              <a:solidFill>
-                <a:schemeClr val="dk1"/>
-              </a:solidFill>
-              <a:effectLst/>
-              <a:uFillTx/>
-              <a:latin typeface="Calibri"/>
+            <a:endParaRPr lang="en-GB" sz="2800" b="0" u="none" strike="noStrike">
+              <a:solidFill>
+                <a:srgbClr val="000000"/>
+              </a:solidFill>
+              <a:effectLst/>
+              <a:uFillTx/>
+              <a:latin typeface="Arial"/>
             </a:endParaRPr>
           </a:p>
         </p:txBody>
